--- a/clases/clase00/Clase_00_slides.pptx
+++ b/clases/clase00/Clase_00_slides.pptx
@@ -5,25 +5,28 @@
     <p:sldMasterId id="2147483648" r:id="rId1"/>
   </p:sldMasterIdLst>
   <p:notesMasterIdLst>
-    <p:notesMasterId r:id="rId18"/>
+    <p:notesMasterId r:id="rId21"/>
   </p:notesMasterIdLst>
   <p:sldIdLst>
     <p:sldId id="256" r:id="rId2"/>
-    <p:sldId id="257" r:id="rId3"/>
-    <p:sldId id="258" r:id="rId4"/>
-    <p:sldId id="267" r:id="rId5"/>
-    <p:sldId id="268" r:id="rId6"/>
-    <p:sldId id="259" r:id="rId7"/>
-    <p:sldId id="260" r:id="rId8"/>
-    <p:sldId id="261" r:id="rId9"/>
-    <p:sldId id="271" r:id="rId10"/>
-    <p:sldId id="262" r:id="rId11"/>
-    <p:sldId id="263" r:id="rId12"/>
-    <p:sldId id="272" r:id="rId13"/>
-    <p:sldId id="274" r:id="rId14"/>
-    <p:sldId id="264" r:id="rId15"/>
-    <p:sldId id="269" r:id="rId16"/>
-    <p:sldId id="266" r:id="rId17"/>
+    <p:sldId id="275" r:id="rId3"/>
+    <p:sldId id="257" r:id="rId4"/>
+    <p:sldId id="258" r:id="rId5"/>
+    <p:sldId id="267" r:id="rId6"/>
+    <p:sldId id="268" r:id="rId7"/>
+    <p:sldId id="259" r:id="rId8"/>
+    <p:sldId id="260" r:id="rId9"/>
+    <p:sldId id="276" r:id="rId10"/>
+    <p:sldId id="261" r:id="rId11"/>
+    <p:sldId id="271" r:id="rId12"/>
+    <p:sldId id="262" r:id="rId13"/>
+    <p:sldId id="263" r:id="rId14"/>
+    <p:sldId id="272" r:id="rId15"/>
+    <p:sldId id="274" r:id="rId16"/>
+    <p:sldId id="264" r:id="rId17"/>
+    <p:sldId id="269" r:id="rId18"/>
+    <p:sldId id="277" r:id="rId19"/>
+    <p:sldId id="266" r:id="rId20"/>
   </p:sldIdLst>
   <p:sldSz cx="9144000" cy="5143500" type="screen16x9"/>
   <p:notesSz cx="5143500" cy="9144000"/>
@@ -425,6 +428,114 @@
   <p:cSld>
     <p:spTree>
       <p:nvGrpSpPr>
+        <p:cNvPr id="1" name="">
+          <a:extLst>
+            <a:ext uri="{FF2B5EF4-FFF2-40B4-BE49-F238E27FC236}">
+              <a16:creationId xmlns:a16="http://schemas.microsoft.com/office/drawing/2014/main" id="{F93D6CA0-7D0B-E1AF-93E8-48533E3AD205}"/>
+            </a:ext>
+          </a:extLst>
+        </p:cNvPr>
+        <p:cNvGrpSpPr/>
+        <p:nvPr/>
+      </p:nvGrpSpPr>
+      <p:grpSpPr>
+        <a:xfrm>
+          <a:off x="0" y="0"/>
+          <a:ext cx="0" cy="0"/>
+          <a:chOff x="0" y="0"/>
+          <a:chExt cx="0" cy="0"/>
+        </a:xfrm>
+      </p:grpSpPr>
+      <p:sp>
+        <p:nvSpPr>
+          <p:cNvPr id="2" name="Slide Image Placeholder 1">
+            <a:extLst>
+              <a:ext uri="{FF2B5EF4-FFF2-40B4-BE49-F238E27FC236}">
+                <a16:creationId xmlns:a16="http://schemas.microsoft.com/office/drawing/2014/main" id="{522AF582-6A74-4665-513A-530E65F85C5A}"/>
+              </a:ext>
+            </a:extLst>
+          </p:cNvPr>
+          <p:cNvSpPr>
+            <a:spLocks noGrp="1" noRot="1" noChangeAspect="1"/>
+          </p:cNvSpPr>
+          <p:nvPr>
+            <p:ph type="sldImg"/>
+          </p:nvPr>
+        </p:nvSpPr>
+        <p:spPr/>
+      </p:sp>
+      <p:sp>
+        <p:nvSpPr>
+          <p:cNvPr id="3" name="Notes Placeholder 2">
+            <a:extLst>
+              <a:ext uri="{FF2B5EF4-FFF2-40B4-BE49-F238E27FC236}">
+                <a16:creationId xmlns:a16="http://schemas.microsoft.com/office/drawing/2014/main" id="{1A4D9E4A-638E-F326-A8FD-48A11D5F5DC2}"/>
+              </a:ext>
+            </a:extLst>
+          </p:cNvPr>
+          <p:cNvSpPr>
+            <a:spLocks noGrp="1"/>
+          </p:cNvSpPr>
+          <p:nvPr>
+            <p:ph type="body" idx="1"/>
+          </p:nvPr>
+        </p:nvSpPr>
+        <p:spPr/>
+        <p:txBody>
+          <a:bodyPr/>
+          <a:lstStyle/>
+          <a:p>
+            <a:endParaRPr lang="en-US" dirty="0"/>
+          </a:p>
+        </p:txBody>
+      </p:sp>
+      <p:sp>
+        <p:nvSpPr>
+          <p:cNvPr id="4" name="Slide Number Placeholder 3">
+            <a:extLst>
+              <a:ext uri="{FF2B5EF4-FFF2-40B4-BE49-F238E27FC236}">
+                <a16:creationId xmlns:a16="http://schemas.microsoft.com/office/drawing/2014/main" id="{44B2D0B4-7194-6C99-8AF0-C6693BD98418}"/>
+              </a:ext>
+            </a:extLst>
+          </p:cNvPr>
+          <p:cNvSpPr>
+            <a:spLocks noGrp="1"/>
+          </p:cNvSpPr>
+          <p:nvPr>
+            <p:ph type="sldNum" sz="quarter" idx="10"/>
+          </p:nvPr>
+        </p:nvSpPr>
+        <p:spPr/>
+        <p:txBody>
+          <a:bodyPr/>
+          <a:lstStyle/>
+          <a:p>
+            <a:fld id="{F7021451-1387-4CA6-816F-3879F97B5CBC}" type="slidenum">
+              <a:rPr lang="en-US"/>
+              <a:t>11</a:t>
+            </a:fld>
+            <a:endParaRPr lang="en-US"/>
+          </a:p>
+        </p:txBody>
+      </p:sp>
+    </p:spTree>
+    <p:extLst>
+      <p:ext uri="{BB962C8B-B14F-4D97-AF65-F5344CB8AC3E}">
+        <p14:creationId xmlns:p14="http://schemas.microsoft.com/office/powerpoint/2010/main" val="203144072"/>
+      </p:ext>
+    </p:extLst>
+  </p:cSld>
+  <p:clrMapOvr>
+    <a:masterClrMapping/>
+  </p:clrMapOvr>
+</p:notes>
+</file>
+
+<file path=ppt/notesSlides/notesSlide12.xml><?xml version="1.0" encoding="utf-8"?>
+<p:notes xmlns:a="http://schemas.openxmlformats.org/drawingml/2006/main" xmlns:r="http://schemas.openxmlformats.org/officeDocument/2006/relationships" xmlns:p="http://schemas.openxmlformats.org/presentationml/2006/main">
+  <p:cSld>
+    <p:spTree>
+      <p:nvGrpSpPr>
         <p:cNvPr id="1" name=""/>
         <p:cNvGrpSpPr/>
         <p:nvPr/>
@@ -485,7 +596,7 @@
           <a:p>
             <a:fld id="{F7021451-1387-4CA6-816F-3879F97B5CBC}" type="slidenum">
               <a:rPr lang="en-US"/>
-              <a:t>11</a:t>
+              <a:t>12</a:t>
             </a:fld>
             <a:endParaRPr lang="en-US"/>
           </a:p>
@@ -504,7 +615,91 @@
 </p:notes>
 </file>
 
-<file path=ppt/notesSlides/notesSlide12.xml><?xml version="1.0" encoding="utf-8"?>
+<file path=ppt/notesSlides/notesSlide13.xml><?xml version="1.0" encoding="utf-8"?>
+<p:notes xmlns:a="http://schemas.openxmlformats.org/drawingml/2006/main" xmlns:r="http://schemas.openxmlformats.org/officeDocument/2006/relationships" xmlns:p="http://schemas.openxmlformats.org/presentationml/2006/main">
+  <p:cSld>
+    <p:spTree>
+      <p:nvGrpSpPr>
+        <p:cNvPr id="1" name=""/>
+        <p:cNvGrpSpPr/>
+        <p:nvPr/>
+      </p:nvGrpSpPr>
+      <p:grpSpPr>
+        <a:xfrm>
+          <a:off x="0" y="0"/>
+          <a:ext cx="0" cy="0"/>
+          <a:chOff x="0" y="0"/>
+          <a:chExt cx="0" cy="0"/>
+        </a:xfrm>
+      </p:grpSpPr>
+      <p:sp>
+        <p:nvSpPr>
+          <p:cNvPr id="2" name="Slide Image Placeholder 1"/>
+          <p:cNvSpPr>
+            <a:spLocks noGrp="1" noRot="1" noChangeAspect="1"/>
+          </p:cNvSpPr>
+          <p:nvPr>
+            <p:ph type="sldImg"/>
+          </p:nvPr>
+        </p:nvSpPr>
+        <p:spPr/>
+      </p:sp>
+      <p:sp>
+        <p:nvSpPr>
+          <p:cNvPr id="3" name="Notes Placeholder 2"/>
+          <p:cNvSpPr>
+            <a:spLocks noGrp="1"/>
+          </p:cNvSpPr>
+          <p:nvPr>
+            <p:ph type="body" idx="1"/>
+          </p:nvPr>
+        </p:nvSpPr>
+        <p:spPr/>
+        <p:txBody>
+          <a:bodyPr/>
+          <a:lstStyle/>
+          <a:p>
+            <a:endParaRPr lang="en-US" dirty="0"/>
+          </a:p>
+        </p:txBody>
+      </p:sp>
+      <p:sp>
+        <p:nvSpPr>
+          <p:cNvPr id="4" name="Slide Number Placeholder 3"/>
+          <p:cNvSpPr>
+            <a:spLocks noGrp="1"/>
+          </p:cNvSpPr>
+          <p:nvPr>
+            <p:ph type="sldNum" sz="quarter" idx="10"/>
+          </p:nvPr>
+        </p:nvSpPr>
+        <p:spPr/>
+        <p:txBody>
+          <a:bodyPr/>
+          <a:lstStyle/>
+          <a:p>
+            <a:fld id="{F7021451-1387-4CA6-816F-3879F97B5CBC}" type="slidenum">
+              <a:rPr lang="en-US"/>
+              <a:t>13</a:t>
+            </a:fld>
+            <a:endParaRPr lang="en-US"/>
+          </a:p>
+        </p:txBody>
+      </p:sp>
+    </p:spTree>
+    <p:extLst>
+      <p:ext uri="{BB962C8B-B14F-4D97-AF65-F5344CB8AC3E}">
+        <p14:creationId xmlns:p14="http://schemas.microsoft.com/office/powerpoint/2010/main" val="1024086991"/>
+      </p:ext>
+    </p:extLst>
+  </p:cSld>
+  <p:clrMapOvr>
+    <a:masterClrMapping/>
+  </p:clrMapOvr>
+</p:notes>
+</file>
+
+<file path=ppt/notesSlides/notesSlide14.xml><?xml version="1.0" encoding="utf-8"?>
 <p:notes xmlns:a="http://schemas.openxmlformats.org/drawingml/2006/main" xmlns:r="http://schemas.openxmlformats.org/officeDocument/2006/relationships" xmlns:p="http://schemas.openxmlformats.org/presentationml/2006/main">
   <p:cSld>
     <p:spTree>
@@ -593,7 +788,7 @@
           <a:p>
             <a:fld id="{F7021451-1387-4CA6-816F-3879F97B5CBC}" type="slidenum">
               <a:rPr lang="en-US"/>
-              <a:t>12</a:t>
+              <a:t>14</a:t>
             </a:fld>
             <a:endParaRPr lang="en-US"/>
           </a:p>
@@ -612,7 +807,7 @@
 </p:notes>
 </file>
 
-<file path=ppt/notesSlides/notesSlide13.xml><?xml version="1.0" encoding="utf-8"?>
+<file path=ppt/notesSlides/notesSlide15.xml><?xml version="1.0" encoding="utf-8"?>
 <p:notes xmlns:a="http://schemas.openxmlformats.org/drawingml/2006/main" xmlns:r="http://schemas.openxmlformats.org/officeDocument/2006/relationships" xmlns:p="http://schemas.openxmlformats.org/presentationml/2006/main">
   <p:cSld>
     <p:spTree>
@@ -701,7 +896,7 @@
           <a:p>
             <a:fld id="{F7021451-1387-4CA6-816F-3879F97B5CBC}" type="slidenum">
               <a:rPr lang="en-US"/>
-              <a:t>13</a:t>
+              <a:t>15</a:t>
             </a:fld>
             <a:endParaRPr lang="en-US"/>
           </a:p>
@@ -711,198 +906,6 @@
     <p:extLst>
       <p:ext uri="{BB962C8B-B14F-4D97-AF65-F5344CB8AC3E}">
         <p14:creationId xmlns:p14="http://schemas.microsoft.com/office/powerpoint/2010/main" val="620516777"/>
-      </p:ext>
-    </p:extLst>
-  </p:cSld>
-  <p:clrMapOvr>
-    <a:masterClrMapping/>
-  </p:clrMapOvr>
-</p:notes>
-</file>
-
-<file path=ppt/notesSlides/notesSlide14.xml><?xml version="1.0" encoding="utf-8"?>
-<p:notes xmlns:a="http://schemas.openxmlformats.org/drawingml/2006/main" xmlns:r="http://schemas.openxmlformats.org/officeDocument/2006/relationships" xmlns:p="http://schemas.openxmlformats.org/presentationml/2006/main">
-  <p:cSld>
-    <p:spTree>
-      <p:nvGrpSpPr>
-        <p:cNvPr id="1" name=""/>
-        <p:cNvGrpSpPr/>
-        <p:nvPr/>
-      </p:nvGrpSpPr>
-      <p:grpSpPr>
-        <a:xfrm>
-          <a:off x="0" y="0"/>
-          <a:ext cx="0" cy="0"/>
-          <a:chOff x="0" y="0"/>
-          <a:chExt cx="0" cy="0"/>
-        </a:xfrm>
-      </p:grpSpPr>
-      <p:sp>
-        <p:nvSpPr>
-          <p:cNvPr id="2" name="Slide Image Placeholder 1"/>
-          <p:cNvSpPr>
-            <a:spLocks noGrp="1" noRot="1" noChangeAspect="1"/>
-          </p:cNvSpPr>
-          <p:nvPr>
-            <p:ph type="sldImg"/>
-          </p:nvPr>
-        </p:nvSpPr>
-        <p:spPr/>
-      </p:sp>
-      <p:sp>
-        <p:nvSpPr>
-          <p:cNvPr id="3" name="Notes Placeholder 2"/>
-          <p:cNvSpPr>
-            <a:spLocks noGrp="1"/>
-          </p:cNvSpPr>
-          <p:nvPr>
-            <p:ph type="body" idx="1"/>
-          </p:nvPr>
-        </p:nvSpPr>
-        <p:spPr/>
-        <p:txBody>
-          <a:bodyPr/>
-          <a:lstStyle/>
-          <a:p>
-            <a:endParaRPr lang="en-US" dirty="0"/>
-          </a:p>
-        </p:txBody>
-      </p:sp>
-      <p:sp>
-        <p:nvSpPr>
-          <p:cNvPr id="4" name="Slide Number Placeholder 3"/>
-          <p:cNvSpPr>
-            <a:spLocks noGrp="1"/>
-          </p:cNvSpPr>
-          <p:nvPr>
-            <p:ph type="sldNum" sz="quarter" idx="10"/>
-          </p:nvPr>
-        </p:nvSpPr>
-        <p:spPr/>
-        <p:txBody>
-          <a:bodyPr/>
-          <a:lstStyle/>
-          <a:p>
-            <a:fld id="{F7021451-1387-4CA6-816F-3879F97B5CBC}" type="slidenum">
-              <a:rPr lang="en-US"/>
-              <a:t>14</a:t>
-            </a:fld>
-            <a:endParaRPr lang="en-US"/>
-          </a:p>
-        </p:txBody>
-      </p:sp>
-    </p:spTree>
-    <p:extLst>
-      <p:ext uri="{BB962C8B-B14F-4D97-AF65-F5344CB8AC3E}">
-        <p14:creationId xmlns:p14="http://schemas.microsoft.com/office/powerpoint/2010/main" val="1024086991"/>
-      </p:ext>
-    </p:extLst>
-  </p:cSld>
-  <p:clrMapOvr>
-    <a:masterClrMapping/>
-  </p:clrMapOvr>
-</p:notes>
-</file>
-
-<file path=ppt/notesSlides/notesSlide15.xml><?xml version="1.0" encoding="utf-8"?>
-<p:notes xmlns:a="http://schemas.openxmlformats.org/drawingml/2006/main" xmlns:r="http://schemas.openxmlformats.org/officeDocument/2006/relationships" xmlns:p="http://schemas.openxmlformats.org/presentationml/2006/main">
-  <p:cSld>
-    <p:spTree>
-      <p:nvGrpSpPr>
-        <p:cNvPr id="1" name="">
-          <a:extLst>
-            <a:ext uri="{FF2B5EF4-FFF2-40B4-BE49-F238E27FC236}">
-              <a16:creationId xmlns:a16="http://schemas.microsoft.com/office/drawing/2014/main" id="{3D3F1408-0FDE-FB2E-01CD-20C20E2811F2}"/>
-            </a:ext>
-          </a:extLst>
-        </p:cNvPr>
-        <p:cNvGrpSpPr/>
-        <p:nvPr/>
-      </p:nvGrpSpPr>
-      <p:grpSpPr>
-        <a:xfrm>
-          <a:off x="0" y="0"/>
-          <a:ext cx="0" cy="0"/>
-          <a:chOff x="0" y="0"/>
-          <a:chExt cx="0" cy="0"/>
-        </a:xfrm>
-      </p:grpSpPr>
-      <p:sp>
-        <p:nvSpPr>
-          <p:cNvPr id="2" name="Slide Image Placeholder 1">
-            <a:extLst>
-              <a:ext uri="{FF2B5EF4-FFF2-40B4-BE49-F238E27FC236}">
-                <a16:creationId xmlns:a16="http://schemas.microsoft.com/office/drawing/2014/main" id="{BFED0139-4540-BE66-83F2-7C84781417FD}"/>
-              </a:ext>
-            </a:extLst>
-          </p:cNvPr>
-          <p:cNvSpPr>
-            <a:spLocks noGrp="1" noRot="1" noChangeAspect="1"/>
-          </p:cNvSpPr>
-          <p:nvPr>
-            <p:ph type="sldImg"/>
-          </p:nvPr>
-        </p:nvSpPr>
-        <p:spPr/>
-      </p:sp>
-      <p:sp>
-        <p:nvSpPr>
-          <p:cNvPr id="3" name="Notes Placeholder 2">
-            <a:extLst>
-              <a:ext uri="{FF2B5EF4-FFF2-40B4-BE49-F238E27FC236}">
-                <a16:creationId xmlns:a16="http://schemas.microsoft.com/office/drawing/2014/main" id="{F538A9F1-C56B-8CAF-76D5-BF28D8FD7190}"/>
-              </a:ext>
-            </a:extLst>
-          </p:cNvPr>
-          <p:cNvSpPr>
-            <a:spLocks noGrp="1"/>
-          </p:cNvSpPr>
-          <p:nvPr>
-            <p:ph type="body" idx="1"/>
-          </p:nvPr>
-        </p:nvSpPr>
-        <p:spPr/>
-        <p:txBody>
-          <a:bodyPr/>
-          <a:lstStyle/>
-          <a:p>
-            <a:endParaRPr lang="en-US" dirty="0"/>
-          </a:p>
-        </p:txBody>
-      </p:sp>
-      <p:sp>
-        <p:nvSpPr>
-          <p:cNvPr id="4" name="Slide Number Placeholder 3">
-            <a:extLst>
-              <a:ext uri="{FF2B5EF4-FFF2-40B4-BE49-F238E27FC236}">
-                <a16:creationId xmlns:a16="http://schemas.microsoft.com/office/drawing/2014/main" id="{5FF3E5A8-B70B-5D82-1BF1-3FF91F9D80A6}"/>
-              </a:ext>
-            </a:extLst>
-          </p:cNvPr>
-          <p:cNvSpPr>
-            <a:spLocks noGrp="1"/>
-          </p:cNvSpPr>
-          <p:nvPr>
-            <p:ph type="sldNum" sz="quarter" idx="10"/>
-          </p:nvPr>
-        </p:nvSpPr>
-        <p:spPr/>
-        <p:txBody>
-          <a:bodyPr/>
-          <a:lstStyle/>
-          <a:p>
-            <a:fld id="{F7021451-1387-4CA6-816F-3879F97B5CBC}" type="slidenum">
-              <a:rPr lang="en-US"/>
-              <a:t>15</a:t>
-            </a:fld>
-            <a:endParaRPr lang="en-US"/>
-          </a:p>
-        </p:txBody>
-      </p:sp>
-    </p:spTree>
-    <p:extLst>
-      <p:ext uri="{BB962C8B-B14F-4D97-AF65-F5344CB8AC3E}">
-        <p14:creationId xmlns:p14="http://schemas.microsoft.com/office/powerpoint/2010/main" val="3804079115"/>
       </p:ext>
     </p:extLst>
   </p:cSld>
@@ -996,7 +999,223 @@
 </p:notes>
 </file>
 
-<file path=ppt/notesSlides/notesSlide2.xml><?xml version="1.0" encoding="utf-8"?>
+<file path=ppt/notesSlides/notesSlide17.xml><?xml version="1.0" encoding="utf-8"?>
+<p:notes xmlns:a="http://schemas.openxmlformats.org/drawingml/2006/main" xmlns:r="http://schemas.openxmlformats.org/officeDocument/2006/relationships" xmlns:p="http://schemas.openxmlformats.org/presentationml/2006/main">
+  <p:cSld>
+    <p:spTree>
+      <p:nvGrpSpPr>
+        <p:cNvPr id="1" name="">
+          <a:extLst>
+            <a:ext uri="{FF2B5EF4-FFF2-40B4-BE49-F238E27FC236}">
+              <a16:creationId xmlns:a16="http://schemas.microsoft.com/office/drawing/2014/main" id="{3D3F1408-0FDE-FB2E-01CD-20C20E2811F2}"/>
+            </a:ext>
+          </a:extLst>
+        </p:cNvPr>
+        <p:cNvGrpSpPr/>
+        <p:nvPr/>
+      </p:nvGrpSpPr>
+      <p:grpSpPr>
+        <a:xfrm>
+          <a:off x="0" y="0"/>
+          <a:ext cx="0" cy="0"/>
+          <a:chOff x="0" y="0"/>
+          <a:chExt cx="0" cy="0"/>
+        </a:xfrm>
+      </p:grpSpPr>
+      <p:sp>
+        <p:nvSpPr>
+          <p:cNvPr id="2" name="Slide Image Placeholder 1">
+            <a:extLst>
+              <a:ext uri="{FF2B5EF4-FFF2-40B4-BE49-F238E27FC236}">
+                <a16:creationId xmlns:a16="http://schemas.microsoft.com/office/drawing/2014/main" id="{BFED0139-4540-BE66-83F2-7C84781417FD}"/>
+              </a:ext>
+            </a:extLst>
+          </p:cNvPr>
+          <p:cNvSpPr>
+            <a:spLocks noGrp="1" noRot="1" noChangeAspect="1"/>
+          </p:cNvSpPr>
+          <p:nvPr>
+            <p:ph type="sldImg"/>
+          </p:nvPr>
+        </p:nvSpPr>
+        <p:spPr/>
+      </p:sp>
+      <p:sp>
+        <p:nvSpPr>
+          <p:cNvPr id="3" name="Notes Placeholder 2">
+            <a:extLst>
+              <a:ext uri="{FF2B5EF4-FFF2-40B4-BE49-F238E27FC236}">
+                <a16:creationId xmlns:a16="http://schemas.microsoft.com/office/drawing/2014/main" id="{F538A9F1-C56B-8CAF-76D5-BF28D8FD7190}"/>
+              </a:ext>
+            </a:extLst>
+          </p:cNvPr>
+          <p:cNvSpPr>
+            <a:spLocks noGrp="1"/>
+          </p:cNvSpPr>
+          <p:nvPr>
+            <p:ph type="body" idx="1"/>
+          </p:nvPr>
+        </p:nvSpPr>
+        <p:spPr/>
+        <p:txBody>
+          <a:bodyPr/>
+          <a:lstStyle/>
+          <a:p>
+            <a:endParaRPr lang="en-US" dirty="0"/>
+          </a:p>
+        </p:txBody>
+      </p:sp>
+      <p:sp>
+        <p:nvSpPr>
+          <p:cNvPr id="4" name="Slide Number Placeholder 3">
+            <a:extLst>
+              <a:ext uri="{FF2B5EF4-FFF2-40B4-BE49-F238E27FC236}">
+                <a16:creationId xmlns:a16="http://schemas.microsoft.com/office/drawing/2014/main" id="{5FF3E5A8-B70B-5D82-1BF1-3FF91F9D80A6}"/>
+              </a:ext>
+            </a:extLst>
+          </p:cNvPr>
+          <p:cNvSpPr>
+            <a:spLocks noGrp="1"/>
+          </p:cNvSpPr>
+          <p:nvPr>
+            <p:ph type="sldNum" sz="quarter" idx="10"/>
+          </p:nvPr>
+        </p:nvSpPr>
+        <p:spPr/>
+        <p:txBody>
+          <a:bodyPr/>
+          <a:lstStyle/>
+          <a:p>
+            <a:fld id="{F7021451-1387-4CA6-816F-3879F97B5CBC}" type="slidenum">
+              <a:rPr lang="en-US"/>
+              <a:t>17</a:t>
+            </a:fld>
+            <a:endParaRPr lang="en-US"/>
+          </a:p>
+        </p:txBody>
+      </p:sp>
+    </p:spTree>
+    <p:extLst>
+      <p:ext uri="{BB962C8B-B14F-4D97-AF65-F5344CB8AC3E}">
+        <p14:creationId xmlns:p14="http://schemas.microsoft.com/office/powerpoint/2010/main" val="3804079115"/>
+      </p:ext>
+    </p:extLst>
+  </p:cSld>
+  <p:clrMapOvr>
+    <a:masterClrMapping/>
+  </p:clrMapOvr>
+</p:notes>
+</file>
+
+<file path=ppt/notesSlides/notesSlide18.xml><?xml version="1.0" encoding="utf-8"?>
+<p:notes xmlns:a="http://schemas.openxmlformats.org/drawingml/2006/main" xmlns:r="http://schemas.openxmlformats.org/officeDocument/2006/relationships" xmlns:p="http://schemas.openxmlformats.org/presentationml/2006/main">
+  <p:cSld>
+    <p:spTree>
+      <p:nvGrpSpPr>
+        <p:cNvPr id="1" name="">
+          <a:extLst>
+            <a:ext uri="{FF2B5EF4-FFF2-40B4-BE49-F238E27FC236}">
+              <a16:creationId xmlns:a16="http://schemas.microsoft.com/office/drawing/2014/main" id="{A983D64F-E283-5024-EAF3-DF3043BE6C2E}"/>
+            </a:ext>
+          </a:extLst>
+        </p:cNvPr>
+        <p:cNvGrpSpPr/>
+        <p:nvPr/>
+      </p:nvGrpSpPr>
+      <p:grpSpPr>
+        <a:xfrm>
+          <a:off x="0" y="0"/>
+          <a:ext cx="0" cy="0"/>
+          <a:chOff x="0" y="0"/>
+          <a:chExt cx="0" cy="0"/>
+        </a:xfrm>
+      </p:grpSpPr>
+      <p:sp>
+        <p:nvSpPr>
+          <p:cNvPr id="2" name="Slide Image Placeholder 1">
+            <a:extLst>
+              <a:ext uri="{FF2B5EF4-FFF2-40B4-BE49-F238E27FC236}">
+                <a16:creationId xmlns:a16="http://schemas.microsoft.com/office/drawing/2014/main" id="{2B93BB05-13FE-AC89-0A40-8F39242AD1DB}"/>
+              </a:ext>
+            </a:extLst>
+          </p:cNvPr>
+          <p:cNvSpPr>
+            <a:spLocks noGrp="1" noRot="1" noChangeAspect="1"/>
+          </p:cNvSpPr>
+          <p:nvPr>
+            <p:ph type="sldImg"/>
+          </p:nvPr>
+        </p:nvSpPr>
+        <p:spPr/>
+      </p:sp>
+      <p:sp>
+        <p:nvSpPr>
+          <p:cNvPr id="3" name="Notes Placeholder 2">
+            <a:extLst>
+              <a:ext uri="{FF2B5EF4-FFF2-40B4-BE49-F238E27FC236}">
+                <a16:creationId xmlns:a16="http://schemas.microsoft.com/office/drawing/2014/main" id="{DDA44402-7D35-2FF3-C4CD-C30D48CC8AC2}"/>
+              </a:ext>
+            </a:extLst>
+          </p:cNvPr>
+          <p:cNvSpPr>
+            <a:spLocks noGrp="1"/>
+          </p:cNvSpPr>
+          <p:nvPr>
+            <p:ph type="body" idx="1"/>
+          </p:nvPr>
+        </p:nvSpPr>
+        <p:spPr/>
+        <p:txBody>
+          <a:bodyPr/>
+          <a:lstStyle/>
+          <a:p>
+            <a:endParaRPr lang="en-US" dirty="0"/>
+          </a:p>
+        </p:txBody>
+      </p:sp>
+      <p:sp>
+        <p:nvSpPr>
+          <p:cNvPr id="4" name="Slide Number Placeholder 3">
+            <a:extLst>
+              <a:ext uri="{FF2B5EF4-FFF2-40B4-BE49-F238E27FC236}">
+                <a16:creationId xmlns:a16="http://schemas.microsoft.com/office/drawing/2014/main" id="{90DA1FDB-753E-97A8-4D4B-1E8EBDDDF46E}"/>
+              </a:ext>
+            </a:extLst>
+          </p:cNvPr>
+          <p:cNvSpPr>
+            <a:spLocks noGrp="1"/>
+          </p:cNvSpPr>
+          <p:nvPr>
+            <p:ph type="sldNum" sz="quarter" idx="10"/>
+          </p:nvPr>
+        </p:nvSpPr>
+        <p:spPr/>
+        <p:txBody>
+          <a:bodyPr/>
+          <a:lstStyle/>
+          <a:p>
+            <a:fld id="{F7021451-1387-4CA6-816F-3879F97B5CBC}" type="slidenum">
+              <a:rPr lang="en-US"/>
+              <a:t>18</a:t>
+            </a:fld>
+            <a:endParaRPr lang="en-US"/>
+          </a:p>
+        </p:txBody>
+      </p:sp>
+    </p:spTree>
+    <p:extLst>
+      <p:ext uri="{BB962C8B-B14F-4D97-AF65-F5344CB8AC3E}">
+        <p14:creationId xmlns:p14="http://schemas.microsoft.com/office/powerpoint/2010/main" val="2804733532"/>
+      </p:ext>
+    </p:extLst>
+  </p:cSld>
+  <p:clrMapOvr>
+    <a:masterClrMapping/>
+  </p:clrMapOvr>
+</p:notes>
+</file>
+
+<file path=ppt/notesSlides/notesSlide19.xml><?xml version="1.0" encoding="utf-8"?>
 <p:notes xmlns:a="http://schemas.openxmlformats.org/drawingml/2006/main" xmlns:r="http://schemas.openxmlformats.org/officeDocument/2006/relationships" xmlns:p="http://schemas.openxmlformats.org/presentationml/2006/main">
   <p:cSld>
     <p:spTree>
@@ -1061,7 +1280,7 @@
           <a:p>
             <a:fld id="{F7021451-1387-4CA6-816F-3879F97B5CBC}" type="slidenum">
               <a:rPr lang="en-US"/>
-              <a:t>2</a:t>
+              <a:t>19</a:t>
             </a:fld>
             <a:endParaRPr lang="en-US"/>
           </a:p>
@@ -1071,6 +1290,114 @@
     <p:extLst>
       <p:ext uri="{BB962C8B-B14F-4D97-AF65-F5344CB8AC3E}">
         <p14:creationId xmlns:p14="http://schemas.microsoft.com/office/powerpoint/2010/main" val="1024086991"/>
+      </p:ext>
+    </p:extLst>
+  </p:cSld>
+  <p:clrMapOvr>
+    <a:masterClrMapping/>
+  </p:clrMapOvr>
+</p:notes>
+</file>
+
+<file path=ppt/notesSlides/notesSlide2.xml><?xml version="1.0" encoding="utf-8"?>
+<p:notes xmlns:a="http://schemas.openxmlformats.org/drawingml/2006/main" xmlns:r="http://schemas.openxmlformats.org/officeDocument/2006/relationships" xmlns:p="http://schemas.openxmlformats.org/presentationml/2006/main">
+  <p:cSld>
+    <p:spTree>
+      <p:nvGrpSpPr>
+        <p:cNvPr id="1" name="">
+          <a:extLst>
+            <a:ext uri="{FF2B5EF4-FFF2-40B4-BE49-F238E27FC236}">
+              <a16:creationId xmlns:a16="http://schemas.microsoft.com/office/drawing/2014/main" id="{F2ACB246-C26C-FD8D-9717-806AF81F7F6B}"/>
+            </a:ext>
+          </a:extLst>
+        </p:cNvPr>
+        <p:cNvGrpSpPr/>
+        <p:nvPr/>
+      </p:nvGrpSpPr>
+      <p:grpSpPr>
+        <a:xfrm>
+          <a:off x="0" y="0"/>
+          <a:ext cx="0" cy="0"/>
+          <a:chOff x="0" y="0"/>
+          <a:chExt cx="0" cy="0"/>
+        </a:xfrm>
+      </p:grpSpPr>
+      <p:sp>
+        <p:nvSpPr>
+          <p:cNvPr id="2" name="Slide Image Placeholder 1">
+            <a:extLst>
+              <a:ext uri="{FF2B5EF4-FFF2-40B4-BE49-F238E27FC236}">
+                <a16:creationId xmlns:a16="http://schemas.microsoft.com/office/drawing/2014/main" id="{929C4E3A-1ED9-1E90-8CA2-97997754ABC7}"/>
+              </a:ext>
+            </a:extLst>
+          </p:cNvPr>
+          <p:cNvSpPr>
+            <a:spLocks noGrp="1" noRot="1" noChangeAspect="1"/>
+          </p:cNvSpPr>
+          <p:nvPr>
+            <p:ph type="sldImg"/>
+          </p:nvPr>
+        </p:nvSpPr>
+        <p:spPr/>
+      </p:sp>
+      <p:sp>
+        <p:nvSpPr>
+          <p:cNvPr id="3" name="Notes Placeholder 2">
+            <a:extLst>
+              <a:ext uri="{FF2B5EF4-FFF2-40B4-BE49-F238E27FC236}">
+                <a16:creationId xmlns:a16="http://schemas.microsoft.com/office/drawing/2014/main" id="{BD13D37D-AEA1-24E9-E136-8D33E514BE92}"/>
+              </a:ext>
+            </a:extLst>
+          </p:cNvPr>
+          <p:cNvSpPr>
+            <a:spLocks noGrp="1"/>
+          </p:cNvSpPr>
+          <p:nvPr>
+            <p:ph type="body" idx="1"/>
+          </p:nvPr>
+        </p:nvSpPr>
+        <p:spPr/>
+        <p:txBody>
+          <a:bodyPr/>
+          <a:lstStyle/>
+          <a:p>
+            <a:endParaRPr lang="en-US" dirty="0"/>
+          </a:p>
+        </p:txBody>
+      </p:sp>
+      <p:sp>
+        <p:nvSpPr>
+          <p:cNvPr id="4" name="Slide Number Placeholder 3">
+            <a:extLst>
+              <a:ext uri="{FF2B5EF4-FFF2-40B4-BE49-F238E27FC236}">
+                <a16:creationId xmlns:a16="http://schemas.microsoft.com/office/drawing/2014/main" id="{E00CDBE6-E324-F1B9-0BBB-4E71C1C9B074}"/>
+              </a:ext>
+            </a:extLst>
+          </p:cNvPr>
+          <p:cNvSpPr>
+            <a:spLocks noGrp="1"/>
+          </p:cNvSpPr>
+          <p:nvPr>
+            <p:ph type="sldNum" sz="quarter" idx="10"/>
+          </p:nvPr>
+        </p:nvSpPr>
+        <p:spPr/>
+        <p:txBody>
+          <a:bodyPr/>
+          <a:lstStyle/>
+          <a:p>
+            <a:fld id="{F7021451-1387-4CA6-816F-3879F97B5CBC}" type="slidenum">
+              <a:rPr lang="en-US"/>
+              <a:t>2</a:t>
+            </a:fld>
+            <a:endParaRPr lang="en-US"/>
+          </a:p>
+        </p:txBody>
+      </p:sp>
+    </p:spTree>
+    <p:extLst>
+      <p:ext uri="{BB962C8B-B14F-4D97-AF65-F5344CB8AC3E}">
+        <p14:creationId xmlns:p14="http://schemas.microsoft.com/office/powerpoint/2010/main" val="4140203009"/>
       </p:ext>
     </p:extLst>
   </p:cSld>
@@ -1169,6 +1496,90 @@
   <p:cSld>
     <p:spTree>
       <p:nvGrpSpPr>
+        <p:cNvPr id="1" name=""/>
+        <p:cNvGrpSpPr/>
+        <p:nvPr/>
+      </p:nvGrpSpPr>
+      <p:grpSpPr>
+        <a:xfrm>
+          <a:off x="0" y="0"/>
+          <a:ext cx="0" cy="0"/>
+          <a:chOff x="0" y="0"/>
+          <a:chExt cx="0" cy="0"/>
+        </a:xfrm>
+      </p:grpSpPr>
+      <p:sp>
+        <p:nvSpPr>
+          <p:cNvPr id="2" name="Slide Image Placeholder 1"/>
+          <p:cNvSpPr>
+            <a:spLocks noGrp="1" noRot="1" noChangeAspect="1"/>
+          </p:cNvSpPr>
+          <p:nvPr>
+            <p:ph type="sldImg"/>
+          </p:nvPr>
+        </p:nvSpPr>
+        <p:spPr/>
+      </p:sp>
+      <p:sp>
+        <p:nvSpPr>
+          <p:cNvPr id="3" name="Notes Placeholder 2"/>
+          <p:cNvSpPr>
+            <a:spLocks noGrp="1"/>
+          </p:cNvSpPr>
+          <p:nvPr>
+            <p:ph type="body" idx="1"/>
+          </p:nvPr>
+        </p:nvSpPr>
+        <p:spPr/>
+        <p:txBody>
+          <a:bodyPr/>
+          <a:lstStyle/>
+          <a:p>
+            <a:endParaRPr lang="en-US" dirty="0"/>
+          </a:p>
+        </p:txBody>
+      </p:sp>
+      <p:sp>
+        <p:nvSpPr>
+          <p:cNvPr id="4" name="Slide Number Placeholder 3"/>
+          <p:cNvSpPr>
+            <a:spLocks noGrp="1"/>
+          </p:cNvSpPr>
+          <p:nvPr>
+            <p:ph type="sldNum" sz="quarter" idx="10"/>
+          </p:nvPr>
+        </p:nvSpPr>
+        <p:spPr/>
+        <p:txBody>
+          <a:bodyPr/>
+          <a:lstStyle/>
+          <a:p>
+            <a:fld id="{F7021451-1387-4CA6-816F-3879F97B5CBC}" type="slidenum">
+              <a:rPr lang="en-US"/>
+              <a:t>4</a:t>
+            </a:fld>
+            <a:endParaRPr lang="en-US"/>
+          </a:p>
+        </p:txBody>
+      </p:sp>
+    </p:spTree>
+    <p:extLst>
+      <p:ext uri="{BB962C8B-B14F-4D97-AF65-F5344CB8AC3E}">
+        <p14:creationId xmlns:p14="http://schemas.microsoft.com/office/powerpoint/2010/main" val="1024086991"/>
+      </p:ext>
+    </p:extLst>
+  </p:cSld>
+  <p:clrMapOvr>
+    <a:masterClrMapping/>
+  </p:clrMapOvr>
+</p:notes>
+</file>
+
+<file path=ppt/notesSlides/notesSlide5.xml><?xml version="1.0" encoding="utf-8"?>
+<p:notes xmlns:a="http://schemas.openxmlformats.org/drawingml/2006/main" xmlns:r="http://schemas.openxmlformats.org/officeDocument/2006/relationships" xmlns:p="http://schemas.openxmlformats.org/presentationml/2006/main">
+  <p:cSld>
+    <p:spTree>
+      <p:nvGrpSpPr>
         <p:cNvPr id="1" name="">
           <a:extLst>
             <a:ext uri="{FF2B5EF4-FFF2-40B4-BE49-F238E27FC236}">
@@ -1253,7 +1664,7 @@
           <a:p>
             <a:fld id="{F7021451-1387-4CA6-816F-3879F97B5CBC}" type="slidenum">
               <a:rPr lang="en-US"/>
-              <a:t>4</a:t>
+              <a:t>5</a:t>
             </a:fld>
             <a:endParaRPr lang="en-US"/>
           </a:p>
@@ -1272,7 +1683,7 @@
 </p:notes>
 </file>
 
-<file path=ppt/notesSlides/notesSlide5.xml><?xml version="1.0" encoding="utf-8"?>
+<file path=ppt/notesSlides/notesSlide6.xml><?xml version="1.0" encoding="utf-8"?>
 <p:notes xmlns:a="http://schemas.openxmlformats.org/drawingml/2006/main" xmlns:r="http://schemas.openxmlformats.org/officeDocument/2006/relationships" xmlns:p="http://schemas.openxmlformats.org/presentationml/2006/main">
   <p:cSld>
     <p:spTree>
@@ -1361,7 +1772,7 @@
           <a:p>
             <a:fld id="{F7021451-1387-4CA6-816F-3879F97B5CBC}" type="slidenum">
               <a:rPr lang="en-US"/>
-              <a:t>5</a:t>
+              <a:t>6</a:t>
             </a:fld>
             <a:endParaRPr lang="en-US"/>
           </a:p>
@@ -1371,90 +1782,6 @@
     <p:extLst>
       <p:ext uri="{BB962C8B-B14F-4D97-AF65-F5344CB8AC3E}">
         <p14:creationId xmlns:p14="http://schemas.microsoft.com/office/powerpoint/2010/main" val="2394133616"/>
-      </p:ext>
-    </p:extLst>
-  </p:cSld>
-  <p:clrMapOvr>
-    <a:masterClrMapping/>
-  </p:clrMapOvr>
-</p:notes>
-</file>
-
-<file path=ppt/notesSlides/notesSlide6.xml><?xml version="1.0" encoding="utf-8"?>
-<p:notes xmlns:a="http://schemas.openxmlformats.org/drawingml/2006/main" xmlns:r="http://schemas.openxmlformats.org/officeDocument/2006/relationships" xmlns:p="http://schemas.openxmlformats.org/presentationml/2006/main">
-  <p:cSld>
-    <p:spTree>
-      <p:nvGrpSpPr>
-        <p:cNvPr id="1" name=""/>
-        <p:cNvGrpSpPr/>
-        <p:nvPr/>
-      </p:nvGrpSpPr>
-      <p:grpSpPr>
-        <a:xfrm>
-          <a:off x="0" y="0"/>
-          <a:ext cx="0" cy="0"/>
-          <a:chOff x="0" y="0"/>
-          <a:chExt cx="0" cy="0"/>
-        </a:xfrm>
-      </p:grpSpPr>
-      <p:sp>
-        <p:nvSpPr>
-          <p:cNvPr id="2" name="Slide Image Placeholder 1"/>
-          <p:cNvSpPr>
-            <a:spLocks noGrp="1" noRot="1" noChangeAspect="1"/>
-          </p:cNvSpPr>
-          <p:nvPr>
-            <p:ph type="sldImg"/>
-          </p:nvPr>
-        </p:nvSpPr>
-        <p:spPr/>
-      </p:sp>
-      <p:sp>
-        <p:nvSpPr>
-          <p:cNvPr id="3" name="Notes Placeholder 2"/>
-          <p:cNvSpPr>
-            <a:spLocks noGrp="1"/>
-          </p:cNvSpPr>
-          <p:nvPr>
-            <p:ph type="body" idx="1"/>
-          </p:nvPr>
-        </p:nvSpPr>
-        <p:spPr/>
-        <p:txBody>
-          <a:bodyPr/>
-          <a:lstStyle/>
-          <a:p>
-            <a:endParaRPr lang="en-US" dirty="0"/>
-          </a:p>
-        </p:txBody>
-      </p:sp>
-      <p:sp>
-        <p:nvSpPr>
-          <p:cNvPr id="4" name="Slide Number Placeholder 3"/>
-          <p:cNvSpPr>
-            <a:spLocks noGrp="1"/>
-          </p:cNvSpPr>
-          <p:nvPr>
-            <p:ph type="sldNum" sz="quarter" idx="10"/>
-          </p:nvPr>
-        </p:nvSpPr>
-        <p:spPr/>
-        <p:txBody>
-          <a:bodyPr/>
-          <a:lstStyle/>
-          <a:p>
-            <a:fld id="{F7021451-1387-4CA6-816F-3879F97B5CBC}" type="slidenum">
-              <a:rPr lang="en-US"/>
-              <a:t>6</a:t>
-            </a:fld>
-            <a:endParaRPr lang="en-US"/>
-          </a:p>
-        </p:txBody>
-      </p:sp>
-    </p:spTree>
-    <p:extLst>
-      <p:ext uri="{BB962C8B-B14F-4D97-AF65-F5344CB8AC3E}">
-        <p14:creationId xmlns:p14="http://schemas.microsoft.com/office/powerpoint/2010/main" val="1024086991"/>
       </p:ext>
     </p:extLst>
   </p:cSld>
@@ -1640,7 +1967,7 @@
         <p:cNvPr id="1" name="">
           <a:extLst>
             <a:ext uri="{FF2B5EF4-FFF2-40B4-BE49-F238E27FC236}">
-              <a16:creationId xmlns:a16="http://schemas.microsoft.com/office/drawing/2014/main" id="{F93D6CA0-7D0B-E1AF-93E8-48533E3AD205}"/>
+              <a16:creationId xmlns:a16="http://schemas.microsoft.com/office/drawing/2014/main" id="{EB1848B2-3B14-5593-1AA4-FB712C800D23}"/>
             </a:ext>
           </a:extLst>
         </p:cNvPr>
@@ -1660,7 +1987,7 @@
           <p:cNvPr id="2" name="Slide Image Placeholder 1">
             <a:extLst>
               <a:ext uri="{FF2B5EF4-FFF2-40B4-BE49-F238E27FC236}">
-                <a16:creationId xmlns:a16="http://schemas.microsoft.com/office/drawing/2014/main" id="{522AF582-6A74-4665-513A-530E65F85C5A}"/>
+                <a16:creationId xmlns:a16="http://schemas.microsoft.com/office/drawing/2014/main" id="{B4B1275E-5773-1C16-5344-341304E2A01D}"/>
               </a:ext>
             </a:extLst>
           </p:cNvPr>
@@ -1678,7 +2005,7 @@
           <p:cNvPr id="3" name="Notes Placeholder 2">
             <a:extLst>
               <a:ext uri="{FF2B5EF4-FFF2-40B4-BE49-F238E27FC236}">
-                <a16:creationId xmlns:a16="http://schemas.microsoft.com/office/drawing/2014/main" id="{1A4D9E4A-638E-F326-A8FD-48A11D5F5DC2}"/>
+                <a16:creationId xmlns:a16="http://schemas.microsoft.com/office/drawing/2014/main" id="{408C1E76-6389-D58D-9E2A-924CD47CF6C9}"/>
               </a:ext>
             </a:extLst>
           </p:cNvPr>
@@ -1703,7 +2030,7 @@
           <p:cNvPr id="4" name="Slide Number Placeholder 3">
             <a:extLst>
               <a:ext uri="{FF2B5EF4-FFF2-40B4-BE49-F238E27FC236}">
-                <a16:creationId xmlns:a16="http://schemas.microsoft.com/office/drawing/2014/main" id="{44B2D0B4-7194-6C99-8AF0-C6693BD98418}"/>
+                <a16:creationId xmlns:a16="http://schemas.microsoft.com/office/drawing/2014/main" id="{75803072-B93A-83D2-EA08-FFA6EF0E65CB}"/>
               </a:ext>
             </a:extLst>
           </p:cNvPr>
@@ -1730,7 +2057,7 @@
     </p:spTree>
     <p:extLst>
       <p:ext uri="{BB962C8B-B14F-4D97-AF65-F5344CB8AC3E}">
-        <p14:creationId xmlns:p14="http://schemas.microsoft.com/office/powerpoint/2010/main" val="203144072"/>
+        <p14:creationId xmlns:p14="http://schemas.microsoft.com/office/powerpoint/2010/main" val="3571350890"/>
       </p:ext>
     </p:extLst>
   </p:cSld>
@@ -2423,6 +2750,1708 @@
 
 <file path=ppt/slides/slide10.xml><?xml version="1.0" encoding="utf-8"?>
 <p:sld xmlns:a="http://schemas.openxmlformats.org/drawingml/2006/main" xmlns:r="http://schemas.openxmlformats.org/officeDocument/2006/relationships" xmlns:p="http://schemas.openxmlformats.org/presentationml/2006/main">
+  <p:cSld name="Slide 6">
+    <p:bg>
+      <p:bgPr>
+        <a:solidFill>
+          <a:srgbClr val="F5F8FA"/>
+        </a:solidFill>
+        <a:effectLst/>
+      </p:bgPr>
+    </p:bg>
+    <p:spTree>
+      <p:nvGrpSpPr>
+        <p:cNvPr id="1" name=""/>
+        <p:cNvGrpSpPr/>
+        <p:nvPr/>
+      </p:nvGrpSpPr>
+      <p:grpSpPr>
+        <a:xfrm>
+          <a:off x="0" y="0"/>
+          <a:ext cx="0" cy="0"/>
+          <a:chOff x="0" y="0"/>
+          <a:chExt cx="0" cy="0"/>
+        </a:xfrm>
+      </p:grpSpPr>
+      <p:sp>
+        <p:nvSpPr>
+          <p:cNvPr id="2" name="Shape 0"/>
+          <p:cNvSpPr/>
+          <p:nvPr/>
+        </p:nvSpPr>
+        <p:spPr>
+          <a:xfrm>
+            <a:off x="0" y="0"/>
+            <a:ext cx="9144000" cy="54864"/>
+          </a:xfrm>
+          <a:prstGeom prst="rect">
+            <a:avLst/>
+          </a:prstGeom>
+          <a:solidFill>
+            <a:srgbClr val="E8963E"/>
+          </a:solidFill>
+          <a:ln/>
+        </p:spPr>
+        <p:txBody>
+          <a:bodyPr/>
+          <a:lstStyle/>
+          <a:p>
+            <a:endParaRPr lang="es-AR" noProof="0" dirty="0"/>
+          </a:p>
+        </p:txBody>
+      </p:sp>
+      <p:sp>
+        <p:nvSpPr>
+          <p:cNvPr id="3" name="Text 1"/>
+          <p:cNvSpPr/>
+          <p:nvPr/>
+        </p:nvSpPr>
+        <p:spPr>
+          <a:xfrm>
+            <a:off x="640080" y="228600"/>
+            <a:ext cx="7863840" cy="594360"/>
+          </a:xfrm>
+          <a:prstGeom prst="rect">
+            <a:avLst/>
+          </a:prstGeom>
+          <a:noFill/>
+          <a:ln/>
+        </p:spPr>
+        <p:txBody>
+          <a:bodyPr wrap="square" lIns="0" tIns="0" rIns="0" bIns="0" rtlCol="0" anchor="ctr"/>
+          <a:lstStyle/>
+          <a:p>
+            <a:pPr marL="0" indent="0">
+              <a:buNone/>
+            </a:pPr>
+            <a:r>
+              <a:rPr lang="es-AR" sz="3000" b="1" noProof="0" dirty="0">
+                <a:solidFill>
+                  <a:srgbClr val="0F2B46"/>
+                </a:solidFill>
+                <a:latin typeface="Georgia" pitchFamily="34" charset="0"/>
+                <a:ea typeface="Georgia" pitchFamily="34" charset="-122"/>
+                <a:cs typeface="Georgia" pitchFamily="34" charset="-120"/>
+              </a:rPr>
+              <a:t>Software y Herramientas</a:t>
+            </a:r>
+            <a:endParaRPr lang="es-AR" sz="3000" noProof="0" dirty="0"/>
+          </a:p>
+        </p:txBody>
+      </p:sp>
+      <p:sp>
+        <p:nvSpPr>
+          <p:cNvPr id="4" name="Shape 2"/>
+          <p:cNvSpPr/>
+          <p:nvPr/>
+        </p:nvSpPr>
+        <p:spPr>
+          <a:xfrm>
+            <a:off x="640080" y="1051560"/>
+            <a:ext cx="5029200" cy="1828800"/>
+          </a:xfrm>
+          <a:prstGeom prst="rect">
+            <a:avLst/>
+          </a:prstGeom>
+          <a:solidFill>
+            <a:srgbClr val="FFFFFF"/>
+          </a:solidFill>
+          <a:ln/>
+          <a:effectLst>
+            <a:outerShdw blurRad="76200" dist="25400" dir="8100000" algn="bl" rotWithShape="0">
+              <a:srgbClr val="000000">
+                <a:alpha val="12000"/>
+              </a:srgbClr>
+            </a:outerShdw>
+          </a:effectLst>
+        </p:spPr>
+        <p:txBody>
+          <a:bodyPr/>
+          <a:lstStyle/>
+          <a:p>
+            <a:endParaRPr lang="es-AR" noProof="0" dirty="0"/>
+          </a:p>
+        </p:txBody>
+      </p:sp>
+      <p:sp>
+        <p:nvSpPr>
+          <p:cNvPr id="5" name="Shape 3"/>
+          <p:cNvSpPr/>
+          <p:nvPr/>
+        </p:nvSpPr>
+        <p:spPr>
+          <a:xfrm>
+            <a:off x="640080" y="1051560"/>
+            <a:ext cx="5029200" cy="54864"/>
+          </a:xfrm>
+          <a:prstGeom prst="rect">
+            <a:avLst/>
+          </a:prstGeom>
+          <a:solidFill>
+            <a:srgbClr val="1A6B8A"/>
+          </a:solidFill>
+          <a:ln/>
+        </p:spPr>
+        <p:txBody>
+          <a:bodyPr/>
+          <a:lstStyle/>
+          <a:p>
+            <a:endParaRPr lang="es-AR" noProof="0" dirty="0"/>
+          </a:p>
+        </p:txBody>
+      </p:sp>
+      <p:sp>
+        <p:nvSpPr>
+          <p:cNvPr id="6" name="Text 4"/>
+          <p:cNvSpPr/>
+          <p:nvPr/>
+        </p:nvSpPr>
+        <p:spPr>
+          <a:xfrm>
+            <a:off x="914400" y="1280160"/>
+            <a:ext cx="1097280" cy="822960"/>
+          </a:xfrm>
+          <a:prstGeom prst="rect">
+            <a:avLst/>
+          </a:prstGeom>
+          <a:noFill/>
+          <a:ln/>
+        </p:spPr>
+        <p:txBody>
+          <a:bodyPr wrap="square" lIns="0" tIns="0" rIns="0" bIns="0" rtlCol="0" anchor="ctr"/>
+          <a:lstStyle/>
+          <a:p>
+            <a:pPr marL="0" indent="0" algn="ctr">
+              <a:buNone/>
+            </a:pPr>
+            <a:r>
+              <a:rPr lang="es-AR" sz="4200" b="1" noProof="0" dirty="0">
+                <a:solidFill>
+                  <a:srgbClr val="1A6B8A"/>
+                </a:solidFill>
+                <a:latin typeface="Consolas" pitchFamily="34" charset="0"/>
+                <a:ea typeface="Consolas" pitchFamily="34" charset="-122"/>
+                <a:cs typeface="Consolas" pitchFamily="34" charset="-120"/>
+              </a:rPr>
+              <a:t>R</a:t>
+            </a:r>
+            <a:endParaRPr lang="es-AR" sz="4200" noProof="0" dirty="0"/>
+          </a:p>
+        </p:txBody>
+      </p:sp>
+      <p:sp>
+        <p:nvSpPr>
+          <p:cNvPr id="7" name="Text 5"/>
+          <p:cNvSpPr/>
+          <p:nvPr/>
+        </p:nvSpPr>
+        <p:spPr>
+          <a:xfrm>
+            <a:off x="2011680" y="1280160"/>
+            <a:ext cx="3474720" cy="320040"/>
+          </a:xfrm>
+          <a:prstGeom prst="rect">
+            <a:avLst/>
+          </a:prstGeom>
+          <a:noFill/>
+          <a:ln/>
+        </p:spPr>
+        <p:txBody>
+          <a:bodyPr wrap="square" lIns="0" tIns="0" rIns="0" bIns="0" rtlCol="0" anchor="ctr"/>
+          <a:lstStyle/>
+          <a:p>
+            <a:pPr marL="0" indent="0" algn="l">
+              <a:buNone/>
+            </a:pPr>
+            <a:r>
+              <a:rPr lang="es-AR" sz="1500" b="1" noProof="0" dirty="0">
+                <a:solidFill>
+                  <a:srgbClr val="0F2B46"/>
+                </a:solidFill>
+                <a:latin typeface="Georgia" pitchFamily="34" charset="0"/>
+                <a:ea typeface="Georgia" pitchFamily="34" charset="-122"/>
+                <a:cs typeface="Georgia" pitchFamily="34" charset="-120"/>
+              </a:rPr>
+              <a:t>Lenguaje principal del curso</a:t>
+            </a:r>
+            <a:endParaRPr lang="es-AR" sz="1500" noProof="0" dirty="0"/>
+          </a:p>
+        </p:txBody>
+      </p:sp>
+      <p:sp>
+        <p:nvSpPr>
+          <p:cNvPr id="8" name="Text 6"/>
+          <p:cNvSpPr/>
+          <p:nvPr/>
+        </p:nvSpPr>
+        <p:spPr>
+          <a:xfrm>
+            <a:off x="2011680" y="1645920"/>
+            <a:ext cx="3474720" cy="1005840"/>
+          </a:xfrm>
+          <a:prstGeom prst="rect">
+            <a:avLst/>
+          </a:prstGeom>
+          <a:noFill/>
+          <a:ln/>
+        </p:spPr>
+        <p:txBody>
+          <a:bodyPr wrap="square" rtlCol="0" anchor="t"/>
+          <a:lstStyle/>
+          <a:p>
+            <a:pPr marL="0" indent="0" algn="l">
+              <a:lnSpc>
+                <a:spcPct val="130000"/>
+              </a:lnSpc>
+              <a:buNone/>
+            </a:pPr>
+            <a:r>
+              <a:rPr lang="es-AR" sz="1100" noProof="0" dirty="0">
+                <a:solidFill>
+                  <a:srgbClr val="5A7184"/>
+                </a:solidFill>
+                <a:latin typeface="Calibri" pitchFamily="34" charset="0"/>
+                <a:ea typeface="Calibri" pitchFamily="34" charset="-122"/>
+                <a:cs typeface="Calibri" pitchFamily="34" charset="-120"/>
+              </a:rPr>
+              <a:t>Lenguaje libre, gratuito y con un ecosistema enorme para análisis de datos, estadística y visualización. Es el estándar en muchas áreas de investigación económica.</a:t>
+            </a:r>
+            <a:endParaRPr lang="es-AR" sz="1100" noProof="0" dirty="0"/>
+          </a:p>
+        </p:txBody>
+      </p:sp>
+      <p:sp>
+        <p:nvSpPr>
+          <p:cNvPr id="9" name="Shape 7"/>
+          <p:cNvSpPr/>
+          <p:nvPr/>
+        </p:nvSpPr>
+        <p:spPr>
+          <a:xfrm>
+            <a:off x="5943600" y="1051560"/>
+            <a:ext cx="2560320" cy="1828800"/>
+          </a:xfrm>
+          <a:prstGeom prst="rect">
+            <a:avLst/>
+          </a:prstGeom>
+          <a:solidFill>
+            <a:srgbClr val="FFFFFF"/>
+          </a:solidFill>
+          <a:ln/>
+          <a:effectLst>
+            <a:outerShdw blurRad="76200" dist="25400" dir="8100000" algn="bl" rotWithShape="0">
+              <a:srgbClr val="000000">
+                <a:alpha val="12000"/>
+              </a:srgbClr>
+            </a:outerShdw>
+          </a:effectLst>
+        </p:spPr>
+        <p:txBody>
+          <a:bodyPr/>
+          <a:lstStyle/>
+          <a:p>
+            <a:endParaRPr lang="es-AR" noProof="0" dirty="0"/>
+          </a:p>
+        </p:txBody>
+      </p:sp>
+      <p:sp>
+        <p:nvSpPr>
+          <p:cNvPr id="10" name="Shape 8"/>
+          <p:cNvSpPr/>
+          <p:nvPr/>
+        </p:nvSpPr>
+        <p:spPr>
+          <a:xfrm>
+            <a:off x="5943600" y="1051560"/>
+            <a:ext cx="2560320" cy="54864"/>
+          </a:xfrm>
+          <a:prstGeom prst="rect">
+            <a:avLst/>
+          </a:prstGeom>
+          <a:solidFill>
+            <a:srgbClr val="2E9EBF"/>
+          </a:solidFill>
+          <a:ln/>
+        </p:spPr>
+        <p:txBody>
+          <a:bodyPr/>
+          <a:lstStyle/>
+          <a:p>
+            <a:endParaRPr lang="es-AR" noProof="0" dirty="0"/>
+          </a:p>
+        </p:txBody>
+      </p:sp>
+      <p:sp>
+        <p:nvSpPr>
+          <p:cNvPr id="11" name="Text 9"/>
+          <p:cNvSpPr/>
+          <p:nvPr/>
+        </p:nvSpPr>
+        <p:spPr>
+          <a:xfrm>
+            <a:off x="6126480" y="1280160"/>
+            <a:ext cx="2194560" cy="320040"/>
+          </a:xfrm>
+          <a:prstGeom prst="rect">
+            <a:avLst/>
+          </a:prstGeom>
+          <a:noFill/>
+          <a:ln/>
+        </p:spPr>
+        <p:txBody>
+          <a:bodyPr wrap="square" lIns="0" tIns="0" rIns="0" bIns="0" rtlCol="0" anchor="ctr"/>
+          <a:lstStyle/>
+          <a:p>
+            <a:pPr marL="0" indent="0" algn="ctr">
+              <a:buNone/>
+            </a:pPr>
+            <a:r>
+              <a:rPr lang="es-AR" sz="1500" b="1" noProof="0" dirty="0" err="1">
+                <a:solidFill>
+                  <a:srgbClr val="0F2B46"/>
+                </a:solidFill>
+                <a:latin typeface="Georgia" pitchFamily="34" charset="0"/>
+                <a:ea typeface="Georgia" pitchFamily="34" charset="-122"/>
+                <a:cs typeface="Georgia" pitchFamily="34" charset="-120"/>
+              </a:rPr>
+              <a:t>RStudio</a:t>
+            </a:r>
+            <a:endParaRPr lang="es-AR" sz="1500" noProof="0" dirty="0"/>
+          </a:p>
+        </p:txBody>
+      </p:sp>
+      <p:sp>
+        <p:nvSpPr>
+          <p:cNvPr id="12" name="Text 10"/>
+          <p:cNvSpPr/>
+          <p:nvPr/>
+        </p:nvSpPr>
+        <p:spPr>
+          <a:xfrm>
+            <a:off x="6126480" y="1691640"/>
+            <a:ext cx="2194560" cy="1005840"/>
+          </a:xfrm>
+          <a:prstGeom prst="rect">
+            <a:avLst/>
+          </a:prstGeom>
+          <a:noFill/>
+          <a:ln/>
+        </p:spPr>
+        <p:txBody>
+          <a:bodyPr wrap="square" rtlCol="0" anchor="t"/>
+          <a:lstStyle/>
+          <a:p>
+            <a:pPr marL="0" indent="0" algn="ctr">
+              <a:lnSpc>
+                <a:spcPct val="130000"/>
+              </a:lnSpc>
+              <a:buNone/>
+            </a:pPr>
+            <a:r>
+              <a:rPr lang="es-AR" sz="1100" noProof="0" dirty="0">
+                <a:solidFill>
+                  <a:srgbClr val="5A7184"/>
+                </a:solidFill>
+                <a:latin typeface="Calibri" pitchFamily="34" charset="0"/>
+                <a:ea typeface="Calibri" pitchFamily="34" charset="-122"/>
+                <a:cs typeface="Calibri" pitchFamily="34" charset="-120"/>
+              </a:rPr>
+              <a:t>IDE para trabajar con R de forma cómoda. Integra consola, editor de scripts, visor de gráficos y ayuda.</a:t>
+            </a:r>
+            <a:endParaRPr lang="es-AR" sz="1100" noProof="0" dirty="0"/>
+          </a:p>
+        </p:txBody>
+      </p:sp>
+      <p:sp>
+        <p:nvSpPr>
+          <p:cNvPr id="13" name="Shape 11"/>
+          <p:cNvSpPr/>
+          <p:nvPr/>
+        </p:nvSpPr>
+        <p:spPr>
+          <a:xfrm>
+            <a:off x="640080" y="3154680"/>
+            <a:ext cx="1947672" cy="1280160"/>
+          </a:xfrm>
+          <a:prstGeom prst="rect">
+            <a:avLst/>
+          </a:prstGeom>
+          <a:solidFill>
+            <a:srgbClr val="FFFFFF"/>
+          </a:solidFill>
+          <a:ln/>
+          <a:effectLst>
+            <a:outerShdw blurRad="76200" dist="25400" dir="8100000" algn="bl" rotWithShape="0">
+              <a:srgbClr val="000000">
+                <a:alpha val="12000"/>
+              </a:srgbClr>
+            </a:outerShdw>
+          </a:effectLst>
+        </p:spPr>
+        <p:txBody>
+          <a:bodyPr/>
+          <a:lstStyle/>
+          <a:p>
+            <a:endParaRPr lang="es-AR" noProof="0" dirty="0"/>
+          </a:p>
+        </p:txBody>
+      </p:sp>
+      <p:sp>
+        <p:nvSpPr>
+          <p:cNvPr id="14" name="Text 12"/>
+          <p:cNvSpPr/>
+          <p:nvPr/>
+        </p:nvSpPr>
+        <p:spPr>
+          <a:xfrm>
+            <a:off x="731520" y="3246120"/>
+            <a:ext cx="1764792" cy="320040"/>
+          </a:xfrm>
+          <a:prstGeom prst="rect">
+            <a:avLst/>
+          </a:prstGeom>
+          <a:noFill/>
+          <a:ln/>
+        </p:spPr>
+        <p:txBody>
+          <a:bodyPr wrap="square" lIns="0" tIns="0" rIns="0" bIns="0" rtlCol="0" anchor="ctr"/>
+          <a:lstStyle/>
+          <a:p>
+            <a:pPr marL="0" indent="0" algn="ctr">
+              <a:buNone/>
+            </a:pPr>
+            <a:r>
+              <a:rPr lang="es-AR" sz="1200" b="1" noProof="0" dirty="0" err="1">
+                <a:solidFill>
+                  <a:srgbClr val="1A6B8A"/>
+                </a:solidFill>
+                <a:latin typeface="Consolas" pitchFamily="34" charset="0"/>
+                <a:ea typeface="Consolas" pitchFamily="34" charset="-122"/>
+                <a:cs typeface="Consolas" pitchFamily="34" charset="-120"/>
+              </a:rPr>
+              <a:t>tidyverse</a:t>
+            </a:r>
+            <a:endParaRPr lang="es-AR" sz="1200" noProof="0" dirty="0"/>
+          </a:p>
+        </p:txBody>
+      </p:sp>
+      <p:sp>
+        <p:nvSpPr>
+          <p:cNvPr id="15" name="Text 13"/>
+          <p:cNvSpPr/>
+          <p:nvPr/>
+        </p:nvSpPr>
+        <p:spPr>
+          <a:xfrm>
+            <a:off x="731520" y="3611880"/>
+            <a:ext cx="1764792" cy="685800"/>
+          </a:xfrm>
+          <a:prstGeom prst="rect">
+            <a:avLst/>
+          </a:prstGeom>
+          <a:noFill/>
+          <a:ln/>
+        </p:spPr>
+        <p:txBody>
+          <a:bodyPr wrap="square" rtlCol="0" anchor="t"/>
+          <a:lstStyle/>
+          <a:p>
+            <a:pPr marL="0" indent="0" algn="ctr">
+              <a:lnSpc>
+                <a:spcPct val="125000"/>
+              </a:lnSpc>
+              <a:buNone/>
+            </a:pPr>
+            <a:r>
+              <a:rPr lang="es-AR" sz="950" noProof="0" dirty="0">
+                <a:solidFill>
+                  <a:srgbClr val="5A7184"/>
+                </a:solidFill>
+                <a:latin typeface="Calibri" pitchFamily="34" charset="0"/>
+                <a:ea typeface="Calibri" pitchFamily="34" charset="-122"/>
+                <a:cs typeface="Calibri" pitchFamily="34" charset="-120"/>
+              </a:rPr>
+              <a:t>Ecosistema de paquetes para manipulación y visualización de datos</a:t>
+            </a:r>
+            <a:endParaRPr lang="es-AR" sz="950" noProof="0" dirty="0"/>
+          </a:p>
+        </p:txBody>
+      </p:sp>
+      <p:sp>
+        <p:nvSpPr>
+          <p:cNvPr id="16" name="Shape 14"/>
+          <p:cNvSpPr/>
+          <p:nvPr/>
+        </p:nvSpPr>
+        <p:spPr>
+          <a:xfrm>
+            <a:off x="2770632" y="3154680"/>
+            <a:ext cx="1947672" cy="1280160"/>
+          </a:xfrm>
+          <a:prstGeom prst="rect">
+            <a:avLst/>
+          </a:prstGeom>
+          <a:solidFill>
+            <a:srgbClr val="FFFFFF"/>
+          </a:solidFill>
+          <a:ln/>
+          <a:effectLst>
+            <a:outerShdw blurRad="76200" dist="25400" dir="8100000" algn="bl" rotWithShape="0">
+              <a:srgbClr val="000000">
+                <a:alpha val="12000"/>
+              </a:srgbClr>
+            </a:outerShdw>
+          </a:effectLst>
+        </p:spPr>
+        <p:txBody>
+          <a:bodyPr/>
+          <a:lstStyle/>
+          <a:p>
+            <a:endParaRPr lang="es-AR" noProof="0" dirty="0"/>
+          </a:p>
+        </p:txBody>
+      </p:sp>
+      <p:sp>
+        <p:nvSpPr>
+          <p:cNvPr id="17" name="Text 15"/>
+          <p:cNvSpPr/>
+          <p:nvPr/>
+        </p:nvSpPr>
+        <p:spPr>
+          <a:xfrm>
+            <a:off x="2862072" y="3246120"/>
+            <a:ext cx="1764792" cy="320040"/>
+          </a:xfrm>
+          <a:prstGeom prst="rect">
+            <a:avLst/>
+          </a:prstGeom>
+          <a:noFill/>
+          <a:ln/>
+        </p:spPr>
+        <p:txBody>
+          <a:bodyPr wrap="square" lIns="0" tIns="0" rIns="0" bIns="0" rtlCol="0" anchor="ctr"/>
+          <a:lstStyle/>
+          <a:p>
+            <a:pPr marL="0" indent="0" algn="ctr">
+              <a:buNone/>
+            </a:pPr>
+            <a:r>
+              <a:rPr lang="es-AR" sz="1200" b="1" noProof="0" dirty="0">
+                <a:solidFill>
+                  <a:srgbClr val="1A6B8A"/>
+                </a:solidFill>
+                <a:latin typeface="Consolas" pitchFamily="34" charset="0"/>
+                <a:ea typeface="Consolas" pitchFamily="34" charset="-122"/>
+                <a:cs typeface="Consolas" pitchFamily="34" charset="-120"/>
+              </a:rPr>
+              <a:t>ggplot2</a:t>
+            </a:r>
+            <a:endParaRPr lang="es-AR" sz="1200" noProof="0" dirty="0"/>
+          </a:p>
+        </p:txBody>
+      </p:sp>
+      <p:sp>
+        <p:nvSpPr>
+          <p:cNvPr id="18" name="Text 16"/>
+          <p:cNvSpPr/>
+          <p:nvPr/>
+        </p:nvSpPr>
+        <p:spPr>
+          <a:xfrm>
+            <a:off x="2862072" y="3611880"/>
+            <a:ext cx="1764792" cy="685800"/>
+          </a:xfrm>
+          <a:prstGeom prst="rect">
+            <a:avLst/>
+          </a:prstGeom>
+          <a:noFill/>
+          <a:ln/>
+        </p:spPr>
+        <p:txBody>
+          <a:bodyPr wrap="square" rtlCol="0" anchor="t"/>
+          <a:lstStyle/>
+          <a:p>
+            <a:pPr marL="0" indent="0" algn="ctr">
+              <a:lnSpc>
+                <a:spcPct val="125000"/>
+              </a:lnSpc>
+              <a:buNone/>
+            </a:pPr>
+            <a:r>
+              <a:rPr lang="es-AR" sz="950" noProof="0" dirty="0">
+                <a:solidFill>
+                  <a:srgbClr val="5A7184"/>
+                </a:solidFill>
+                <a:latin typeface="Calibri" pitchFamily="34" charset="0"/>
+                <a:ea typeface="Calibri" pitchFamily="34" charset="-122"/>
+                <a:cs typeface="Calibri" pitchFamily="34" charset="-120"/>
+              </a:rPr>
+              <a:t>Sistema de gráficos basado en la gramática de gráficos</a:t>
+            </a:r>
+            <a:endParaRPr lang="es-AR" sz="950" noProof="0" dirty="0"/>
+          </a:p>
+        </p:txBody>
+      </p:sp>
+      <p:sp>
+        <p:nvSpPr>
+          <p:cNvPr id="19" name="Shape 17"/>
+          <p:cNvSpPr/>
+          <p:nvPr/>
+        </p:nvSpPr>
+        <p:spPr>
+          <a:xfrm>
+            <a:off x="4901184" y="3154680"/>
+            <a:ext cx="1947672" cy="1280160"/>
+          </a:xfrm>
+          <a:prstGeom prst="rect">
+            <a:avLst/>
+          </a:prstGeom>
+          <a:solidFill>
+            <a:srgbClr val="FFFFFF"/>
+          </a:solidFill>
+          <a:ln/>
+          <a:effectLst>
+            <a:outerShdw blurRad="76200" dist="25400" dir="8100000" algn="bl" rotWithShape="0">
+              <a:srgbClr val="000000">
+                <a:alpha val="12000"/>
+              </a:srgbClr>
+            </a:outerShdw>
+          </a:effectLst>
+        </p:spPr>
+        <p:txBody>
+          <a:bodyPr/>
+          <a:lstStyle/>
+          <a:p>
+            <a:endParaRPr lang="es-AR" noProof="0" dirty="0"/>
+          </a:p>
+        </p:txBody>
+      </p:sp>
+      <p:sp>
+        <p:nvSpPr>
+          <p:cNvPr id="20" name="Text 18"/>
+          <p:cNvSpPr/>
+          <p:nvPr/>
+        </p:nvSpPr>
+        <p:spPr>
+          <a:xfrm>
+            <a:off x="4992624" y="3246120"/>
+            <a:ext cx="1764792" cy="320040"/>
+          </a:xfrm>
+          <a:prstGeom prst="rect">
+            <a:avLst/>
+          </a:prstGeom>
+          <a:noFill/>
+          <a:ln/>
+        </p:spPr>
+        <p:txBody>
+          <a:bodyPr wrap="square" lIns="0" tIns="0" rIns="0" bIns="0" rtlCol="0" anchor="ctr"/>
+          <a:lstStyle/>
+          <a:p>
+            <a:pPr marL="0" indent="0" algn="ctr">
+              <a:buNone/>
+            </a:pPr>
+            <a:r>
+              <a:rPr lang="es-AR" sz="1200" b="1" noProof="0" dirty="0" err="1">
+                <a:solidFill>
+                  <a:srgbClr val="1A6B8A"/>
+                </a:solidFill>
+                <a:latin typeface="Consolas" pitchFamily="34" charset="0"/>
+                <a:ea typeface="Consolas" pitchFamily="34" charset="-122"/>
+                <a:cs typeface="Consolas" pitchFamily="34" charset="-120"/>
+              </a:rPr>
+              <a:t>rvest</a:t>
+            </a:r>
+            <a:endParaRPr lang="es-AR" sz="1200" noProof="0" dirty="0"/>
+          </a:p>
+        </p:txBody>
+      </p:sp>
+      <p:sp>
+        <p:nvSpPr>
+          <p:cNvPr id="21" name="Text 19"/>
+          <p:cNvSpPr/>
+          <p:nvPr/>
+        </p:nvSpPr>
+        <p:spPr>
+          <a:xfrm>
+            <a:off x="4992624" y="3611880"/>
+            <a:ext cx="1764792" cy="685800"/>
+          </a:xfrm>
+          <a:prstGeom prst="rect">
+            <a:avLst/>
+          </a:prstGeom>
+          <a:noFill/>
+          <a:ln/>
+        </p:spPr>
+        <p:txBody>
+          <a:bodyPr wrap="square" rtlCol="0" anchor="t"/>
+          <a:lstStyle/>
+          <a:p>
+            <a:pPr marL="0" indent="0" algn="ctr">
+              <a:lnSpc>
+                <a:spcPct val="125000"/>
+              </a:lnSpc>
+              <a:buNone/>
+            </a:pPr>
+            <a:r>
+              <a:rPr lang="es-AR" sz="950" noProof="0" dirty="0">
+                <a:solidFill>
+                  <a:srgbClr val="5A7184"/>
+                </a:solidFill>
+                <a:latin typeface="Calibri" pitchFamily="34" charset="0"/>
+                <a:ea typeface="Calibri" pitchFamily="34" charset="-122"/>
+                <a:cs typeface="Calibri" pitchFamily="34" charset="-120"/>
+              </a:rPr>
+              <a:t>Web </a:t>
+            </a:r>
+            <a:r>
+              <a:rPr lang="es-AR" sz="950" noProof="0" dirty="0" err="1">
+                <a:solidFill>
+                  <a:srgbClr val="5A7184"/>
+                </a:solidFill>
+                <a:latin typeface="Calibri" pitchFamily="34" charset="0"/>
+                <a:ea typeface="Calibri" pitchFamily="34" charset="-122"/>
+                <a:cs typeface="Calibri" pitchFamily="34" charset="-120"/>
+              </a:rPr>
+              <a:t>scraping</a:t>
+            </a:r>
+            <a:r>
+              <a:rPr lang="es-AR" sz="950" noProof="0" dirty="0">
+                <a:solidFill>
+                  <a:srgbClr val="5A7184"/>
+                </a:solidFill>
+                <a:latin typeface="Calibri" pitchFamily="34" charset="0"/>
+                <a:ea typeface="Calibri" pitchFamily="34" charset="-122"/>
+                <a:cs typeface="Calibri" pitchFamily="34" charset="-120"/>
+              </a:rPr>
+              <a:t> de páginas HTML de forma sencilla</a:t>
+            </a:r>
+            <a:endParaRPr lang="es-AR" sz="950" noProof="0" dirty="0"/>
+          </a:p>
+        </p:txBody>
+      </p:sp>
+      <p:sp>
+        <p:nvSpPr>
+          <p:cNvPr id="22" name="Shape 20"/>
+          <p:cNvSpPr/>
+          <p:nvPr/>
+        </p:nvSpPr>
+        <p:spPr>
+          <a:xfrm>
+            <a:off x="7031736" y="3154680"/>
+            <a:ext cx="1947672" cy="1280160"/>
+          </a:xfrm>
+          <a:prstGeom prst="rect">
+            <a:avLst/>
+          </a:prstGeom>
+          <a:solidFill>
+            <a:srgbClr val="FFFFFF"/>
+          </a:solidFill>
+          <a:ln/>
+          <a:effectLst>
+            <a:outerShdw blurRad="76200" dist="25400" dir="8100000" algn="bl" rotWithShape="0">
+              <a:srgbClr val="000000">
+                <a:alpha val="12000"/>
+              </a:srgbClr>
+            </a:outerShdw>
+          </a:effectLst>
+        </p:spPr>
+        <p:txBody>
+          <a:bodyPr/>
+          <a:lstStyle/>
+          <a:p>
+            <a:endParaRPr lang="es-AR" noProof="0" dirty="0"/>
+          </a:p>
+        </p:txBody>
+      </p:sp>
+      <p:sp>
+        <p:nvSpPr>
+          <p:cNvPr id="23" name="Text 21"/>
+          <p:cNvSpPr/>
+          <p:nvPr/>
+        </p:nvSpPr>
+        <p:spPr>
+          <a:xfrm>
+            <a:off x="7123176" y="3246120"/>
+            <a:ext cx="1764792" cy="320040"/>
+          </a:xfrm>
+          <a:prstGeom prst="rect">
+            <a:avLst/>
+          </a:prstGeom>
+          <a:noFill/>
+          <a:ln/>
+        </p:spPr>
+        <p:txBody>
+          <a:bodyPr wrap="square" lIns="0" tIns="0" rIns="0" bIns="0" rtlCol="0" anchor="ctr"/>
+          <a:lstStyle/>
+          <a:p>
+            <a:pPr marL="0" indent="0" algn="ctr">
+              <a:buNone/>
+            </a:pPr>
+            <a:r>
+              <a:rPr lang="es-AR" sz="1200" b="1" noProof="0" dirty="0" err="1">
+                <a:solidFill>
+                  <a:srgbClr val="1A6B8A"/>
+                </a:solidFill>
+                <a:latin typeface="Consolas" pitchFamily="34" charset="0"/>
+                <a:ea typeface="Consolas" pitchFamily="34" charset="-122"/>
+                <a:cs typeface="Consolas" pitchFamily="34" charset="-120"/>
+              </a:rPr>
+              <a:t>skimr</a:t>
+            </a:r>
+            <a:endParaRPr lang="es-AR" sz="1200" noProof="0" dirty="0"/>
+          </a:p>
+        </p:txBody>
+      </p:sp>
+      <p:sp>
+        <p:nvSpPr>
+          <p:cNvPr id="24" name="Text 22"/>
+          <p:cNvSpPr/>
+          <p:nvPr/>
+        </p:nvSpPr>
+        <p:spPr>
+          <a:xfrm>
+            <a:off x="7123176" y="3611880"/>
+            <a:ext cx="1764792" cy="685800"/>
+          </a:xfrm>
+          <a:prstGeom prst="rect">
+            <a:avLst/>
+          </a:prstGeom>
+          <a:noFill/>
+          <a:ln/>
+        </p:spPr>
+        <p:txBody>
+          <a:bodyPr wrap="square" rtlCol="0" anchor="t"/>
+          <a:lstStyle/>
+          <a:p>
+            <a:pPr marL="0" indent="0" algn="ctr">
+              <a:lnSpc>
+                <a:spcPct val="125000"/>
+              </a:lnSpc>
+              <a:buNone/>
+            </a:pPr>
+            <a:r>
+              <a:rPr lang="es-AR" sz="950" noProof="0" dirty="0">
+                <a:solidFill>
+                  <a:srgbClr val="5A7184"/>
+                </a:solidFill>
+                <a:latin typeface="Calibri" pitchFamily="34" charset="0"/>
+                <a:ea typeface="Calibri" pitchFamily="34" charset="-122"/>
+                <a:cs typeface="Calibri" pitchFamily="34" charset="-120"/>
+              </a:rPr>
+              <a:t>Resúmenes estadísticos rápidos para exploración inicial</a:t>
+            </a:r>
+            <a:endParaRPr lang="es-AR" sz="950" noProof="0" dirty="0"/>
+          </a:p>
+        </p:txBody>
+      </p:sp>
+      <p:sp>
+        <p:nvSpPr>
+          <p:cNvPr id="25" name="Shape 23"/>
+          <p:cNvSpPr/>
+          <p:nvPr/>
+        </p:nvSpPr>
+        <p:spPr>
+          <a:xfrm>
+            <a:off x="0" y="4709160"/>
+            <a:ext cx="9144000" cy="434340"/>
+          </a:xfrm>
+          <a:prstGeom prst="rect">
+            <a:avLst/>
+          </a:prstGeom>
+          <a:solidFill>
+            <a:srgbClr val="0F2B46"/>
+          </a:solidFill>
+          <a:ln/>
+        </p:spPr>
+        <p:txBody>
+          <a:bodyPr/>
+          <a:lstStyle/>
+          <a:p>
+            <a:endParaRPr lang="es-AR" noProof="0" dirty="0"/>
+          </a:p>
+        </p:txBody>
+      </p:sp>
+      <p:sp>
+        <p:nvSpPr>
+          <p:cNvPr id="26" name="Text 24"/>
+          <p:cNvSpPr/>
+          <p:nvPr/>
+        </p:nvSpPr>
+        <p:spPr>
+          <a:xfrm>
+            <a:off x="457200" y="4709160"/>
+            <a:ext cx="8229600" cy="434340"/>
+          </a:xfrm>
+          <a:prstGeom prst="rect">
+            <a:avLst/>
+          </a:prstGeom>
+          <a:noFill/>
+          <a:ln/>
+        </p:spPr>
+        <p:txBody>
+          <a:bodyPr wrap="square" lIns="0" tIns="0" rIns="0" bIns="0" rtlCol="0" anchor="ctr"/>
+          <a:lstStyle/>
+          <a:p>
+            <a:pPr marL="0" indent="0" algn="ctr">
+              <a:buNone/>
+            </a:pPr>
+            <a:r>
+              <a:rPr lang="es-AR" sz="850" noProof="0" dirty="0">
+                <a:solidFill>
+                  <a:srgbClr val="9DC1D9"/>
+                </a:solidFill>
+                <a:latin typeface="Calibri" pitchFamily="34" charset="0"/>
+                <a:ea typeface="Calibri" pitchFamily="34" charset="-122"/>
+                <a:cs typeface="Calibri" pitchFamily="34" charset="-120"/>
+              </a:rPr>
+              <a:t>Ciencia de Datos para Economía y Negocios  |  FCE-UBA  |  Nicolás Sidicaro</a:t>
+            </a:r>
+            <a:endParaRPr lang="es-AR" sz="850" noProof="0" dirty="0"/>
+          </a:p>
+        </p:txBody>
+      </p:sp>
+      <p:sp>
+        <p:nvSpPr>
+          <p:cNvPr id="27" name="Text 25"/>
+          <p:cNvSpPr/>
+          <p:nvPr/>
+        </p:nvSpPr>
+        <p:spPr>
+          <a:xfrm>
+            <a:off x="8046720" y="4709160"/>
+            <a:ext cx="914400" cy="434340"/>
+          </a:xfrm>
+          <a:prstGeom prst="rect">
+            <a:avLst/>
+          </a:prstGeom>
+          <a:noFill/>
+          <a:ln/>
+        </p:spPr>
+        <p:txBody>
+          <a:bodyPr wrap="square" lIns="0" tIns="0" rIns="0" bIns="0" rtlCol="0" anchor="ctr"/>
+          <a:lstStyle/>
+          <a:p>
+            <a:pPr marL="0" indent="0" algn="r">
+              <a:buNone/>
+            </a:pPr>
+            <a:r>
+              <a:rPr lang="es-AR" sz="800" noProof="0" dirty="0">
+                <a:solidFill>
+                  <a:srgbClr val="6A9AB8"/>
+                </a:solidFill>
+                <a:latin typeface="Calibri" pitchFamily="34" charset="0"/>
+                <a:ea typeface="Calibri" pitchFamily="34" charset="-122"/>
+                <a:cs typeface="Calibri" pitchFamily="34" charset="-120"/>
+              </a:rPr>
+              <a:t>6 / 11</a:t>
+            </a:r>
+            <a:endParaRPr lang="es-AR" sz="800" noProof="0" dirty="0"/>
+          </a:p>
+        </p:txBody>
+      </p:sp>
+    </p:spTree>
+  </p:cSld>
+  <p:clrMapOvr>
+    <a:masterClrMapping/>
+  </p:clrMapOvr>
+</p:sld>
+</file>
+
+<file path=ppt/slides/slide11.xml><?xml version="1.0" encoding="utf-8"?>
+<p:sld xmlns:a="http://schemas.openxmlformats.org/drawingml/2006/main" xmlns:r="http://schemas.openxmlformats.org/officeDocument/2006/relationships" xmlns:p="http://schemas.openxmlformats.org/presentationml/2006/main">
+  <p:cSld>
+    <p:spTree>
+      <p:nvGrpSpPr>
+        <p:cNvPr id="1" name="">
+          <a:extLst>
+            <a:ext uri="{FF2B5EF4-FFF2-40B4-BE49-F238E27FC236}">
+              <a16:creationId xmlns:a16="http://schemas.microsoft.com/office/drawing/2014/main" id="{07195B89-E3A8-F882-691A-02786138A558}"/>
+            </a:ext>
+          </a:extLst>
+        </p:cNvPr>
+        <p:cNvGrpSpPr/>
+        <p:nvPr/>
+      </p:nvGrpSpPr>
+      <p:grpSpPr>
+        <a:xfrm>
+          <a:off x="0" y="0"/>
+          <a:ext cx="0" cy="0"/>
+          <a:chOff x="0" y="0"/>
+          <a:chExt cx="0" cy="0"/>
+        </a:xfrm>
+      </p:grpSpPr>
+      <p:sp>
+        <p:nvSpPr>
+          <p:cNvPr id="2" name="Shape 0">
+            <a:extLst>
+              <a:ext uri="{FF2B5EF4-FFF2-40B4-BE49-F238E27FC236}">
+                <a16:creationId xmlns:a16="http://schemas.microsoft.com/office/drawing/2014/main" id="{1A79CDCC-98E5-0E13-FB7E-2B3AA78FAA0B}"/>
+              </a:ext>
+            </a:extLst>
+          </p:cNvPr>
+          <p:cNvSpPr/>
+          <p:nvPr/>
+        </p:nvSpPr>
+        <p:spPr>
+          <a:xfrm>
+            <a:off x="0" y="0"/>
+            <a:ext cx="9144000" cy="54864"/>
+          </a:xfrm>
+          <a:prstGeom prst="rect">
+            <a:avLst/>
+          </a:prstGeom>
+          <a:solidFill>
+            <a:srgbClr val="E8963E"/>
+          </a:solidFill>
+          <a:ln/>
+        </p:spPr>
+        <p:txBody>
+          <a:bodyPr/>
+          <a:lstStyle/>
+          <a:p>
+            <a:endParaRPr lang="es-AR" noProof="0" dirty="0"/>
+          </a:p>
+        </p:txBody>
+      </p:sp>
+      <p:sp>
+        <p:nvSpPr>
+          <p:cNvPr id="3" name="Text 1">
+            <a:extLst>
+              <a:ext uri="{FF2B5EF4-FFF2-40B4-BE49-F238E27FC236}">
+                <a16:creationId xmlns:a16="http://schemas.microsoft.com/office/drawing/2014/main" id="{BBD9FD3A-FE95-F909-2486-B198F0E56607}"/>
+              </a:ext>
+            </a:extLst>
+          </p:cNvPr>
+          <p:cNvSpPr/>
+          <p:nvPr/>
+        </p:nvSpPr>
+        <p:spPr>
+          <a:xfrm>
+            <a:off x="640080" y="228600"/>
+            <a:ext cx="7863840" cy="594360"/>
+          </a:xfrm>
+          <a:prstGeom prst="rect">
+            <a:avLst/>
+          </a:prstGeom>
+          <a:noFill/>
+          <a:ln/>
+        </p:spPr>
+        <p:txBody>
+          <a:bodyPr wrap="square" lIns="0" tIns="0" rIns="0" bIns="0" rtlCol="0" anchor="ctr"/>
+          <a:lstStyle/>
+          <a:p>
+            <a:pPr marL="0" indent="0">
+              <a:buNone/>
+            </a:pPr>
+            <a:r>
+              <a:rPr lang="es-AR" sz="3000" b="1" noProof="0" dirty="0">
+                <a:solidFill>
+                  <a:srgbClr val="0F2B46"/>
+                </a:solidFill>
+                <a:latin typeface="Georgia" pitchFamily="34" charset="0"/>
+                <a:ea typeface="Georgia" pitchFamily="34" charset="-122"/>
+                <a:cs typeface="Georgia" pitchFamily="34" charset="-120"/>
+              </a:rPr>
+              <a:t>Software y Herramientas</a:t>
+            </a:r>
+            <a:endParaRPr lang="es-AR" sz="3000" noProof="0" dirty="0"/>
+          </a:p>
+        </p:txBody>
+      </p:sp>
+      <p:sp>
+        <p:nvSpPr>
+          <p:cNvPr id="4" name="Shape 2">
+            <a:extLst>
+              <a:ext uri="{FF2B5EF4-FFF2-40B4-BE49-F238E27FC236}">
+                <a16:creationId xmlns:a16="http://schemas.microsoft.com/office/drawing/2014/main" id="{A6E61049-D3B5-FE40-A90D-5A15A140D5A5}"/>
+              </a:ext>
+            </a:extLst>
+          </p:cNvPr>
+          <p:cNvSpPr/>
+          <p:nvPr/>
+        </p:nvSpPr>
+        <p:spPr>
+          <a:xfrm>
+            <a:off x="640080" y="1051560"/>
+            <a:ext cx="5029200" cy="1828800"/>
+          </a:xfrm>
+          <a:prstGeom prst="rect">
+            <a:avLst/>
+          </a:prstGeom>
+          <a:solidFill>
+            <a:srgbClr val="FFFFFF"/>
+          </a:solidFill>
+          <a:ln/>
+          <a:effectLst>
+            <a:outerShdw blurRad="76200" dist="25400" dir="8100000" algn="bl" rotWithShape="0">
+              <a:srgbClr val="000000">
+                <a:alpha val="12000"/>
+              </a:srgbClr>
+            </a:outerShdw>
+          </a:effectLst>
+        </p:spPr>
+        <p:txBody>
+          <a:bodyPr/>
+          <a:lstStyle/>
+          <a:p>
+            <a:endParaRPr lang="es-AR" noProof="0" dirty="0"/>
+          </a:p>
+        </p:txBody>
+      </p:sp>
+      <p:sp>
+        <p:nvSpPr>
+          <p:cNvPr id="5" name="Shape 3">
+            <a:extLst>
+              <a:ext uri="{FF2B5EF4-FFF2-40B4-BE49-F238E27FC236}">
+                <a16:creationId xmlns:a16="http://schemas.microsoft.com/office/drawing/2014/main" id="{22FE901D-5FD9-196D-59DE-BF978CFB383F}"/>
+              </a:ext>
+            </a:extLst>
+          </p:cNvPr>
+          <p:cNvSpPr/>
+          <p:nvPr/>
+        </p:nvSpPr>
+        <p:spPr>
+          <a:xfrm>
+            <a:off x="640080" y="1051560"/>
+            <a:ext cx="5029200" cy="54864"/>
+          </a:xfrm>
+          <a:prstGeom prst="rect">
+            <a:avLst/>
+          </a:prstGeom>
+          <a:solidFill>
+            <a:srgbClr val="1A6B8A"/>
+          </a:solidFill>
+          <a:ln/>
+        </p:spPr>
+        <p:txBody>
+          <a:bodyPr/>
+          <a:lstStyle/>
+          <a:p>
+            <a:endParaRPr lang="es-AR" noProof="0" dirty="0"/>
+          </a:p>
+        </p:txBody>
+      </p:sp>
+      <p:sp>
+        <p:nvSpPr>
+          <p:cNvPr id="6" name="Text 4">
+            <a:extLst>
+              <a:ext uri="{FF2B5EF4-FFF2-40B4-BE49-F238E27FC236}">
+                <a16:creationId xmlns:a16="http://schemas.microsoft.com/office/drawing/2014/main" id="{143B7E08-E46D-2638-EAE2-24A8DFFCDE15}"/>
+              </a:ext>
+            </a:extLst>
+          </p:cNvPr>
+          <p:cNvSpPr/>
+          <p:nvPr/>
+        </p:nvSpPr>
+        <p:spPr>
+          <a:xfrm>
+            <a:off x="914400" y="1280160"/>
+            <a:ext cx="1097280" cy="822960"/>
+          </a:xfrm>
+          <a:prstGeom prst="rect">
+            <a:avLst/>
+          </a:prstGeom>
+          <a:noFill/>
+          <a:ln/>
+        </p:spPr>
+        <p:txBody>
+          <a:bodyPr wrap="square" lIns="0" tIns="0" rIns="0" bIns="0" rtlCol="0" anchor="ctr"/>
+          <a:lstStyle/>
+          <a:p>
+            <a:pPr marL="0" indent="0" algn="ctr">
+              <a:buNone/>
+            </a:pPr>
+            <a:r>
+              <a:rPr lang="es-AR" sz="4200" b="1" noProof="0" dirty="0">
+                <a:solidFill>
+                  <a:srgbClr val="1A6B8A"/>
+                </a:solidFill>
+                <a:latin typeface="Consolas" pitchFamily="34" charset="0"/>
+                <a:ea typeface="Consolas" pitchFamily="34" charset="-122"/>
+                <a:cs typeface="Consolas" pitchFamily="34" charset="-120"/>
+              </a:rPr>
+              <a:t>R</a:t>
+            </a:r>
+            <a:endParaRPr lang="es-AR" sz="4200" noProof="0" dirty="0"/>
+          </a:p>
+        </p:txBody>
+      </p:sp>
+      <p:sp>
+        <p:nvSpPr>
+          <p:cNvPr id="7" name="Text 5">
+            <a:extLst>
+              <a:ext uri="{FF2B5EF4-FFF2-40B4-BE49-F238E27FC236}">
+                <a16:creationId xmlns:a16="http://schemas.microsoft.com/office/drawing/2014/main" id="{2AD2B9A1-E2EA-5603-5690-39E1C3C6EE65}"/>
+              </a:ext>
+            </a:extLst>
+          </p:cNvPr>
+          <p:cNvSpPr/>
+          <p:nvPr/>
+        </p:nvSpPr>
+        <p:spPr>
+          <a:xfrm>
+            <a:off x="2011680" y="1280160"/>
+            <a:ext cx="3474720" cy="320040"/>
+          </a:xfrm>
+          <a:prstGeom prst="rect">
+            <a:avLst/>
+          </a:prstGeom>
+          <a:noFill/>
+          <a:ln/>
+        </p:spPr>
+        <p:txBody>
+          <a:bodyPr wrap="square" lIns="0" tIns="0" rIns="0" bIns="0" rtlCol="0" anchor="ctr"/>
+          <a:lstStyle/>
+          <a:p>
+            <a:pPr marL="0" indent="0" algn="l">
+              <a:buNone/>
+            </a:pPr>
+            <a:r>
+              <a:rPr lang="es-AR" sz="1500" b="1" noProof="0" dirty="0">
+                <a:solidFill>
+                  <a:srgbClr val="0F2B46"/>
+                </a:solidFill>
+                <a:latin typeface="Georgia" pitchFamily="34" charset="0"/>
+                <a:ea typeface="Georgia" pitchFamily="34" charset="-122"/>
+                <a:cs typeface="Georgia" pitchFamily="34" charset="-120"/>
+              </a:rPr>
+              <a:t>¿Si es la PC del laburo y no puedo instalar nada?</a:t>
+            </a:r>
+            <a:endParaRPr lang="es-AR" sz="1500" noProof="0" dirty="0"/>
+          </a:p>
+        </p:txBody>
+      </p:sp>
+      <p:sp>
+        <p:nvSpPr>
+          <p:cNvPr id="8" name="Text 6">
+            <a:extLst>
+              <a:ext uri="{FF2B5EF4-FFF2-40B4-BE49-F238E27FC236}">
+                <a16:creationId xmlns:a16="http://schemas.microsoft.com/office/drawing/2014/main" id="{D612A43A-8555-3350-B431-F505247FDE4B}"/>
+              </a:ext>
+            </a:extLst>
+          </p:cNvPr>
+          <p:cNvSpPr/>
+          <p:nvPr/>
+        </p:nvSpPr>
+        <p:spPr>
+          <a:xfrm>
+            <a:off x="2011680" y="1645920"/>
+            <a:ext cx="3474720" cy="1005840"/>
+          </a:xfrm>
+          <a:prstGeom prst="rect">
+            <a:avLst/>
+          </a:prstGeom>
+          <a:noFill/>
+          <a:ln/>
+        </p:spPr>
+        <p:txBody>
+          <a:bodyPr wrap="square" rtlCol="0" anchor="t"/>
+          <a:lstStyle/>
+          <a:p>
+            <a:pPr marL="0" indent="0" algn="l">
+              <a:lnSpc>
+                <a:spcPct val="130000"/>
+              </a:lnSpc>
+              <a:buNone/>
+            </a:pPr>
+            <a:r>
+              <a:rPr lang="es-AR" sz="1100" noProof="0" dirty="0">
+                <a:solidFill>
+                  <a:srgbClr val="5A7184"/>
+                </a:solidFill>
+                <a:latin typeface="Calibri" pitchFamily="34" charset="0"/>
+                <a:ea typeface="Calibri" pitchFamily="34" charset="-122"/>
+                <a:cs typeface="Calibri" pitchFamily="34" charset="-120"/>
+              </a:rPr>
+              <a:t>Google tiene gratis el sistema de Google </a:t>
+            </a:r>
+            <a:r>
+              <a:rPr lang="es-AR" sz="1100" noProof="0" dirty="0" err="1">
+                <a:solidFill>
+                  <a:srgbClr val="5A7184"/>
+                </a:solidFill>
+                <a:latin typeface="Calibri" pitchFamily="34" charset="0"/>
+                <a:ea typeface="Calibri" pitchFamily="34" charset="-122"/>
+                <a:cs typeface="Calibri" pitchFamily="34" charset="-120"/>
+              </a:rPr>
+              <a:t>Colab</a:t>
+            </a:r>
+            <a:r>
+              <a:rPr lang="es-AR" sz="1100" noProof="0" dirty="0">
+                <a:solidFill>
+                  <a:srgbClr val="5A7184"/>
+                </a:solidFill>
+                <a:latin typeface="Calibri" pitchFamily="34" charset="0"/>
+                <a:ea typeface="Calibri" pitchFamily="34" charset="-122"/>
+                <a:cs typeface="Calibri" pitchFamily="34" charset="-120"/>
+              </a:rPr>
+              <a:t>, que se puede utilizar con la cuenta de Drive. Es una herramienta online y para los usos del curso, no va a afectar mucho usar uno o el otro. Pero, por lo general es mejor usar R + </a:t>
+            </a:r>
+            <a:r>
+              <a:rPr lang="es-AR" sz="1100" noProof="0" dirty="0" err="1">
+                <a:solidFill>
+                  <a:srgbClr val="5A7184"/>
+                </a:solidFill>
+                <a:latin typeface="Calibri" pitchFamily="34" charset="0"/>
+                <a:ea typeface="Calibri" pitchFamily="34" charset="-122"/>
+                <a:cs typeface="Calibri" pitchFamily="34" charset="-120"/>
+              </a:rPr>
+              <a:t>RStudio</a:t>
+            </a:r>
+            <a:endParaRPr lang="es-AR" sz="1100" noProof="0" dirty="0">
+              <a:solidFill>
+                <a:srgbClr val="5A7184"/>
+              </a:solidFill>
+              <a:latin typeface="Calibri" pitchFamily="34" charset="0"/>
+              <a:ea typeface="Calibri" pitchFamily="34" charset="-122"/>
+              <a:cs typeface="Calibri" pitchFamily="34" charset="-120"/>
+            </a:endParaRPr>
+          </a:p>
+        </p:txBody>
+      </p:sp>
+      <p:sp>
+        <p:nvSpPr>
+          <p:cNvPr id="9" name="Shape 7">
+            <a:extLst>
+              <a:ext uri="{FF2B5EF4-FFF2-40B4-BE49-F238E27FC236}">
+                <a16:creationId xmlns:a16="http://schemas.microsoft.com/office/drawing/2014/main" id="{3D22B40E-E21A-B3F2-EDE6-739C5707FFB4}"/>
+              </a:ext>
+            </a:extLst>
+          </p:cNvPr>
+          <p:cNvSpPr/>
+          <p:nvPr/>
+        </p:nvSpPr>
+        <p:spPr>
+          <a:xfrm>
+            <a:off x="5943600" y="1051560"/>
+            <a:ext cx="2560320" cy="1828800"/>
+          </a:xfrm>
+          <a:prstGeom prst="rect">
+            <a:avLst/>
+          </a:prstGeom>
+          <a:solidFill>
+            <a:srgbClr val="FFFFFF"/>
+          </a:solidFill>
+          <a:ln/>
+          <a:effectLst>
+            <a:outerShdw blurRad="76200" dist="25400" dir="8100000" algn="bl" rotWithShape="0">
+              <a:srgbClr val="000000">
+                <a:alpha val="12000"/>
+              </a:srgbClr>
+            </a:outerShdw>
+          </a:effectLst>
+        </p:spPr>
+        <p:txBody>
+          <a:bodyPr/>
+          <a:lstStyle/>
+          <a:p>
+            <a:endParaRPr lang="es-AR" noProof="0" dirty="0"/>
+          </a:p>
+        </p:txBody>
+      </p:sp>
+      <p:sp>
+        <p:nvSpPr>
+          <p:cNvPr id="10" name="Shape 8">
+            <a:extLst>
+              <a:ext uri="{FF2B5EF4-FFF2-40B4-BE49-F238E27FC236}">
+                <a16:creationId xmlns:a16="http://schemas.microsoft.com/office/drawing/2014/main" id="{B07E02A8-6E7D-95DC-94C8-F1966EC71A00}"/>
+              </a:ext>
+            </a:extLst>
+          </p:cNvPr>
+          <p:cNvSpPr/>
+          <p:nvPr/>
+        </p:nvSpPr>
+        <p:spPr>
+          <a:xfrm>
+            <a:off x="5943600" y="1051560"/>
+            <a:ext cx="2560320" cy="54864"/>
+          </a:xfrm>
+          <a:prstGeom prst="rect">
+            <a:avLst/>
+          </a:prstGeom>
+          <a:solidFill>
+            <a:srgbClr val="2E9EBF"/>
+          </a:solidFill>
+          <a:ln/>
+        </p:spPr>
+        <p:txBody>
+          <a:bodyPr/>
+          <a:lstStyle/>
+          <a:p>
+            <a:endParaRPr lang="es-AR" noProof="0" dirty="0"/>
+          </a:p>
+        </p:txBody>
+      </p:sp>
+      <p:sp>
+        <p:nvSpPr>
+          <p:cNvPr id="11" name="Text 9">
+            <a:extLst>
+              <a:ext uri="{FF2B5EF4-FFF2-40B4-BE49-F238E27FC236}">
+                <a16:creationId xmlns:a16="http://schemas.microsoft.com/office/drawing/2014/main" id="{012BDD41-8E2A-F304-B7AC-A95284843098}"/>
+              </a:ext>
+            </a:extLst>
+          </p:cNvPr>
+          <p:cNvSpPr/>
+          <p:nvPr/>
+        </p:nvSpPr>
+        <p:spPr>
+          <a:xfrm>
+            <a:off x="6126480" y="1280160"/>
+            <a:ext cx="2194560" cy="320040"/>
+          </a:xfrm>
+          <a:prstGeom prst="rect">
+            <a:avLst/>
+          </a:prstGeom>
+          <a:noFill/>
+          <a:ln/>
+        </p:spPr>
+        <p:txBody>
+          <a:bodyPr wrap="square" lIns="0" tIns="0" rIns="0" bIns="0" rtlCol="0" anchor="ctr"/>
+          <a:lstStyle/>
+          <a:p>
+            <a:pPr marL="0" indent="0" algn="ctr">
+              <a:buNone/>
+            </a:pPr>
+            <a:r>
+              <a:rPr lang="es-AR" sz="1500" b="1" dirty="0">
+                <a:solidFill>
+                  <a:srgbClr val="0F2B46"/>
+                </a:solidFill>
+                <a:latin typeface="Georgia" pitchFamily="34" charset="0"/>
+              </a:rPr>
+              <a:t>¿y Python?</a:t>
+            </a:r>
+            <a:endParaRPr lang="es-AR" sz="1500" noProof="0" dirty="0"/>
+          </a:p>
+        </p:txBody>
+      </p:sp>
+      <p:sp>
+        <p:nvSpPr>
+          <p:cNvPr id="12" name="Text 10">
+            <a:extLst>
+              <a:ext uri="{FF2B5EF4-FFF2-40B4-BE49-F238E27FC236}">
+                <a16:creationId xmlns:a16="http://schemas.microsoft.com/office/drawing/2014/main" id="{E6DE9332-F056-1667-81EA-40CF3F965735}"/>
+              </a:ext>
+            </a:extLst>
+          </p:cNvPr>
+          <p:cNvSpPr/>
+          <p:nvPr/>
+        </p:nvSpPr>
+        <p:spPr>
+          <a:xfrm>
+            <a:off x="5943600" y="1691640"/>
+            <a:ext cx="2560320" cy="1005840"/>
+          </a:xfrm>
+          <a:prstGeom prst="rect">
+            <a:avLst/>
+          </a:prstGeom>
+          <a:noFill/>
+          <a:ln/>
+        </p:spPr>
+        <p:txBody>
+          <a:bodyPr wrap="square" rtlCol="0" anchor="t"/>
+          <a:lstStyle/>
+          <a:p>
+            <a:pPr marL="0" indent="0" algn="ctr">
+              <a:lnSpc>
+                <a:spcPct val="130000"/>
+              </a:lnSpc>
+              <a:buNone/>
+            </a:pPr>
+            <a:r>
+              <a:rPr lang="es-AR" sz="1100" noProof="0" dirty="0">
+                <a:solidFill>
+                  <a:srgbClr val="5A7184"/>
+                </a:solidFill>
+                <a:latin typeface="Calibri" pitchFamily="34" charset="0"/>
+                <a:ea typeface="Calibri" pitchFamily="34" charset="-122"/>
+                <a:cs typeface="Calibri" pitchFamily="34" charset="-120"/>
+              </a:rPr>
+              <a:t>No hay problema si lo quieren usar y aprender por su cuenta. En el curso no lo vamos a ver, pero los </a:t>
+            </a:r>
+            <a:r>
+              <a:rPr lang="es-AR" sz="1100" noProof="0" dirty="0" err="1">
+                <a:solidFill>
+                  <a:srgbClr val="5A7184"/>
+                </a:solidFill>
+                <a:latin typeface="Calibri" pitchFamily="34" charset="0"/>
+                <a:ea typeface="Calibri" pitchFamily="34" charset="-122"/>
+                <a:cs typeface="Calibri" pitchFamily="34" charset="-120"/>
+              </a:rPr>
+              <a:t>TPs</a:t>
+            </a:r>
+            <a:r>
+              <a:rPr lang="es-AR" sz="1100" noProof="0" dirty="0">
+                <a:solidFill>
+                  <a:srgbClr val="5A7184"/>
+                </a:solidFill>
+                <a:latin typeface="Calibri" pitchFamily="34" charset="0"/>
+                <a:ea typeface="Calibri" pitchFamily="34" charset="-122"/>
+                <a:cs typeface="Calibri" pitchFamily="34" charset="-120"/>
+              </a:rPr>
+              <a:t> lo pueden hacer en Python. </a:t>
+            </a:r>
+          </a:p>
+          <a:p>
+            <a:pPr marL="0" indent="0" algn="ctr">
+              <a:lnSpc>
+                <a:spcPct val="130000"/>
+              </a:lnSpc>
+              <a:buNone/>
+            </a:pPr>
+            <a:r>
+              <a:rPr lang="es-AR" sz="1100" dirty="0">
+                <a:solidFill>
+                  <a:srgbClr val="5A7184"/>
+                </a:solidFill>
+                <a:latin typeface="Calibri" pitchFamily="34" charset="0"/>
+                <a:ea typeface="Calibri" pitchFamily="34" charset="-122"/>
+                <a:cs typeface="Calibri" pitchFamily="34" charset="-120"/>
+              </a:rPr>
+              <a:t>No pueden hacerlo en STATA (otra lógica)</a:t>
+            </a:r>
+            <a:endParaRPr lang="es-AR" sz="1100" noProof="0" dirty="0"/>
+          </a:p>
+        </p:txBody>
+      </p:sp>
+      <p:sp>
+        <p:nvSpPr>
+          <p:cNvPr id="25" name="Shape 23">
+            <a:extLst>
+              <a:ext uri="{FF2B5EF4-FFF2-40B4-BE49-F238E27FC236}">
+                <a16:creationId xmlns:a16="http://schemas.microsoft.com/office/drawing/2014/main" id="{FBA7AC57-8517-CCE6-95B5-BD461C1C5BA3}"/>
+              </a:ext>
+            </a:extLst>
+          </p:cNvPr>
+          <p:cNvSpPr/>
+          <p:nvPr/>
+        </p:nvSpPr>
+        <p:spPr>
+          <a:xfrm>
+            <a:off x="0" y="4709160"/>
+            <a:ext cx="9144000" cy="434340"/>
+          </a:xfrm>
+          <a:prstGeom prst="rect">
+            <a:avLst/>
+          </a:prstGeom>
+          <a:solidFill>
+            <a:srgbClr val="0F2B46"/>
+          </a:solidFill>
+          <a:ln/>
+        </p:spPr>
+        <p:txBody>
+          <a:bodyPr/>
+          <a:lstStyle/>
+          <a:p>
+            <a:endParaRPr lang="es-AR" noProof="0" dirty="0"/>
+          </a:p>
+        </p:txBody>
+      </p:sp>
+      <p:sp>
+        <p:nvSpPr>
+          <p:cNvPr id="26" name="Text 24">
+            <a:extLst>
+              <a:ext uri="{FF2B5EF4-FFF2-40B4-BE49-F238E27FC236}">
+                <a16:creationId xmlns:a16="http://schemas.microsoft.com/office/drawing/2014/main" id="{4740BD2E-078D-3D51-B416-12B6FD6FABDB}"/>
+              </a:ext>
+            </a:extLst>
+          </p:cNvPr>
+          <p:cNvSpPr/>
+          <p:nvPr/>
+        </p:nvSpPr>
+        <p:spPr>
+          <a:xfrm>
+            <a:off x="457200" y="4709160"/>
+            <a:ext cx="8229600" cy="434340"/>
+          </a:xfrm>
+          <a:prstGeom prst="rect">
+            <a:avLst/>
+          </a:prstGeom>
+          <a:noFill/>
+          <a:ln/>
+        </p:spPr>
+        <p:txBody>
+          <a:bodyPr wrap="square" lIns="0" tIns="0" rIns="0" bIns="0" rtlCol="0" anchor="ctr"/>
+          <a:lstStyle/>
+          <a:p>
+            <a:pPr marL="0" indent="0" algn="ctr">
+              <a:buNone/>
+            </a:pPr>
+            <a:r>
+              <a:rPr lang="es-AR" sz="850" noProof="0" dirty="0">
+                <a:solidFill>
+                  <a:srgbClr val="9DC1D9"/>
+                </a:solidFill>
+                <a:latin typeface="Calibri" pitchFamily="34" charset="0"/>
+                <a:ea typeface="Calibri" pitchFamily="34" charset="-122"/>
+                <a:cs typeface="Calibri" pitchFamily="34" charset="-120"/>
+              </a:rPr>
+              <a:t>Ciencia de Datos para Economía y Negocios  |  FCE-UBA  |  Nicolás Sidicaro</a:t>
+            </a:r>
+            <a:endParaRPr lang="es-AR" sz="850" noProof="0" dirty="0"/>
+          </a:p>
+        </p:txBody>
+      </p:sp>
+      <p:sp>
+        <p:nvSpPr>
+          <p:cNvPr id="27" name="Text 25">
+            <a:extLst>
+              <a:ext uri="{FF2B5EF4-FFF2-40B4-BE49-F238E27FC236}">
+                <a16:creationId xmlns:a16="http://schemas.microsoft.com/office/drawing/2014/main" id="{E937E543-BFC2-89D6-EFF2-03BCE744EBFC}"/>
+              </a:ext>
+            </a:extLst>
+          </p:cNvPr>
+          <p:cNvSpPr/>
+          <p:nvPr/>
+        </p:nvSpPr>
+        <p:spPr>
+          <a:xfrm>
+            <a:off x="8046720" y="4709160"/>
+            <a:ext cx="914400" cy="434340"/>
+          </a:xfrm>
+          <a:prstGeom prst="rect">
+            <a:avLst/>
+          </a:prstGeom>
+          <a:noFill/>
+          <a:ln/>
+        </p:spPr>
+        <p:txBody>
+          <a:bodyPr wrap="square" lIns="0" tIns="0" rIns="0" bIns="0" rtlCol="0" anchor="ctr"/>
+          <a:lstStyle/>
+          <a:p>
+            <a:pPr marL="0" indent="0" algn="r">
+              <a:buNone/>
+            </a:pPr>
+            <a:r>
+              <a:rPr lang="es-AR" sz="800" noProof="0" dirty="0">
+                <a:solidFill>
+                  <a:srgbClr val="6A9AB8"/>
+                </a:solidFill>
+                <a:latin typeface="Calibri" pitchFamily="34" charset="0"/>
+                <a:ea typeface="Calibri" pitchFamily="34" charset="-122"/>
+                <a:cs typeface="Calibri" pitchFamily="34" charset="-120"/>
+              </a:rPr>
+              <a:t>6 / 11</a:t>
+            </a:r>
+            <a:endParaRPr lang="es-AR" sz="800" noProof="0" dirty="0"/>
+          </a:p>
+        </p:txBody>
+      </p:sp>
+    </p:spTree>
+    <p:extLst>
+      <p:ext uri="{BB962C8B-B14F-4D97-AF65-F5344CB8AC3E}">
+        <p14:creationId xmlns:p14="http://schemas.microsoft.com/office/powerpoint/2010/main" val="3904195941"/>
+      </p:ext>
+    </p:extLst>
+  </p:cSld>
+  <p:clrMapOvr>
+    <a:masterClrMapping/>
+  </p:clrMapOvr>
+</p:sld>
+</file>
+
+<file path=ppt/slides/slide12.xml><?xml version="1.0" encoding="utf-8"?>
+<p:sld xmlns:a="http://schemas.openxmlformats.org/drawingml/2006/main" xmlns:r="http://schemas.openxmlformats.org/officeDocument/2006/relationships" xmlns:p="http://schemas.openxmlformats.org/presentationml/2006/main">
   <p:cSld name="Slide 7">
     <p:bg>
       <p:bgPr>
@@ -4160,7 +6189,7 @@
 </p:sld>
 </file>
 
-<file path=ppt/slides/slide11.xml><?xml version="1.0" encoding="utf-8"?>
+<file path=ppt/slides/slide13.xml><?xml version="1.0" encoding="utf-8"?>
 <p:sld xmlns:a="http://schemas.openxmlformats.org/drawingml/2006/main" xmlns:r="http://schemas.openxmlformats.org/officeDocument/2006/relationships" xmlns:p="http://schemas.openxmlformats.org/presentationml/2006/main">
   <p:cSld name="Slide 8">
     <p:bg>
@@ -5017,7 +7046,7 @@
 </p:sld>
 </file>
 
-<file path=ppt/slides/slide12.xml><?xml version="1.0" encoding="utf-8"?>
+<file path=ppt/slides/slide14.xml><?xml version="1.0" encoding="utf-8"?>
 <p:sld xmlns:a="http://schemas.openxmlformats.org/drawingml/2006/main" xmlns:r="http://schemas.openxmlformats.org/officeDocument/2006/relationships" xmlns:p="http://schemas.openxmlformats.org/presentationml/2006/main">
   <p:cSld>
     <p:spTree>
@@ -5472,7 +7501,7 @@
 </p:sld>
 </file>
 
-<file path=ppt/slides/slide13.xml><?xml version="1.0" encoding="utf-8"?>
+<file path=ppt/slides/slide15.xml><?xml version="1.0" encoding="utf-8"?>
 <p:sld xmlns:a="http://schemas.openxmlformats.org/drawingml/2006/main" xmlns:r="http://schemas.openxmlformats.org/officeDocument/2006/relationships" xmlns:p="http://schemas.openxmlformats.org/presentationml/2006/main">
   <p:cSld>
     <p:spTree>
@@ -5951,7 +7980,7 @@
 </p:sld>
 </file>
 
-<file path=ppt/slides/slide14.xml><?xml version="1.0" encoding="utf-8"?>
+<file path=ppt/slides/slide16.xml><?xml version="1.0" encoding="utf-8"?>
 <p:sld xmlns:a="http://schemas.openxmlformats.org/drawingml/2006/main" xmlns:r="http://schemas.openxmlformats.org/officeDocument/2006/relationships" xmlns:p="http://schemas.openxmlformats.org/presentationml/2006/main">
   <p:cSld name="Slide 9">
     <p:bg>
@@ -6218,7 +8247,7 @@
         </p:nvSpPr>
         <p:spPr>
           <a:xfrm>
-            <a:off x="1051560" y="2057400"/>
+            <a:off x="1051560" y="1999035"/>
             <a:ext cx="3017520" cy="548640"/>
           </a:xfrm>
           <a:prstGeom prst="rect">
@@ -6247,6 +8276,24 @@
                 <a:cs typeface="Calibri" pitchFamily="34" charset="-120"/>
               </a:rPr>
               <a:t>Contenido teórico y conceptual. Presentación de temas nuevos con ejemplos y discusión.</a:t>
+            </a:r>
+          </a:p>
+          <a:p>
+            <a:pPr marL="0" indent="0" algn="l">
+              <a:lnSpc>
+                <a:spcPct val="130000"/>
+              </a:lnSpc>
+              <a:buNone/>
+            </a:pPr>
+            <a:r>
+              <a:rPr lang="es-AR" sz="1050" dirty="0">
+                <a:solidFill>
+                  <a:srgbClr val="5A7184"/>
+                </a:solidFill>
+                <a:latin typeface="Calibri" pitchFamily="34" charset="0"/>
+                <a:cs typeface="Calibri" pitchFamily="34" charset="-120"/>
+              </a:rPr>
+              <a:t>Alguna clase quizás pido que lleven computadora.</a:t>
             </a:r>
             <a:endParaRPr lang="es-AR" sz="1050" noProof="0" dirty="0"/>
           </a:p>
@@ -6356,29 +8403,7 @@
                 <a:ea typeface="Calibri" pitchFamily="34" charset="-122"/>
                 <a:cs typeface="Calibri" pitchFamily="34" charset="-120"/>
               </a:rPr>
-              <a:t>Práctica en R: aplicación directa del tema visto el martes. Programación </a:t>
-            </a:r>
-            <a:r>
-              <a:rPr lang="es-AR" sz="1050" noProof="0" dirty="0" err="1">
-                <a:solidFill>
-                  <a:srgbClr val="5A7184"/>
-                </a:solidFill>
-                <a:latin typeface="Calibri" pitchFamily="34" charset="0"/>
-                <a:ea typeface="Calibri" pitchFamily="34" charset="-122"/>
-                <a:cs typeface="Calibri" pitchFamily="34" charset="-120"/>
-              </a:rPr>
-              <a:t>hands-on</a:t>
-            </a:r>
-            <a:r>
-              <a:rPr lang="es-AR" sz="1050" noProof="0" dirty="0">
-                <a:solidFill>
-                  <a:srgbClr val="5A7184"/>
-                </a:solidFill>
-                <a:latin typeface="Calibri" pitchFamily="34" charset="0"/>
-                <a:ea typeface="Calibri" pitchFamily="34" charset="-122"/>
-                <a:cs typeface="Calibri" pitchFamily="34" charset="-120"/>
-              </a:rPr>
-              <a:t> y ejercicios.</a:t>
+              <a:t>Práctica en R: aplicación directa del tema visto el martes. Programación y ejercicios.</a:t>
             </a:r>
             <a:endParaRPr lang="es-AR" sz="1050" noProof="0" dirty="0"/>
           </a:p>
@@ -6750,7 +8775,7 @@
 </p:sld>
 </file>
 
-<file path=ppt/slides/slide15.xml><?xml version="1.0" encoding="utf-8"?>
+<file path=ppt/slides/slide17.xml><?xml version="1.0" encoding="utf-8"?>
 <p:sld xmlns:a="http://schemas.openxmlformats.org/drawingml/2006/main" xmlns:r="http://schemas.openxmlformats.org/officeDocument/2006/relationships" xmlns:p="http://schemas.openxmlformats.org/presentationml/2006/main">
   <p:cSld>
     <p:spTree>
@@ -7834,7 +9859,633 @@
 </p:sld>
 </file>
 
-<file path=ppt/slides/slide16.xml><?xml version="1.0" encoding="utf-8"?>
+<file path=ppt/slides/slide18.xml><?xml version="1.0" encoding="utf-8"?>
+<p:sld xmlns:a="http://schemas.openxmlformats.org/drawingml/2006/main" xmlns:r="http://schemas.openxmlformats.org/officeDocument/2006/relationships" xmlns:p="http://schemas.openxmlformats.org/presentationml/2006/main">
+  <p:cSld>
+    <p:spTree>
+      <p:nvGrpSpPr>
+        <p:cNvPr id="1" name="">
+          <a:extLst>
+            <a:ext uri="{FF2B5EF4-FFF2-40B4-BE49-F238E27FC236}">
+              <a16:creationId xmlns:a16="http://schemas.microsoft.com/office/drawing/2014/main" id="{4E273F1B-11A4-6296-8B4B-5408ADA952A6}"/>
+            </a:ext>
+          </a:extLst>
+        </p:cNvPr>
+        <p:cNvGrpSpPr/>
+        <p:nvPr/>
+      </p:nvGrpSpPr>
+      <p:grpSpPr>
+        <a:xfrm>
+          <a:off x="0" y="0"/>
+          <a:ext cx="0" cy="0"/>
+          <a:chOff x="0" y="0"/>
+          <a:chExt cx="0" cy="0"/>
+        </a:xfrm>
+      </p:grpSpPr>
+      <p:sp>
+        <p:nvSpPr>
+          <p:cNvPr id="2" name="Shape 0">
+            <a:extLst>
+              <a:ext uri="{FF2B5EF4-FFF2-40B4-BE49-F238E27FC236}">
+                <a16:creationId xmlns:a16="http://schemas.microsoft.com/office/drawing/2014/main" id="{5768352B-0169-AE46-543E-0ABC0E59C520}"/>
+              </a:ext>
+            </a:extLst>
+          </p:cNvPr>
+          <p:cNvSpPr/>
+          <p:nvPr/>
+        </p:nvSpPr>
+        <p:spPr>
+          <a:xfrm>
+            <a:off x="0" y="0"/>
+            <a:ext cx="9144000" cy="54864"/>
+          </a:xfrm>
+          <a:prstGeom prst="rect">
+            <a:avLst/>
+          </a:prstGeom>
+          <a:solidFill>
+            <a:srgbClr val="E8963E"/>
+          </a:solidFill>
+          <a:ln/>
+        </p:spPr>
+        <p:txBody>
+          <a:bodyPr/>
+          <a:lstStyle/>
+          <a:p>
+            <a:endParaRPr lang="es-AR" noProof="0" dirty="0"/>
+          </a:p>
+        </p:txBody>
+      </p:sp>
+      <p:sp>
+        <p:nvSpPr>
+          <p:cNvPr id="3" name="Text 1">
+            <a:extLst>
+              <a:ext uri="{FF2B5EF4-FFF2-40B4-BE49-F238E27FC236}">
+                <a16:creationId xmlns:a16="http://schemas.microsoft.com/office/drawing/2014/main" id="{F6344B7E-508F-5CCF-3D77-5872DFD0DFF2}"/>
+              </a:ext>
+            </a:extLst>
+          </p:cNvPr>
+          <p:cNvSpPr/>
+          <p:nvPr/>
+        </p:nvSpPr>
+        <p:spPr>
+          <a:xfrm>
+            <a:off x="640080" y="228600"/>
+            <a:ext cx="7863840" cy="594360"/>
+          </a:xfrm>
+          <a:prstGeom prst="rect">
+            <a:avLst/>
+          </a:prstGeom>
+          <a:noFill/>
+          <a:ln/>
+        </p:spPr>
+        <p:txBody>
+          <a:bodyPr wrap="square" lIns="0" tIns="0" rIns="0" bIns="0" rtlCol="0" anchor="ctr"/>
+          <a:lstStyle/>
+          <a:p>
+            <a:pPr marL="0" indent="0">
+              <a:buNone/>
+            </a:pPr>
+            <a:r>
+              <a:rPr lang="es-AR" sz="2600" b="1" noProof="0" dirty="0">
+                <a:solidFill>
+                  <a:srgbClr val="0F2B46"/>
+                </a:solidFill>
+                <a:latin typeface="Georgia" pitchFamily="34" charset="0"/>
+                <a:ea typeface="Georgia" pitchFamily="34" charset="-122"/>
+                <a:cs typeface="Georgia" pitchFamily="34" charset="-120"/>
+              </a:rPr>
+              <a:t>Cosas generales</a:t>
+            </a:r>
+            <a:endParaRPr lang="es-AR" sz="2600" noProof="0" dirty="0"/>
+          </a:p>
+        </p:txBody>
+      </p:sp>
+      <p:sp>
+        <p:nvSpPr>
+          <p:cNvPr id="13" name="Shape 11">
+            <a:extLst>
+              <a:ext uri="{FF2B5EF4-FFF2-40B4-BE49-F238E27FC236}">
+                <a16:creationId xmlns:a16="http://schemas.microsoft.com/office/drawing/2014/main" id="{AFECB0FE-5DE3-17E4-5806-A2C78EC02345}"/>
+              </a:ext>
+            </a:extLst>
+          </p:cNvPr>
+          <p:cNvSpPr/>
+          <p:nvPr/>
+        </p:nvSpPr>
+        <p:spPr>
+          <a:xfrm>
+            <a:off x="518809" y="1051560"/>
+            <a:ext cx="7985111" cy="3337560"/>
+          </a:xfrm>
+          <a:prstGeom prst="rect">
+            <a:avLst/>
+          </a:prstGeom>
+          <a:solidFill>
+            <a:srgbClr val="FFFFFF"/>
+          </a:solidFill>
+          <a:ln/>
+          <a:effectLst>
+            <a:outerShdw blurRad="76200" dist="25400" dir="8100000" algn="bl" rotWithShape="0">
+              <a:srgbClr val="000000">
+                <a:alpha val="12000"/>
+              </a:srgbClr>
+            </a:outerShdw>
+          </a:effectLst>
+        </p:spPr>
+        <p:txBody>
+          <a:bodyPr/>
+          <a:lstStyle/>
+          <a:p>
+            <a:endParaRPr lang="es-AR" noProof="0" dirty="0"/>
+          </a:p>
+        </p:txBody>
+      </p:sp>
+      <p:sp>
+        <p:nvSpPr>
+          <p:cNvPr id="14" name="Shape 12">
+            <a:extLst>
+              <a:ext uri="{FF2B5EF4-FFF2-40B4-BE49-F238E27FC236}">
+                <a16:creationId xmlns:a16="http://schemas.microsoft.com/office/drawing/2014/main" id="{4DDB4AAB-F27E-D101-BD9E-CC17DBA9537B}"/>
+              </a:ext>
+            </a:extLst>
+          </p:cNvPr>
+          <p:cNvSpPr/>
+          <p:nvPr/>
+        </p:nvSpPr>
+        <p:spPr>
+          <a:xfrm>
+            <a:off x="518809" y="1051560"/>
+            <a:ext cx="7985111" cy="91440"/>
+          </a:xfrm>
+          <a:prstGeom prst="rect">
+            <a:avLst/>
+          </a:prstGeom>
+          <a:solidFill>
+            <a:srgbClr val="E8963E"/>
+          </a:solidFill>
+          <a:ln/>
+        </p:spPr>
+        <p:txBody>
+          <a:bodyPr/>
+          <a:lstStyle/>
+          <a:p>
+            <a:endParaRPr lang="es-AR" noProof="0" dirty="0"/>
+          </a:p>
+        </p:txBody>
+      </p:sp>
+      <p:sp>
+        <p:nvSpPr>
+          <p:cNvPr id="17" name="Text 14">
+            <a:extLst>
+              <a:ext uri="{FF2B5EF4-FFF2-40B4-BE49-F238E27FC236}">
+                <a16:creationId xmlns:a16="http://schemas.microsoft.com/office/drawing/2014/main" id="{48D4550A-ABF2-75D5-5D06-4F53E99A9964}"/>
+              </a:ext>
+            </a:extLst>
+          </p:cNvPr>
+          <p:cNvSpPr/>
+          <p:nvPr/>
+        </p:nvSpPr>
+        <p:spPr>
+          <a:xfrm>
+            <a:off x="856034" y="1322962"/>
+            <a:ext cx="7647886" cy="2928998"/>
+          </a:xfrm>
+          <a:prstGeom prst="rect">
+            <a:avLst/>
+          </a:prstGeom>
+          <a:noFill/>
+          <a:ln/>
+        </p:spPr>
+        <p:txBody>
+          <a:bodyPr wrap="square" rtlCol="0" anchor="t"/>
+          <a:lstStyle/>
+          <a:p>
+            <a:pPr marL="342900" indent="-342900">
+              <a:spcAft>
+                <a:spcPts val="600"/>
+              </a:spcAft>
+              <a:buSzPct val="100000"/>
+              <a:buChar char="•"/>
+            </a:pPr>
+            <a:r>
+              <a:rPr lang="es-AR" sz="1100" noProof="0" dirty="0">
+                <a:solidFill>
+                  <a:srgbClr val="5A7184"/>
+                </a:solidFill>
+                <a:latin typeface="Calibri" pitchFamily="34" charset="0"/>
+                <a:ea typeface="Calibri" pitchFamily="34" charset="-122"/>
+                <a:cs typeface="Calibri" pitchFamily="34" charset="-120"/>
+              </a:rPr>
+              <a:t>No </a:t>
+            </a:r>
+            <a:r>
+              <a:rPr lang="es-AR" sz="1100" dirty="0">
+                <a:solidFill>
+                  <a:srgbClr val="5A7184"/>
+                </a:solidFill>
+                <a:latin typeface="Calibri" pitchFamily="34" charset="0"/>
+                <a:ea typeface="Calibri" pitchFamily="34" charset="-122"/>
+                <a:cs typeface="Calibri" pitchFamily="34" charset="-120"/>
+              </a:rPr>
+              <a:t>se toma asistencia, pero intenten venir</a:t>
+            </a:r>
+          </a:p>
+          <a:p>
+            <a:pPr marL="342900" indent="-342900">
+              <a:spcAft>
+                <a:spcPts val="600"/>
+              </a:spcAft>
+              <a:buSzPct val="100000"/>
+              <a:buChar char="•"/>
+            </a:pPr>
+            <a:r>
+              <a:rPr lang="es-AR" sz="1100" noProof="0" dirty="0">
+                <a:solidFill>
+                  <a:srgbClr val="5A7184"/>
+                </a:solidFill>
+                <a:latin typeface="Calibri" pitchFamily="34" charset="0"/>
+                <a:cs typeface="Calibri" pitchFamily="34" charset="-120"/>
+              </a:rPr>
+              <a:t>Las últimas clases (Web </a:t>
+            </a:r>
+            <a:r>
+              <a:rPr lang="es-AR" sz="1100" noProof="0" dirty="0" err="1">
+                <a:solidFill>
+                  <a:srgbClr val="5A7184"/>
+                </a:solidFill>
+                <a:latin typeface="Calibri" pitchFamily="34" charset="0"/>
+                <a:cs typeface="Calibri" pitchFamily="34" charset="-120"/>
+              </a:rPr>
+              <a:t>Scraping</a:t>
+            </a:r>
+            <a:r>
+              <a:rPr lang="es-AR" sz="1100" dirty="0">
+                <a:solidFill>
+                  <a:srgbClr val="5A7184"/>
+                </a:solidFill>
+                <a:latin typeface="Calibri" pitchFamily="34" charset="0"/>
+                <a:cs typeface="Calibri" pitchFamily="34" charset="-120"/>
+              </a:rPr>
+              <a:t>) son opcionales para quienes tengan interés de aprender el tema</a:t>
+            </a:r>
+          </a:p>
+          <a:p>
+            <a:pPr marL="342900" indent="-342900">
+              <a:spcAft>
+                <a:spcPts val="600"/>
+              </a:spcAft>
+              <a:buSzPct val="100000"/>
+              <a:buChar char="•"/>
+            </a:pPr>
+            <a:r>
+              <a:rPr lang="es-AR" sz="1100" noProof="0" dirty="0">
+                <a:solidFill>
+                  <a:srgbClr val="5A7184"/>
+                </a:solidFill>
+                <a:latin typeface="Calibri" pitchFamily="34" charset="0"/>
+                <a:cs typeface="Calibri" pitchFamily="34" charset="-120"/>
+              </a:rPr>
+              <a:t>Bibliografía es re</a:t>
+            </a:r>
+            <a:r>
+              <a:rPr lang="es-AR" sz="1100" dirty="0">
+                <a:solidFill>
+                  <a:srgbClr val="5A7184"/>
+                </a:solidFill>
+                <a:latin typeface="Calibri" pitchFamily="34" charset="0"/>
+                <a:cs typeface="Calibri" pitchFamily="34" charset="-120"/>
+              </a:rPr>
+              <a:t>comendada, pero no obligatoria. Es un material de apoyo</a:t>
+            </a:r>
+          </a:p>
+          <a:p>
+            <a:pPr marL="342900" indent="-342900">
+              <a:spcAft>
+                <a:spcPts val="600"/>
+              </a:spcAft>
+              <a:buSzPct val="100000"/>
+              <a:buChar char="•"/>
+            </a:pPr>
+            <a:r>
+              <a:rPr lang="es-AR" sz="1100" dirty="0">
+                <a:solidFill>
+                  <a:srgbClr val="5A7184"/>
+                </a:solidFill>
+                <a:latin typeface="Calibri" pitchFamily="34" charset="0"/>
+                <a:cs typeface="Calibri" pitchFamily="34" charset="-120"/>
+              </a:rPr>
+              <a:t>Los materiales de la semana (tanto del martes como del viernes) se van a cargar todos los domingos por la tarde</a:t>
+            </a:r>
+          </a:p>
+          <a:p>
+            <a:pPr marL="342900" indent="-342900">
+              <a:spcAft>
+                <a:spcPts val="600"/>
+              </a:spcAft>
+              <a:buSzPct val="100000"/>
+              <a:buChar char="•"/>
+            </a:pPr>
+            <a:r>
+              <a:rPr lang="es-AR" sz="1100" dirty="0">
+                <a:solidFill>
+                  <a:srgbClr val="5A7184"/>
+                </a:solidFill>
+                <a:latin typeface="Calibri" pitchFamily="34" charset="0"/>
+                <a:cs typeface="Calibri" pitchFamily="34" charset="-120"/>
+              </a:rPr>
+              <a:t>Los viernes se va a hacer un código en vivo (la mayor parte de las clases), para que el proceso lo vayamos aprendiendo en conjunto. Además de eso, va a haber un contenido ya armado más profundo y comentado, en caso de que alguien no pueda asistir </a:t>
+            </a:r>
+          </a:p>
+          <a:p>
+            <a:pPr marL="342900" indent="-342900">
+              <a:spcAft>
+                <a:spcPts val="600"/>
+              </a:spcAft>
+              <a:buSzPct val="100000"/>
+              <a:buChar char="•"/>
+            </a:pPr>
+            <a:r>
+              <a:rPr lang="es-AR" sz="1100" dirty="0">
+                <a:solidFill>
+                  <a:srgbClr val="5A7184"/>
+                </a:solidFill>
+                <a:latin typeface="Calibri" pitchFamily="34" charset="0"/>
+                <a:cs typeface="Calibri" pitchFamily="34" charset="-120"/>
+              </a:rPr>
+              <a:t>No grabo las clases, pero ustedes pueden hacerlo (probablemente). Grabaciones viejas pueden encontrarlas acá: </a:t>
+            </a:r>
+            <a:r>
+              <a:rPr lang="es-AR" sz="1100" dirty="0">
+                <a:solidFill>
+                  <a:srgbClr val="5A7184"/>
+                </a:solidFill>
+                <a:latin typeface="Calibri" pitchFamily="34" charset="0"/>
+                <a:cs typeface="Calibri" pitchFamily="34" charset="-120"/>
+                <a:hlinkClick r:id="rId3"/>
+              </a:rPr>
+              <a:t>https://docs.google.com/spreadsheets/d/1qJqhNKqZBd8fF-mceK9HD0qxr4E0L953vhowUnWI-IM/edit?gid=1693566194#gid=1693566194</a:t>
+            </a:r>
+            <a:r>
+              <a:rPr lang="es-AR" sz="1100" dirty="0">
+                <a:solidFill>
+                  <a:srgbClr val="5A7184"/>
+                </a:solidFill>
+                <a:latin typeface="Calibri" pitchFamily="34" charset="0"/>
+                <a:cs typeface="Calibri" pitchFamily="34" charset="-120"/>
+              </a:rPr>
+              <a:t> </a:t>
+            </a:r>
+          </a:p>
+          <a:p>
+            <a:pPr marL="342900" indent="-342900">
+              <a:spcAft>
+                <a:spcPts val="600"/>
+              </a:spcAft>
+              <a:buSzPct val="100000"/>
+              <a:buChar char="•"/>
+            </a:pPr>
+            <a:r>
+              <a:rPr lang="es-AR" sz="1100" dirty="0">
+                <a:solidFill>
+                  <a:srgbClr val="5A7184"/>
+                </a:solidFill>
+                <a:latin typeface="Calibri" pitchFamily="34" charset="0"/>
+                <a:cs typeface="Calibri" pitchFamily="34" charset="-120"/>
+              </a:rPr>
+              <a:t>Los materiales se suben al </a:t>
+            </a:r>
+            <a:r>
+              <a:rPr lang="es-AR" sz="1100" dirty="0" err="1">
+                <a:solidFill>
+                  <a:srgbClr val="5A7184"/>
+                </a:solidFill>
+                <a:latin typeface="Calibri" pitchFamily="34" charset="0"/>
+                <a:cs typeface="Calibri" pitchFamily="34" charset="-120"/>
+              </a:rPr>
+              <a:t>Github</a:t>
+            </a:r>
+            <a:r>
+              <a:rPr lang="es-AR" sz="1100" dirty="0">
+                <a:solidFill>
+                  <a:srgbClr val="5A7184"/>
+                </a:solidFill>
+                <a:latin typeface="Calibri" pitchFamily="34" charset="0"/>
+                <a:cs typeface="Calibri" pitchFamily="34" charset="-120"/>
+              </a:rPr>
+              <a:t> (</a:t>
+            </a:r>
+            <a:r>
+              <a:rPr lang="es-AR" sz="1100" dirty="0">
+                <a:solidFill>
+                  <a:srgbClr val="5A7184"/>
+                </a:solidFill>
+                <a:latin typeface="Calibri" pitchFamily="34" charset="0"/>
+                <a:cs typeface="Calibri" pitchFamily="34" charset="-120"/>
+                <a:hlinkClick r:id="rId4"/>
+              </a:rPr>
+              <a:t>https://github.com/nsidicarocep/curso_cdd_fce_uba_1c2026</a:t>
+            </a:r>
+            <a:r>
+              <a:rPr lang="es-AR" sz="1100" dirty="0">
+                <a:solidFill>
+                  <a:srgbClr val="5A7184"/>
+                </a:solidFill>
+                <a:latin typeface="Calibri" pitchFamily="34" charset="0"/>
+                <a:cs typeface="Calibri" pitchFamily="34" charset="-120"/>
+              </a:rPr>
+              <a:t>) . Todos los domingos se van a actualizar los materiales. Ustedes lo pueden tener </a:t>
+            </a:r>
+            <a:r>
+              <a:rPr lang="es-AR" sz="1100" dirty="0" err="1">
+                <a:solidFill>
+                  <a:srgbClr val="5A7184"/>
+                </a:solidFill>
+                <a:latin typeface="Calibri" pitchFamily="34" charset="0"/>
+                <a:cs typeface="Calibri" pitchFamily="34" charset="-120"/>
+              </a:rPr>
+              <a:t>forkear</a:t>
+            </a:r>
+            <a:r>
+              <a:rPr lang="es-AR" sz="1100" dirty="0">
+                <a:solidFill>
+                  <a:srgbClr val="5A7184"/>
+                </a:solidFill>
+                <a:latin typeface="Calibri" pitchFamily="34" charset="0"/>
+                <a:cs typeface="Calibri" pitchFamily="34" charset="-120"/>
+              </a:rPr>
+              <a:t> (replica propia que pueden modificar) o clonar. </a:t>
+            </a:r>
+            <a:r>
+              <a:rPr lang="es-AR" sz="1100" dirty="0">
+                <a:solidFill>
+                  <a:srgbClr val="5A7184"/>
+                </a:solidFill>
+                <a:latin typeface="Calibri" pitchFamily="34" charset="0"/>
+                <a:cs typeface="Calibri" pitchFamily="34" charset="-120"/>
+                <a:hlinkClick r:id="rId5"/>
+              </a:rPr>
+              <a:t>https://www.geeksforgeeks.org/git/difference-between-fork-and-clone-in-github/</a:t>
+            </a:r>
+            <a:r>
+              <a:rPr lang="es-AR" sz="1100" dirty="0">
+                <a:solidFill>
+                  <a:srgbClr val="5A7184"/>
+                </a:solidFill>
+                <a:latin typeface="Calibri" pitchFamily="34" charset="0"/>
+                <a:cs typeface="Calibri" pitchFamily="34" charset="-120"/>
+              </a:rPr>
+              <a:t> </a:t>
+            </a:r>
+          </a:p>
+          <a:p>
+            <a:pPr marL="342900" indent="-342900">
+              <a:spcAft>
+                <a:spcPts val="600"/>
+              </a:spcAft>
+              <a:buSzPct val="100000"/>
+              <a:buChar char="•"/>
+            </a:pPr>
+            <a:endParaRPr lang="es-AR" sz="1050" noProof="0" dirty="0"/>
+          </a:p>
+        </p:txBody>
+      </p:sp>
+      <p:sp>
+        <p:nvSpPr>
+          <p:cNvPr id="18" name="Shape 15">
+            <a:extLst>
+              <a:ext uri="{FF2B5EF4-FFF2-40B4-BE49-F238E27FC236}">
+                <a16:creationId xmlns:a16="http://schemas.microsoft.com/office/drawing/2014/main" id="{9AA975C2-5E3C-1921-2CEE-A53201EA1120}"/>
+              </a:ext>
+            </a:extLst>
+          </p:cNvPr>
+          <p:cNvSpPr/>
+          <p:nvPr/>
+        </p:nvSpPr>
+        <p:spPr>
+          <a:xfrm>
+            <a:off x="0" y="4709160"/>
+            <a:ext cx="9144000" cy="434340"/>
+          </a:xfrm>
+          <a:prstGeom prst="rect">
+            <a:avLst/>
+          </a:prstGeom>
+          <a:solidFill>
+            <a:srgbClr val="0F2B46"/>
+          </a:solidFill>
+          <a:ln/>
+        </p:spPr>
+        <p:txBody>
+          <a:bodyPr/>
+          <a:lstStyle/>
+          <a:p>
+            <a:endParaRPr lang="es-AR" noProof="0" dirty="0"/>
+          </a:p>
+        </p:txBody>
+      </p:sp>
+      <p:sp>
+        <p:nvSpPr>
+          <p:cNvPr id="19" name="Text 16">
+            <a:extLst>
+              <a:ext uri="{FF2B5EF4-FFF2-40B4-BE49-F238E27FC236}">
+                <a16:creationId xmlns:a16="http://schemas.microsoft.com/office/drawing/2014/main" id="{6F9F45F0-43C9-6A47-9CFF-EE69E8BFCB16}"/>
+              </a:ext>
+            </a:extLst>
+          </p:cNvPr>
+          <p:cNvSpPr/>
+          <p:nvPr/>
+        </p:nvSpPr>
+        <p:spPr>
+          <a:xfrm>
+            <a:off x="457200" y="4709160"/>
+            <a:ext cx="8229600" cy="434340"/>
+          </a:xfrm>
+          <a:prstGeom prst="rect">
+            <a:avLst/>
+          </a:prstGeom>
+          <a:noFill/>
+          <a:ln/>
+        </p:spPr>
+        <p:txBody>
+          <a:bodyPr wrap="square" lIns="0" tIns="0" rIns="0" bIns="0" rtlCol="0" anchor="ctr"/>
+          <a:lstStyle/>
+          <a:p>
+            <a:pPr marL="0" indent="0" algn="ctr">
+              <a:buNone/>
+            </a:pPr>
+            <a:r>
+              <a:rPr lang="es-AR" sz="850" noProof="0" dirty="0">
+                <a:solidFill>
+                  <a:srgbClr val="9DC1D9"/>
+                </a:solidFill>
+                <a:latin typeface="Calibri" pitchFamily="34" charset="0"/>
+                <a:ea typeface="Calibri" pitchFamily="34" charset="-122"/>
+                <a:cs typeface="Calibri" pitchFamily="34" charset="-120"/>
+              </a:rPr>
+              <a:t>Ciencia de Datos para Economía y Negocios  |  FCE-UBA  |  Nicolás Sidicaro</a:t>
+            </a:r>
+            <a:endParaRPr lang="es-AR" sz="850" noProof="0" dirty="0"/>
+          </a:p>
+        </p:txBody>
+      </p:sp>
+      <p:sp>
+        <p:nvSpPr>
+          <p:cNvPr id="20" name="Text 17">
+            <a:extLst>
+              <a:ext uri="{FF2B5EF4-FFF2-40B4-BE49-F238E27FC236}">
+                <a16:creationId xmlns:a16="http://schemas.microsoft.com/office/drawing/2014/main" id="{2B6F93E7-1E71-F327-35B5-FAE37D94204E}"/>
+              </a:ext>
+            </a:extLst>
+          </p:cNvPr>
+          <p:cNvSpPr/>
+          <p:nvPr/>
+        </p:nvSpPr>
+        <p:spPr>
+          <a:xfrm>
+            <a:off x="8046720" y="4709160"/>
+            <a:ext cx="914400" cy="434340"/>
+          </a:xfrm>
+          <a:prstGeom prst="rect">
+            <a:avLst/>
+          </a:prstGeom>
+          <a:noFill/>
+          <a:ln/>
+        </p:spPr>
+        <p:txBody>
+          <a:bodyPr wrap="square" lIns="0" tIns="0" rIns="0" bIns="0" rtlCol="0" anchor="ctr"/>
+          <a:lstStyle/>
+          <a:p>
+            <a:pPr marL="0" indent="0" algn="r">
+              <a:buNone/>
+            </a:pPr>
+            <a:r>
+              <a:rPr lang="es-AR" sz="800" noProof="0" dirty="0">
+                <a:solidFill>
+                  <a:srgbClr val="6A9AB8"/>
+                </a:solidFill>
+                <a:latin typeface="Calibri" pitchFamily="34" charset="0"/>
+                <a:ea typeface="Calibri" pitchFamily="34" charset="-122"/>
+                <a:cs typeface="Calibri" pitchFamily="34" charset="-120"/>
+              </a:rPr>
+              <a:t>9 / 11</a:t>
+            </a:r>
+            <a:endParaRPr lang="es-AR" sz="800" noProof="0" dirty="0"/>
+          </a:p>
+        </p:txBody>
+      </p:sp>
+    </p:spTree>
+    <p:extLst>
+      <p:ext uri="{BB962C8B-B14F-4D97-AF65-F5344CB8AC3E}">
+        <p14:creationId xmlns:p14="http://schemas.microsoft.com/office/powerpoint/2010/main" val="50828494"/>
+      </p:ext>
+    </p:extLst>
+  </p:cSld>
+  <p:clrMapOvr>
+    <a:masterClrMapping/>
+  </p:clrMapOvr>
+</p:sld>
+</file>
+
+<file path=ppt/slides/slide19.xml><?xml version="1.0" encoding="utf-8"?>
 <p:sld xmlns:a="http://schemas.openxmlformats.org/drawingml/2006/main" xmlns:r="http://schemas.openxmlformats.org/officeDocument/2006/relationships" xmlns:p="http://schemas.openxmlformats.org/presentationml/2006/main">
   <p:cSld name="Slide 11">
     <p:bg>
@@ -8201,6 +10852,1047 @@
 
 <file path=ppt/slides/slide2.xml><?xml version="1.0" encoding="utf-8"?>
 <p:sld xmlns:a="http://schemas.openxmlformats.org/drawingml/2006/main" xmlns:r="http://schemas.openxmlformats.org/officeDocument/2006/relationships" xmlns:p="http://schemas.openxmlformats.org/presentationml/2006/main">
+  <p:cSld>
+    <p:spTree>
+      <p:nvGrpSpPr>
+        <p:cNvPr id="1" name="">
+          <a:extLst>
+            <a:ext uri="{FF2B5EF4-FFF2-40B4-BE49-F238E27FC236}">
+              <a16:creationId xmlns:a16="http://schemas.microsoft.com/office/drawing/2014/main" id="{62B49A10-3B94-A216-F8F7-4BA16EA33490}"/>
+            </a:ext>
+          </a:extLst>
+        </p:cNvPr>
+        <p:cNvGrpSpPr/>
+        <p:nvPr/>
+      </p:nvGrpSpPr>
+      <p:grpSpPr>
+        <a:xfrm>
+          <a:off x="0" y="0"/>
+          <a:ext cx="0" cy="0"/>
+          <a:chOff x="0" y="0"/>
+          <a:chExt cx="0" cy="0"/>
+        </a:xfrm>
+      </p:grpSpPr>
+      <p:sp>
+        <p:nvSpPr>
+          <p:cNvPr id="2" name="Shape 0">
+            <a:extLst>
+              <a:ext uri="{FF2B5EF4-FFF2-40B4-BE49-F238E27FC236}">
+                <a16:creationId xmlns:a16="http://schemas.microsoft.com/office/drawing/2014/main" id="{126E0ED1-EDCD-05C4-69D1-D393B797E668}"/>
+              </a:ext>
+            </a:extLst>
+          </p:cNvPr>
+          <p:cNvSpPr/>
+          <p:nvPr/>
+        </p:nvSpPr>
+        <p:spPr>
+          <a:xfrm>
+            <a:off x="0" y="0"/>
+            <a:ext cx="9144000" cy="54864"/>
+          </a:xfrm>
+          <a:prstGeom prst="rect">
+            <a:avLst/>
+          </a:prstGeom>
+          <a:solidFill>
+            <a:srgbClr val="E8963E"/>
+          </a:solidFill>
+          <a:ln/>
+        </p:spPr>
+        <p:txBody>
+          <a:bodyPr/>
+          <a:lstStyle/>
+          <a:p>
+            <a:endParaRPr lang="es-AR" noProof="0" dirty="0"/>
+          </a:p>
+        </p:txBody>
+      </p:sp>
+      <p:sp>
+        <p:nvSpPr>
+          <p:cNvPr id="3" name="Text 1">
+            <a:extLst>
+              <a:ext uri="{FF2B5EF4-FFF2-40B4-BE49-F238E27FC236}">
+                <a16:creationId xmlns:a16="http://schemas.microsoft.com/office/drawing/2014/main" id="{B4712408-132B-B600-A6FB-1E50F77A845B}"/>
+              </a:ext>
+            </a:extLst>
+          </p:cNvPr>
+          <p:cNvSpPr/>
+          <p:nvPr/>
+        </p:nvSpPr>
+        <p:spPr>
+          <a:xfrm>
+            <a:off x="640080" y="228600"/>
+            <a:ext cx="7863840" cy="594360"/>
+          </a:xfrm>
+          <a:prstGeom prst="rect">
+            <a:avLst/>
+          </a:prstGeom>
+          <a:noFill/>
+          <a:ln/>
+        </p:spPr>
+        <p:txBody>
+          <a:bodyPr wrap="square" lIns="0" tIns="0" rIns="0" bIns="0" rtlCol="0" anchor="ctr"/>
+          <a:lstStyle/>
+          <a:p>
+            <a:pPr marL="0" indent="0">
+              <a:buNone/>
+            </a:pPr>
+            <a:r>
+              <a:rPr lang="es-AR" sz="3000" b="1" noProof="0" dirty="0">
+                <a:solidFill>
+                  <a:srgbClr val="0F2B46"/>
+                </a:solidFill>
+                <a:latin typeface="Georgia" pitchFamily="34" charset="0"/>
+                <a:ea typeface="Georgia" pitchFamily="34" charset="-122"/>
+                <a:cs typeface="Georgia" pitchFamily="34" charset="-120"/>
+              </a:rPr>
+              <a:t>Presentación</a:t>
+            </a:r>
+            <a:endParaRPr lang="es-AR" sz="3000" noProof="0" dirty="0"/>
+          </a:p>
+        </p:txBody>
+      </p:sp>
+      <p:sp>
+        <p:nvSpPr>
+          <p:cNvPr id="4" name="Text 2">
+            <a:extLst>
+              <a:ext uri="{FF2B5EF4-FFF2-40B4-BE49-F238E27FC236}">
+                <a16:creationId xmlns:a16="http://schemas.microsoft.com/office/drawing/2014/main" id="{FB5F928A-E01E-3D59-9783-970F1A7D1667}"/>
+              </a:ext>
+            </a:extLst>
+          </p:cNvPr>
+          <p:cNvSpPr/>
+          <p:nvPr/>
+        </p:nvSpPr>
+        <p:spPr>
+          <a:xfrm>
+            <a:off x="640080" y="960120"/>
+            <a:ext cx="7863840" cy="685800"/>
+          </a:xfrm>
+          <a:prstGeom prst="rect">
+            <a:avLst/>
+          </a:prstGeom>
+          <a:noFill/>
+          <a:ln/>
+        </p:spPr>
+        <p:txBody>
+          <a:bodyPr wrap="square" rtlCol="0" anchor="t"/>
+          <a:lstStyle/>
+          <a:p>
+            <a:pPr marL="0" indent="0" algn="l">
+              <a:lnSpc>
+                <a:spcPct val="135000"/>
+              </a:lnSpc>
+              <a:buNone/>
+            </a:pPr>
+            <a:r>
+              <a:rPr lang="es-AR" sz="1300" noProof="0" dirty="0">
+                <a:solidFill>
+                  <a:srgbClr val="5A7184"/>
+                </a:solidFill>
+                <a:latin typeface="Calibri" pitchFamily="34" charset="0"/>
+                <a:ea typeface="Calibri" pitchFamily="34" charset="-122"/>
+                <a:cs typeface="Calibri" pitchFamily="34" charset="-120"/>
+              </a:rPr>
+              <a:t>Docente: Nicolás Sidicaro</a:t>
+            </a:r>
+          </a:p>
+          <a:p>
+            <a:pPr marL="0" indent="0" algn="l">
+              <a:lnSpc>
+                <a:spcPct val="135000"/>
+              </a:lnSpc>
+              <a:buNone/>
+            </a:pPr>
+            <a:r>
+              <a:rPr lang="es-AR" sz="1300" dirty="0">
+                <a:solidFill>
+                  <a:srgbClr val="5A7184"/>
+                </a:solidFill>
+                <a:latin typeface="Calibri" pitchFamily="34" charset="0"/>
+                <a:cs typeface="Calibri" pitchFamily="34" charset="-120"/>
+              </a:rPr>
+              <a:t>Mail: nsidicaro.fce@gmail.com</a:t>
+            </a:r>
+            <a:endParaRPr lang="es-AR" sz="1300" noProof="0" dirty="0"/>
+          </a:p>
+        </p:txBody>
+      </p:sp>
+      <p:sp>
+        <p:nvSpPr>
+          <p:cNvPr id="5" name="Shape 3">
+            <a:extLst>
+              <a:ext uri="{FF2B5EF4-FFF2-40B4-BE49-F238E27FC236}">
+                <a16:creationId xmlns:a16="http://schemas.microsoft.com/office/drawing/2014/main" id="{C8CC17E7-7E81-ADF8-3DA0-BAD076D9D46C}"/>
+              </a:ext>
+            </a:extLst>
+          </p:cNvPr>
+          <p:cNvSpPr/>
+          <p:nvPr/>
+        </p:nvSpPr>
+        <p:spPr>
+          <a:xfrm>
+            <a:off x="640080" y="1828800"/>
+            <a:ext cx="2514600" cy="2331720"/>
+          </a:xfrm>
+          <a:prstGeom prst="rect">
+            <a:avLst/>
+          </a:prstGeom>
+          <a:solidFill>
+            <a:srgbClr val="FFFFFF"/>
+          </a:solidFill>
+          <a:ln/>
+          <a:effectLst>
+            <a:outerShdw blurRad="76200" dist="25400" dir="8100000" algn="bl" rotWithShape="0">
+              <a:srgbClr val="000000">
+                <a:alpha val="12000"/>
+              </a:srgbClr>
+            </a:outerShdw>
+          </a:effectLst>
+        </p:spPr>
+        <p:txBody>
+          <a:bodyPr/>
+          <a:lstStyle/>
+          <a:p>
+            <a:endParaRPr lang="es-AR" noProof="0" dirty="0"/>
+          </a:p>
+        </p:txBody>
+      </p:sp>
+      <p:sp>
+        <p:nvSpPr>
+          <p:cNvPr id="6" name="Shape 4">
+            <a:extLst>
+              <a:ext uri="{FF2B5EF4-FFF2-40B4-BE49-F238E27FC236}">
+                <a16:creationId xmlns:a16="http://schemas.microsoft.com/office/drawing/2014/main" id="{0DE83D8A-6A86-A540-73B3-B60C49950138}"/>
+              </a:ext>
+            </a:extLst>
+          </p:cNvPr>
+          <p:cNvSpPr/>
+          <p:nvPr/>
+        </p:nvSpPr>
+        <p:spPr>
+          <a:xfrm>
+            <a:off x="640080" y="1828800"/>
+            <a:ext cx="2514600" cy="54864"/>
+          </a:xfrm>
+          <a:prstGeom prst="rect">
+            <a:avLst/>
+          </a:prstGeom>
+          <a:solidFill>
+            <a:srgbClr val="1A6B8A"/>
+          </a:solidFill>
+          <a:ln/>
+        </p:spPr>
+        <p:txBody>
+          <a:bodyPr/>
+          <a:lstStyle/>
+          <a:p>
+            <a:endParaRPr lang="es-AR" noProof="0" dirty="0"/>
+          </a:p>
+        </p:txBody>
+      </p:sp>
+      <p:sp>
+        <p:nvSpPr>
+          <p:cNvPr id="8" name="Text 5">
+            <a:extLst>
+              <a:ext uri="{FF2B5EF4-FFF2-40B4-BE49-F238E27FC236}">
+                <a16:creationId xmlns:a16="http://schemas.microsoft.com/office/drawing/2014/main" id="{65942137-9000-888B-AE2D-85D355BD5486}"/>
+              </a:ext>
+            </a:extLst>
+          </p:cNvPr>
+          <p:cNvSpPr/>
+          <p:nvPr/>
+        </p:nvSpPr>
+        <p:spPr>
+          <a:xfrm>
+            <a:off x="822960" y="2016901"/>
+            <a:ext cx="2148840" cy="365760"/>
+          </a:xfrm>
+          <a:prstGeom prst="rect">
+            <a:avLst/>
+          </a:prstGeom>
+          <a:noFill/>
+          <a:ln/>
+        </p:spPr>
+        <p:txBody>
+          <a:bodyPr wrap="square" lIns="0" tIns="0" rIns="0" bIns="0" rtlCol="0" anchor="ctr"/>
+          <a:lstStyle/>
+          <a:p>
+            <a:pPr marL="0" indent="0" algn="ctr">
+              <a:buNone/>
+            </a:pPr>
+            <a:r>
+              <a:rPr lang="es-AR" sz="1500" b="1" noProof="0" dirty="0">
+                <a:solidFill>
+                  <a:srgbClr val="0F2B46"/>
+                </a:solidFill>
+                <a:latin typeface="Georgia" pitchFamily="34" charset="0"/>
+                <a:ea typeface="Georgia" pitchFamily="34" charset="-122"/>
+                <a:cs typeface="Georgia" pitchFamily="34" charset="-120"/>
+              </a:rPr>
+              <a:t>Trabajo</a:t>
+            </a:r>
+            <a:endParaRPr lang="es-AR" sz="1500" noProof="0" dirty="0"/>
+          </a:p>
+        </p:txBody>
+      </p:sp>
+      <p:sp>
+        <p:nvSpPr>
+          <p:cNvPr id="9" name="Text 6">
+            <a:extLst>
+              <a:ext uri="{FF2B5EF4-FFF2-40B4-BE49-F238E27FC236}">
+                <a16:creationId xmlns:a16="http://schemas.microsoft.com/office/drawing/2014/main" id="{3E6212A8-D4B9-1CF5-169A-78C74B05E994}"/>
+              </a:ext>
+            </a:extLst>
+          </p:cNvPr>
+          <p:cNvSpPr/>
+          <p:nvPr/>
+        </p:nvSpPr>
+        <p:spPr>
+          <a:xfrm>
+            <a:off x="822960" y="2368296"/>
+            <a:ext cx="2148840" cy="1517904"/>
+          </a:xfrm>
+          <a:prstGeom prst="rect">
+            <a:avLst/>
+          </a:prstGeom>
+          <a:noFill/>
+          <a:ln/>
+        </p:spPr>
+        <p:txBody>
+          <a:bodyPr wrap="square" rtlCol="0" anchor="t"/>
+          <a:lstStyle/>
+          <a:p>
+            <a:pPr marL="0" indent="0" algn="ctr">
+              <a:lnSpc>
+                <a:spcPct val="130000"/>
+              </a:lnSpc>
+              <a:buNone/>
+            </a:pPr>
+            <a:r>
+              <a:rPr lang="es-AR" sz="1100" noProof="0" dirty="0">
+                <a:solidFill>
+                  <a:srgbClr val="5A7184"/>
+                </a:solidFill>
+                <a:latin typeface="Calibri" pitchFamily="34" charset="0"/>
+                <a:ea typeface="Calibri" pitchFamily="34" charset="-122"/>
+                <a:cs typeface="Calibri" pitchFamily="34" charset="-120"/>
+              </a:rPr>
+              <a:t>Fundar (</a:t>
+            </a:r>
+            <a:r>
+              <a:rPr lang="es-AR" sz="1100" noProof="0" dirty="0" err="1">
+                <a:solidFill>
+                  <a:srgbClr val="5A7184"/>
+                </a:solidFill>
+                <a:latin typeface="Calibri" pitchFamily="34" charset="0"/>
+                <a:ea typeface="Calibri" pitchFamily="34" charset="-122"/>
+                <a:cs typeface="Calibri" pitchFamily="34" charset="-120"/>
+              </a:rPr>
+              <a:t>Think</a:t>
+            </a:r>
+            <a:r>
+              <a:rPr lang="es-AR" sz="1100" noProof="0" dirty="0">
+                <a:solidFill>
+                  <a:srgbClr val="5A7184"/>
+                </a:solidFill>
+                <a:latin typeface="Calibri" pitchFamily="34" charset="0"/>
+                <a:ea typeface="Calibri" pitchFamily="34" charset="-122"/>
+                <a:cs typeface="Calibri" pitchFamily="34" charset="-120"/>
+              </a:rPr>
+              <a:t> </a:t>
+            </a:r>
+            <a:r>
+              <a:rPr lang="es-AR" sz="1100" noProof="0" dirty="0" err="1">
+                <a:solidFill>
+                  <a:srgbClr val="5A7184"/>
+                </a:solidFill>
+                <a:latin typeface="Calibri" pitchFamily="34" charset="0"/>
+                <a:ea typeface="Calibri" pitchFamily="34" charset="-122"/>
+                <a:cs typeface="Calibri" pitchFamily="34" charset="-120"/>
+              </a:rPr>
+              <a:t>Tank</a:t>
+            </a:r>
+            <a:r>
+              <a:rPr lang="es-AR" sz="1100" noProof="0" dirty="0">
+                <a:solidFill>
+                  <a:srgbClr val="5A7184"/>
+                </a:solidFill>
+                <a:latin typeface="Calibri" pitchFamily="34" charset="0"/>
+                <a:ea typeface="Calibri" pitchFamily="34" charset="-122"/>
+                <a:cs typeface="Calibri" pitchFamily="34" charset="-120"/>
+              </a:rPr>
+              <a:t>)</a:t>
+            </a:r>
+          </a:p>
+          <a:p>
+            <a:pPr marL="0" indent="0" algn="ctr">
+              <a:lnSpc>
+                <a:spcPct val="130000"/>
+              </a:lnSpc>
+              <a:buNone/>
+            </a:pPr>
+            <a:r>
+              <a:rPr lang="es-AR" sz="1100" noProof="0" dirty="0">
+                <a:solidFill>
+                  <a:srgbClr val="5A7184"/>
+                </a:solidFill>
+                <a:latin typeface="Calibri" pitchFamily="34" charset="0"/>
+                <a:ea typeface="Calibri" pitchFamily="34" charset="-122"/>
+                <a:cs typeface="Calibri" pitchFamily="34" charset="-120"/>
+              </a:rPr>
+              <a:t>Ministerio de Economía</a:t>
+            </a:r>
+          </a:p>
+          <a:p>
+            <a:pPr marL="0" indent="0" algn="ctr">
+              <a:lnSpc>
+                <a:spcPct val="130000"/>
+              </a:lnSpc>
+              <a:buNone/>
+            </a:pPr>
+            <a:r>
+              <a:rPr lang="es-AR" sz="1100" noProof="0" dirty="0">
+                <a:solidFill>
+                  <a:srgbClr val="5A7184"/>
+                </a:solidFill>
+                <a:latin typeface="Calibri" pitchFamily="34" charset="0"/>
+                <a:ea typeface="Calibri" pitchFamily="34" charset="-122"/>
+                <a:cs typeface="Calibri" pitchFamily="34" charset="-120"/>
+              </a:rPr>
+              <a:t>Sector privado</a:t>
+            </a:r>
+          </a:p>
+          <a:p>
+            <a:pPr marL="0" indent="0" algn="ctr">
+              <a:lnSpc>
+                <a:spcPct val="130000"/>
+              </a:lnSpc>
+              <a:buNone/>
+            </a:pPr>
+            <a:endParaRPr lang="es-AR" sz="1100" dirty="0">
+              <a:solidFill>
+                <a:srgbClr val="5A7184"/>
+              </a:solidFill>
+              <a:latin typeface="Calibri" pitchFamily="34" charset="0"/>
+              <a:cs typeface="Calibri" pitchFamily="34" charset="-120"/>
+            </a:endParaRPr>
+          </a:p>
+          <a:p>
+            <a:pPr marL="0" indent="0" algn="ctr">
+              <a:lnSpc>
+                <a:spcPct val="130000"/>
+              </a:lnSpc>
+              <a:buNone/>
+            </a:pPr>
+            <a:r>
+              <a:rPr lang="es-AR" sz="1100" noProof="0" dirty="0">
+                <a:solidFill>
+                  <a:srgbClr val="5A7184"/>
+                </a:solidFill>
+                <a:latin typeface="Calibri" pitchFamily="34" charset="0"/>
+                <a:cs typeface="Calibri" pitchFamily="34" charset="-120"/>
+              </a:rPr>
+              <a:t>Docente de Econometría (UADE) y Ciencia de Datos (UBA)</a:t>
+            </a:r>
+            <a:endParaRPr lang="es-AR" sz="1100" noProof="0" dirty="0"/>
+          </a:p>
+        </p:txBody>
+      </p:sp>
+      <p:sp>
+        <p:nvSpPr>
+          <p:cNvPr id="10" name="Shape 7">
+            <a:extLst>
+              <a:ext uri="{FF2B5EF4-FFF2-40B4-BE49-F238E27FC236}">
+                <a16:creationId xmlns:a16="http://schemas.microsoft.com/office/drawing/2014/main" id="{3814B89B-50AD-4870-FED5-795647D9DB86}"/>
+              </a:ext>
+            </a:extLst>
+          </p:cNvPr>
+          <p:cNvSpPr/>
+          <p:nvPr/>
+        </p:nvSpPr>
+        <p:spPr>
+          <a:xfrm>
+            <a:off x="3429000" y="1828800"/>
+            <a:ext cx="2514600" cy="2331720"/>
+          </a:xfrm>
+          <a:prstGeom prst="rect">
+            <a:avLst/>
+          </a:prstGeom>
+          <a:solidFill>
+            <a:srgbClr val="FFFFFF"/>
+          </a:solidFill>
+          <a:ln/>
+          <a:effectLst>
+            <a:outerShdw blurRad="76200" dist="25400" dir="8100000" algn="bl" rotWithShape="0">
+              <a:srgbClr val="000000">
+                <a:alpha val="12000"/>
+              </a:srgbClr>
+            </a:outerShdw>
+          </a:effectLst>
+        </p:spPr>
+        <p:txBody>
+          <a:bodyPr/>
+          <a:lstStyle/>
+          <a:p>
+            <a:endParaRPr lang="es-AR" noProof="0" dirty="0"/>
+          </a:p>
+        </p:txBody>
+      </p:sp>
+      <p:sp>
+        <p:nvSpPr>
+          <p:cNvPr id="11" name="Shape 8">
+            <a:extLst>
+              <a:ext uri="{FF2B5EF4-FFF2-40B4-BE49-F238E27FC236}">
+                <a16:creationId xmlns:a16="http://schemas.microsoft.com/office/drawing/2014/main" id="{997FB800-CF24-0ECC-1907-F4C861AEEA93}"/>
+              </a:ext>
+            </a:extLst>
+          </p:cNvPr>
+          <p:cNvSpPr/>
+          <p:nvPr/>
+        </p:nvSpPr>
+        <p:spPr>
+          <a:xfrm>
+            <a:off x="3429000" y="1828800"/>
+            <a:ext cx="2514600" cy="54864"/>
+          </a:xfrm>
+          <a:prstGeom prst="rect">
+            <a:avLst/>
+          </a:prstGeom>
+          <a:solidFill>
+            <a:srgbClr val="1A6B8A"/>
+          </a:solidFill>
+          <a:ln/>
+        </p:spPr>
+        <p:txBody>
+          <a:bodyPr/>
+          <a:lstStyle/>
+          <a:p>
+            <a:endParaRPr lang="es-AR" noProof="0" dirty="0"/>
+          </a:p>
+        </p:txBody>
+      </p:sp>
+      <p:sp>
+        <p:nvSpPr>
+          <p:cNvPr id="13" name="Text 9">
+            <a:extLst>
+              <a:ext uri="{FF2B5EF4-FFF2-40B4-BE49-F238E27FC236}">
+                <a16:creationId xmlns:a16="http://schemas.microsoft.com/office/drawing/2014/main" id="{FEB6D645-6275-5485-5EC0-2BECD9BC804C}"/>
+              </a:ext>
+            </a:extLst>
+          </p:cNvPr>
+          <p:cNvSpPr/>
+          <p:nvPr/>
+        </p:nvSpPr>
+        <p:spPr>
+          <a:xfrm>
+            <a:off x="3611880" y="2002536"/>
+            <a:ext cx="2148840" cy="365760"/>
+          </a:xfrm>
+          <a:prstGeom prst="rect">
+            <a:avLst/>
+          </a:prstGeom>
+          <a:noFill/>
+          <a:ln/>
+        </p:spPr>
+        <p:txBody>
+          <a:bodyPr wrap="square" lIns="0" tIns="0" rIns="0" bIns="0" rtlCol="0" anchor="ctr"/>
+          <a:lstStyle/>
+          <a:p>
+            <a:pPr marL="0" indent="0" algn="ctr">
+              <a:buNone/>
+            </a:pPr>
+            <a:r>
+              <a:rPr lang="es-AR" sz="1500" b="1" noProof="0" dirty="0">
+                <a:solidFill>
+                  <a:srgbClr val="0F2B46"/>
+                </a:solidFill>
+                <a:latin typeface="Georgia" pitchFamily="34" charset="0"/>
+                <a:ea typeface="Georgia" pitchFamily="34" charset="-122"/>
+                <a:cs typeface="Georgia" pitchFamily="34" charset="-120"/>
+              </a:rPr>
+              <a:t>Estudios</a:t>
+            </a:r>
+            <a:endParaRPr lang="es-AR" sz="1500" noProof="0" dirty="0"/>
+          </a:p>
+        </p:txBody>
+      </p:sp>
+      <p:sp>
+        <p:nvSpPr>
+          <p:cNvPr id="14" name="Text 10">
+            <a:extLst>
+              <a:ext uri="{FF2B5EF4-FFF2-40B4-BE49-F238E27FC236}">
+                <a16:creationId xmlns:a16="http://schemas.microsoft.com/office/drawing/2014/main" id="{520D6901-9C8E-0E22-9E9A-3D68B4579929}"/>
+              </a:ext>
+            </a:extLst>
+          </p:cNvPr>
+          <p:cNvSpPr/>
+          <p:nvPr/>
+        </p:nvSpPr>
+        <p:spPr>
+          <a:xfrm>
+            <a:off x="3611880" y="2377440"/>
+            <a:ext cx="2148840" cy="777240"/>
+          </a:xfrm>
+          <a:prstGeom prst="rect">
+            <a:avLst/>
+          </a:prstGeom>
+          <a:noFill/>
+          <a:ln/>
+        </p:spPr>
+        <p:txBody>
+          <a:bodyPr wrap="square" rtlCol="0" anchor="t"/>
+          <a:lstStyle/>
+          <a:p>
+            <a:pPr marL="0" indent="0" algn="ctr">
+              <a:lnSpc>
+                <a:spcPct val="130000"/>
+              </a:lnSpc>
+              <a:buNone/>
+            </a:pPr>
+            <a:r>
+              <a:rPr lang="es-AR" sz="1100" noProof="0" dirty="0">
+                <a:solidFill>
+                  <a:srgbClr val="5A7184"/>
+                </a:solidFill>
+                <a:latin typeface="Calibri" pitchFamily="34" charset="0"/>
+                <a:ea typeface="Calibri" pitchFamily="34" charset="-122"/>
+                <a:cs typeface="Calibri" pitchFamily="34" charset="-120"/>
+              </a:rPr>
+              <a:t>Economista (UBA)</a:t>
+            </a:r>
+          </a:p>
+          <a:p>
+            <a:pPr marL="0" indent="0" algn="ctr">
+              <a:lnSpc>
+                <a:spcPct val="130000"/>
+              </a:lnSpc>
+              <a:buNone/>
+            </a:pPr>
+            <a:r>
+              <a:rPr lang="es-AR" sz="1100" dirty="0">
+                <a:solidFill>
+                  <a:srgbClr val="5A7184"/>
+                </a:solidFill>
+                <a:latin typeface="Calibri" pitchFamily="34" charset="0"/>
+                <a:cs typeface="Calibri" pitchFamily="34" charset="-120"/>
+              </a:rPr>
+              <a:t>Especialista en Políticas Sociales (UNTREF)</a:t>
+            </a:r>
+          </a:p>
+          <a:p>
+            <a:pPr marL="0" indent="0" algn="ctr">
+              <a:lnSpc>
+                <a:spcPct val="130000"/>
+              </a:lnSpc>
+              <a:buNone/>
+            </a:pPr>
+            <a:r>
+              <a:rPr lang="es-AR" sz="1100" noProof="0" dirty="0">
+                <a:solidFill>
+                  <a:srgbClr val="5A7184"/>
+                </a:solidFill>
+                <a:latin typeface="Calibri" pitchFamily="34" charset="0"/>
+                <a:cs typeface="Calibri" pitchFamily="34" charset="-120"/>
+              </a:rPr>
+              <a:t>Maestrando en Desarrollo Económico (UNSAM)</a:t>
+            </a:r>
+            <a:endParaRPr lang="es-AR" sz="1100" noProof="0" dirty="0"/>
+          </a:p>
+        </p:txBody>
+      </p:sp>
+      <p:sp>
+        <p:nvSpPr>
+          <p:cNvPr id="15" name="Shape 11">
+            <a:extLst>
+              <a:ext uri="{FF2B5EF4-FFF2-40B4-BE49-F238E27FC236}">
+                <a16:creationId xmlns:a16="http://schemas.microsoft.com/office/drawing/2014/main" id="{2B35C7F6-8E1E-A3BC-6843-62C8B21A5C44}"/>
+              </a:ext>
+            </a:extLst>
+          </p:cNvPr>
+          <p:cNvSpPr/>
+          <p:nvPr/>
+        </p:nvSpPr>
+        <p:spPr>
+          <a:xfrm>
+            <a:off x="6217920" y="1828800"/>
+            <a:ext cx="2514600" cy="2331720"/>
+          </a:xfrm>
+          <a:prstGeom prst="rect">
+            <a:avLst/>
+          </a:prstGeom>
+          <a:solidFill>
+            <a:srgbClr val="FFFFFF"/>
+          </a:solidFill>
+          <a:ln/>
+          <a:effectLst>
+            <a:outerShdw blurRad="76200" dist="25400" dir="8100000" algn="bl" rotWithShape="0">
+              <a:srgbClr val="000000">
+                <a:alpha val="12000"/>
+              </a:srgbClr>
+            </a:outerShdw>
+          </a:effectLst>
+        </p:spPr>
+        <p:txBody>
+          <a:bodyPr/>
+          <a:lstStyle/>
+          <a:p>
+            <a:endParaRPr lang="es-AR" noProof="0" dirty="0"/>
+          </a:p>
+        </p:txBody>
+      </p:sp>
+      <p:sp>
+        <p:nvSpPr>
+          <p:cNvPr id="16" name="Shape 12">
+            <a:extLst>
+              <a:ext uri="{FF2B5EF4-FFF2-40B4-BE49-F238E27FC236}">
+                <a16:creationId xmlns:a16="http://schemas.microsoft.com/office/drawing/2014/main" id="{D8EB5247-4A94-1709-28D5-9685965CF185}"/>
+              </a:ext>
+            </a:extLst>
+          </p:cNvPr>
+          <p:cNvSpPr/>
+          <p:nvPr/>
+        </p:nvSpPr>
+        <p:spPr>
+          <a:xfrm>
+            <a:off x="6217920" y="1828800"/>
+            <a:ext cx="2514600" cy="54864"/>
+          </a:xfrm>
+          <a:prstGeom prst="rect">
+            <a:avLst/>
+          </a:prstGeom>
+          <a:solidFill>
+            <a:srgbClr val="1A6B8A"/>
+          </a:solidFill>
+          <a:ln/>
+        </p:spPr>
+        <p:txBody>
+          <a:bodyPr/>
+          <a:lstStyle/>
+          <a:p>
+            <a:endParaRPr lang="es-AR" noProof="0" dirty="0"/>
+          </a:p>
+        </p:txBody>
+      </p:sp>
+      <p:sp>
+        <p:nvSpPr>
+          <p:cNvPr id="18" name="Text 13">
+            <a:extLst>
+              <a:ext uri="{FF2B5EF4-FFF2-40B4-BE49-F238E27FC236}">
+                <a16:creationId xmlns:a16="http://schemas.microsoft.com/office/drawing/2014/main" id="{C864023C-7D9E-028E-A397-F90AEB84C3FA}"/>
+              </a:ext>
+            </a:extLst>
+          </p:cNvPr>
+          <p:cNvSpPr/>
+          <p:nvPr/>
+        </p:nvSpPr>
+        <p:spPr>
+          <a:xfrm>
+            <a:off x="6290554" y="2016901"/>
+            <a:ext cx="2148840" cy="365760"/>
+          </a:xfrm>
+          <a:prstGeom prst="rect">
+            <a:avLst/>
+          </a:prstGeom>
+          <a:noFill/>
+          <a:ln/>
+        </p:spPr>
+        <p:txBody>
+          <a:bodyPr wrap="square" lIns="0" tIns="0" rIns="0" bIns="0" rtlCol="0" anchor="ctr"/>
+          <a:lstStyle/>
+          <a:p>
+            <a:pPr marL="0" indent="0" algn="ctr">
+              <a:buNone/>
+            </a:pPr>
+            <a:r>
+              <a:rPr lang="es-AR" sz="1500" b="1" noProof="0" dirty="0">
+                <a:solidFill>
+                  <a:srgbClr val="0F2B46"/>
+                </a:solidFill>
+                <a:latin typeface="Georgia" pitchFamily="34" charset="0"/>
+                <a:ea typeface="Georgia" pitchFamily="34" charset="-122"/>
+                <a:cs typeface="Georgia" pitchFamily="34" charset="-120"/>
+              </a:rPr>
+              <a:t>Temas de interés</a:t>
+            </a:r>
+            <a:endParaRPr lang="es-AR" sz="1500" noProof="0" dirty="0"/>
+          </a:p>
+        </p:txBody>
+      </p:sp>
+      <p:sp>
+        <p:nvSpPr>
+          <p:cNvPr id="19" name="Text 14">
+            <a:extLst>
+              <a:ext uri="{FF2B5EF4-FFF2-40B4-BE49-F238E27FC236}">
+                <a16:creationId xmlns:a16="http://schemas.microsoft.com/office/drawing/2014/main" id="{5349E908-FF5E-E595-4193-CF8FBF509453}"/>
+              </a:ext>
+            </a:extLst>
+          </p:cNvPr>
+          <p:cNvSpPr/>
+          <p:nvPr/>
+        </p:nvSpPr>
+        <p:spPr>
+          <a:xfrm>
+            <a:off x="6400800" y="2383973"/>
+            <a:ext cx="2148840" cy="777240"/>
+          </a:xfrm>
+          <a:prstGeom prst="rect">
+            <a:avLst/>
+          </a:prstGeom>
+          <a:noFill/>
+          <a:ln/>
+        </p:spPr>
+        <p:txBody>
+          <a:bodyPr wrap="square" rtlCol="0" anchor="t"/>
+          <a:lstStyle/>
+          <a:p>
+            <a:pPr marL="0" indent="0" algn="ctr">
+              <a:lnSpc>
+                <a:spcPct val="130000"/>
+              </a:lnSpc>
+              <a:buNone/>
+            </a:pPr>
+            <a:r>
+              <a:rPr lang="es-AR" sz="1100" noProof="0" dirty="0">
+                <a:solidFill>
+                  <a:srgbClr val="5A7184"/>
+                </a:solidFill>
+                <a:latin typeface="Calibri" pitchFamily="34" charset="0"/>
+                <a:ea typeface="Calibri" pitchFamily="34" charset="-122"/>
+                <a:cs typeface="Calibri" pitchFamily="34" charset="-120"/>
+              </a:rPr>
+              <a:t>Desarrollo productivo</a:t>
+            </a:r>
+          </a:p>
+          <a:p>
+            <a:pPr marL="0" indent="0" algn="ctr">
+              <a:lnSpc>
+                <a:spcPct val="130000"/>
+              </a:lnSpc>
+              <a:buNone/>
+            </a:pPr>
+            <a:r>
+              <a:rPr lang="es-AR" sz="1100" dirty="0">
+                <a:solidFill>
+                  <a:srgbClr val="5A7184"/>
+                </a:solidFill>
+                <a:latin typeface="Calibri" pitchFamily="34" charset="0"/>
+                <a:cs typeface="Calibri" pitchFamily="34" charset="-120"/>
+              </a:rPr>
+              <a:t>Políticas públicas</a:t>
+            </a:r>
+          </a:p>
+          <a:p>
+            <a:pPr marL="0" indent="0" algn="ctr">
+              <a:lnSpc>
+                <a:spcPct val="130000"/>
+              </a:lnSpc>
+              <a:buNone/>
+            </a:pPr>
+            <a:r>
+              <a:rPr lang="es-AR" sz="1100" noProof="0" dirty="0">
+                <a:solidFill>
+                  <a:srgbClr val="5A7184"/>
+                </a:solidFill>
+                <a:latin typeface="Calibri" pitchFamily="34" charset="0"/>
+                <a:cs typeface="Calibri" pitchFamily="34" charset="-120"/>
+              </a:rPr>
+              <a:t>Desarrollo económico regional</a:t>
+            </a:r>
+          </a:p>
+          <a:p>
+            <a:pPr marL="0" indent="0" algn="ctr">
+              <a:lnSpc>
+                <a:spcPct val="130000"/>
+              </a:lnSpc>
+              <a:buNone/>
+            </a:pPr>
+            <a:endParaRPr lang="es-AR" sz="1100" dirty="0">
+              <a:solidFill>
+                <a:srgbClr val="5A7184"/>
+              </a:solidFill>
+              <a:latin typeface="Calibri" pitchFamily="34" charset="0"/>
+              <a:cs typeface="Calibri" pitchFamily="34" charset="-120"/>
+            </a:endParaRPr>
+          </a:p>
+          <a:p>
+            <a:pPr marL="0" indent="0" algn="ctr">
+              <a:lnSpc>
+                <a:spcPct val="130000"/>
+              </a:lnSpc>
+              <a:buNone/>
+            </a:pPr>
+            <a:r>
+              <a:rPr lang="es-AR" sz="1100" noProof="0" dirty="0">
+                <a:solidFill>
+                  <a:srgbClr val="5A7184"/>
+                </a:solidFill>
+                <a:latin typeface="Calibri" pitchFamily="34" charset="0"/>
+                <a:cs typeface="Calibri" pitchFamily="34" charset="-120"/>
+              </a:rPr>
+              <a:t>Trabajos recientes: índice de precios relativos internacional, espacio-producto, monitor de empresas, </a:t>
+            </a:r>
+            <a:r>
+              <a:rPr lang="es-AR" sz="1100" noProof="0" dirty="0" err="1">
+                <a:solidFill>
+                  <a:srgbClr val="5A7184"/>
+                </a:solidFill>
+                <a:latin typeface="Calibri" pitchFamily="34" charset="0"/>
+                <a:cs typeface="Calibri" pitchFamily="34" charset="-120"/>
+              </a:rPr>
+              <a:t>Vinodata</a:t>
+            </a:r>
+            <a:r>
+              <a:rPr lang="es-AR" sz="1100" noProof="0" dirty="0">
+                <a:solidFill>
+                  <a:srgbClr val="5A7184"/>
+                </a:solidFill>
+                <a:latin typeface="Calibri" pitchFamily="34" charset="0"/>
+                <a:cs typeface="Calibri" pitchFamily="34" charset="-120"/>
+              </a:rPr>
+              <a:t>, TOAR</a:t>
+            </a:r>
+            <a:endParaRPr lang="es-AR" sz="1100" noProof="0" dirty="0"/>
+          </a:p>
+        </p:txBody>
+      </p:sp>
+      <p:sp>
+        <p:nvSpPr>
+          <p:cNvPr id="20" name="Shape 15">
+            <a:extLst>
+              <a:ext uri="{FF2B5EF4-FFF2-40B4-BE49-F238E27FC236}">
+                <a16:creationId xmlns:a16="http://schemas.microsoft.com/office/drawing/2014/main" id="{6B090C23-F942-2CC5-6C3C-2C94504A4CDF}"/>
+              </a:ext>
+            </a:extLst>
+          </p:cNvPr>
+          <p:cNvSpPr/>
+          <p:nvPr/>
+        </p:nvSpPr>
+        <p:spPr>
+          <a:xfrm>
+            <a:off x="0" y="4709160"/>
+            <a:ext cx="9144000" cy="434340"/>
+          </a:xfrm>
+          <a:prstGeom prst="rect">
+            <a:avLst/>
+          </a:prstGeom>
+          <a:solidFill>
+            <a:srgbClr val="0F2B46"/>
+          </a:solidFill>
+          <a:ln/>
+        </p:spPr>
+        <p:txBody>
+          <a:bodyPr/>
+          <a:lstStyle/>
+          <a:p>
+            <a:endParaRPr lang="es-AR" noProof="0" dirty="0"/>
+          </a:p>
+        </p:txBody>
+      </p:sp>
+      <p:sp>
+        <p:nvSpPr>
+          <p:cNvPr id="21" name="Text 16">
+            <a:extLst>
+              <a:ext uri="{FF2B5EF4-FFF2-40B4-BE49-F238E27FC236}">
+                <a16:creationId xmlns:a16="http://schemas.microsoft.com/office/drawing/2014/main" id="{18E971E9-2006-D835-B478-493F03569AED}"/>
+              </a:ext>
+            </a:extLst>
+          </p:cNvPr>
+          <p:cNvSpPr/>
+          <p:nvPr/>
+        </p:nvSpPr>
+        <p:spPr>
+          <a:xfrm>
+            <a:off x="457200" y="4709160"/>
+            <a:ext cx="8229600" cy="434340"/>
+          </a:xfrm>
+          <a:prstGeom prst="rect">
+            <a:avLst/>
+          </a:prstGeom>
+          <a:noFill/>
+          <a:ln/>
+        </p:spPr>
+        <p:txBody>
+          <a:bodyPr wrap="square" lIns="0" tIns="0" rIns="0" bIns="0" rtlCol="0" anchor="ctr"/>
+          <a:lstStyle/>
+          <a:p>
+            <a:pPr marL="0" indent="0" algn="ctr">
+              <a:buNone/>
+            </a:pPr>
+            <a:r>
+              <a:rPr lang="es-AR" sz="850" noProof="0" dirty="0">
+                <a:solidFill>
+                  <a:srgbClr val="9DC1D9"/>
+                </a:solidFill>
+                <a:latin typeface="Calibri" pitchFamily="34" charset="0"/>
+                <a:ea typeface="Calibri" pitchFamily="34" charset="-122"/>
+                <a:cs typeface="Calibri" pitchFamily="34" charset="-120"/>
+              </a:rPr>
+              <a:t>Ciencia de Datos para Economía y Negocios  |  FCE-UBA  |  Nicolás Sidicaro</a:t>
+            </a:r>
+            <a:endParaRPr lang="es-AR" sz="850" noProof="0" dirty="0"/>
+          </a:p>
+        </p:txBody>
+      </p:sp>
+      <p:sp>
+        <p:nvSpPr>
+          <p:cNvPr id="22" name="Text 17">
+            <a:extLst>
+              <a:ext uri="{FF2B5EF4-FFF2-40B4-BE49-F238E27FC236}">
+                <a16:creationId xmlns:a16="http://schemas.microsoft.com/office/drawing/2014/main" id="{36E32B14-1E66-0C89-A340-9568262D0CB7}"/>
+              </a:ext>
+            </a:extLst>
+          </p:cNvPr>
+          <p:cNvSpPr/>
+          <p:nvPr/>
+        </p:nvSpPr>
+        <p:spPr>
+          <a:xfrm>
+            <a:off x="8046720" y="4709160"/>
+            <a:ext cx="914400" cy="434340"/>
+          </a:xfrm>
+          <a:prstGeom prst="rect">
+            <a:avLst/>
+          </a:prstGeom>
+          <a:noFill/>
+          <a:ln/>
+        </p:spPr>
+        <p:txBody>
+          <a:bodyPr wrap="square" lIns="0" tIns="0" rIns="0" bIns="0" rtlCol="0" anchor="ctr"/>
+          <a:lstStyle/>
+          <a:p>
+            <a:pPr marL="0" indent="0" algn="r">
+              <a:buNone/>
+            </a:pPr>
+            <a:r>
+              <a:rPr lang="es-AR" sz="800" noProof="0" dirty="0">
+                <a:solidFill>
+                  <a:srgbClr val="6A9AB8"/>
+                </a:solidFill>
+                <a:latin typeface="Calibri" pitchFamily="34" charset="0"/>
+                <a:ea typeface="Calibri" pitchFamily="34" charset="-122"/>
+                <a:cs typeface="Calibri" pitchFamily="34" charset="-120"/>
+              </a:rPr>
+              <a:t>2 / 11</a:t>
+            </a:r>
+            <a:endParaRPr lang="es-AR" sz="800" noProof="0" dirty="0"/>
+          </a:p>
+        </p:txBody>
+      </p:sp>
+    </p:spTree>
+    <p:extLst>
+      <p:ext uri="{BB962C8B-B14F-4D97-AF65-F5344CB8AC3E}">
+        <p14:creationId xmlns:p14="http://schemas.microsoft.com/office/powerpoint/2010/main" val="792934204"/>
+      </p:ext>
+    </p:extLst>
+  </p:cSld>
+  <p:clrMapOvr>
+    <a:masterClrMapping/>
+  </p:clrMapOvr>
+</p:sld>
+</file>
+
+<file path=ppt/slides/slide3.xml><?xml version="1.0" encoding="utf-8"?>
+<p:sld xmlns:a="http://schemas.openxmlformats.org/drawingml/2006/main" xmlns:r="http://schemas.openxmlformats.org/officeDocument/2006/relationships" xmlns:p="http://schemas.openxmlformats.org/presentationml/2006/main">
   <p:cSld name="Slide 2">
     <p:bg>
       <p:bgPr>
@@ -8943,7 +12635,7 @@
 </p:sld>
 </file>
 
-<file path=ppt/slides/slide3.xml><?xml version="1.0" encoding="utf-8"?>
+<file path=ppt/slides/slide4.xml><?xml version="1.0" encoding="utf-8"?>
 <p:sld xmlns:a="http://schemas.openxmlformats.org/drawingml/2006/main" xmlns:r="http://schemas.openxmlformats.org/officeDocument/2006/relationships" xmlns:p="http://schemas.openxmlformats.org/presentationml/2006/main">
   <p:cSld name="Slide 3">
     <p:bg>
@@ -9861,7 +13553,7 @@
 </p:sld>
 </file>
 
-<file path=ppt/slides/slide4.xml><?xml version="1.0" encoding="utf-8"?>
+<file path=ppt/slides/slide5.xml><?xml version="1.0" encoding="utf-8"?>
 <p:sld xmlns:a="http://schemas.openxmlformats.org/drawingml/2006/main" xmlns:r="http://schemas.openxmlformats.org/officeDocument/2006/relationships" xmlns:p="http://schemas.openxmlformats.org/presentationml/2006/main">
   <p:cSld>
     <p:spTree>
@@ -10351,7 +14043,7 @@
 </p:sld>
 </file>
 
-<file path=ppt/slides/slide5.xml><?xml version="1.0" encoding="utf-8"?>
+<file path=ppt/slides/slide6.xml><?xml version="1.0" encoding="utf-8"?>
 <p:sld xmlns:a="http://schemas.openxmlformats.org/drawingml/2006/main" xmlns:r="http://schemas.openxmlformats.org/officeDocument/2006/relationships" xmlns:p="http://schemas.openxmlformats.org/presentationml/2006/main">
   <p:cSld>
     <p:spTree>
@@ -10635,7 +14327,7 @@
 </p:sld>
 </file>
 
-<file path=ppt/slides/slide6.xml><?xml version="1.0" encoding="utf-8"?>
+<file path=ppt/slides/slide7.xml><?xml version="1.0" encoding="utf-8"?>
 <p:sld xmlns:a="http://schemas.openxmlformats.org/drawingml/2006/main" xmlns:r="http://schemas.openxmlformats.org/officeDocument/2006/relationships" xmlns:p="http://schemas.openxmlformats.org/presentationml/2006/main">
   <p:cSld name="Slide 4">
     <p:bg>
@@ -12111,7 +15803,7 @@
 </p:sld>
 </file>
 
-<file path=ppt/slides/slide7.xml><?xml version="1.0" encoding="utf-8"?>
+<file path=ppt/slides/slide8.xml><?xml version="1.0" encoding="utf-8"?>
 <p:sld xmlns:a="http://schemas.openxmlformats.org/drawingml/2006/main" xmlns:r="http://schemas.openxmlformats.org/officeDocument/2006/relationships" xmlns:p="http://schemas.openxmlformats.org/presentationml/2006/main">
   <p:cSld name="Slide 5">
     <p:bg>
@@ -13528,1015 +17220,6 @@
 </p:sld>
 </file>
 
-<file path=ppt/slides/slide8.xml><?xml version="1.0" encoding="utf-8"?>
-<p:sld xmlns:a="http://schemas.openxmlformats.org/drawingml/2006/main" xmlns:r="http://schemas.openxmlformats.org/officeDocument/2006/relationships" xmlns:p="http://schemas.openxmlformats.org/presentationml/2006/main">
-  <p:cSld name="Slide 6">
-    <p:bg>
-      <p:bgPr>
-        <a:solidFill>
-          <a:srgbClr val="F5F8FA"/>
-        </a:solidFill>
-        <a:effectLst/>
-      </p:bgPr>
-    </p:bg>
-    <p:spTree>
-      <p:nvGrpSpPr>
-        <p:cNvPr id="1" name=""/>
-        <p:cNvGrpSpPr/>
-        <p:nvPr/>
-      </p:nvGrpSpPr>
-      <p:grpSpPr>
-        <a:xfrm>
-          <a:off x="0" y="0"/>
-          <a:ext cx="0" cy="0"/>
-          <a:chOff x="0" y="0"/>
-          <a:chExt cx="0" cy="0"/>
-        </a:xfrm>
-      </p:grpSpPr>
-      <p:sp>
-        <p:nvSpPr>
-          <p:cNvPr id="2" name="Shape 0"/>
-          <p:cNvSpPr/>
-          <p:nvPr/>
-        </p:nvSpPr>
-        <p:spPr>
-          <a:xfrm>
-            <a:off x="0" y="0"/>
-            <a:ext cx="9144000" cy="54864"/>
-          </a:xfrm>
-          <a:prstGeom prst="rect">
-            <a:avLst/>
-          </a:prstGeom>
-          <a:solidFill>
-            <a:srgbClr val="E8963E"/>
-          </a:solidFill>
-          <a:ln/>
-        </p:spPr>
-        <p:txBody>
-          <a:bodyPr/>
-          <a:lstStyle/>
-          <a:p>
-            <a:endParaRPr lang="es-AR" noProof="0" dirty="0"/>
-          </a:p>
-        </p:txBody>
-      </p:sp>
-      <p:sp>
-        <p:nvSpPr>
-          <p:cNvPr id="3" name="Text 1"/>
-          <p:cNvSpPr/>
-          <p:nvPr/>
-        </p:nvSpPr>
-        <p:spPr>
-          <a:xfrm>
-            <a:off x="640080" y="228600"/>
-            <a:ext cx="7863840" cy="594360"/>
-          </a:xfrm>
-          <a:prstGeom prst="rect">
-            <a:avLst/>
-          </a:prstGeom>
-          <a:noFill/>
-          <a:ln/>
-        </p:spPr>
-        <p:txBody>
-          <a:bodyPr wrap="square" lIns="0" tIns="0" rIns="0" bIns="0" rtlCol="0" anchor="ctr"/>
-          <a:lstStyle/>
-          <a:p>
-            <a:pPr marL="0" indent="0">
-              <a:buNone/>
-            </a:pPr>
-            <a:r>
-              <a:rPr lang="es-AR" sz="3000" b="1" noProof="0" dirty="0">
-                <a:solidFill>
-                  <a:srgbClr val="0F2B46"/>
-                </a:solidFill>
-                <a:latin typeface="Georgia" pitchFamily="34" charset="0"/>
-                <a:ea typeface="Georgia" pitchFamily="34" charset="-122"/>
-                <a:cs typeface="Georgia" pitchFamily="34" charset="-120"/>
-              </a:rPr>
-              <a:t>Software y Herramientas</a:t>
-            </a:r>
-            <a:endParaRPr lang="es-AR" sz="3000" noProof="0" dirty="0"/>
-          </a:p>
-        </p:txBody>
-      </p:sp>
-      <p:sp>
-        <p:nvSpPr>
-          <p:cNvPr id="4" name="Shape 2"/>
-          <p:cNvSpPr/>
-          <p:nvPr/>
-        </p:nvSpPr>
-        <p:spPr>
-          <a:xfrm>
-            <a:off x="640080" y="1051560"/>
-            <a:ext cx="5029200" cy="1828800"/>
-          </a:xfrm>
-          <a:prstGeom prst="rect">
-            <a:avLst/>
-          </a:prstGeom>
-          <a:solidFill>
-            <a:srgbClr val="FFFFFF"/>
-          </a:solidFill>
-          <a:ln/>
-          <a:effectLst>
-            <a:outerShdw blurRad="76200" dist="25400" dir="8100000" algn="bl" rotWithShape="0">
-              <a:srgbClr val="000000">
-                <a:alpha val="12000"/>
-              </a:srgbClr>
-            </a:outerShdw>
-          </a:effectLst>
-        </p:spPr>
-        <p:txBody>
-          <a:bodyPr/>
-          <a:lstStyle/>
-          <a:p>
-            <a:endParaRPr lang="es-AR" noProof="0" dirty="0"/>
-          </a:p>
-        </p:txBody>
-      </p:sp>
-      <p:sp>
-        <p:nvSpPr>
-          <p:cNvPr id="5" name="Shape 3"/>
-          <p:cNvSpPr/>
-          <p:nvPr/>
-        </p:nvSpPr>
-        <p:spPr>
-          <a:xfrm>
-            <a:off x="640080" y="1051560"/>
-            <a:ext cx="5029200" cy="54864"/>
-          </a:xfrm>
-          <a:prstGeom prst="rect">
-            <a:avLst/>
-          </a:prstGeom>
-          <a:solidFill>
-            <a:srgbClr val="1A6B8A"/>
-          </a:solidFill>
-          <a:ln/>
-        </p:spPr>
-        <p:txBody>
-          <a:bodyPr/>
-          <a:lstStyle/>
-          <a:p>
-            <a:endParaRPr lang="es-AR" noProof="0" dirty="0"/>
-          </a:p>
-        </p:txBody>
-      </p:sp>
-      <p:sp>
-        <p:nvSpPr>
-          <p:cNvPr id="6" name="Text 4"/>
-          <p:cNvSpPr/>
-          <p:nvPr/>
-        </p:nvSpPr>
-        <p:spPr>
-          <a:xfrm>
-            <a:off x="914400" y="1280160"/>
-            <a:ext cx="1097280" cy="822960"/>
-          </a:xfrm>
-          <a:prstGeom prst="rect">
-            <a:avLst/>
-          </a:prstGeom>
-          <a:noFill/>
-          <a:ln/>
-        </p:spPr>
-        <p:txBody>
-          <a:bodyPr wrap="square" lIns="0" tIns="0" rIns="0" bIns="0" rtlCol="0" anchor="ctr"/>
-          <a:lstStyle/>
-          <a:p>
-            <a:pPr marL="0" indent="0" algn="ctr">
-              <a:buNone/>
-            </a:pPr>
-            <a:r>
-              <a:rPr lang="es-AR" sz="4200" b="1" noProof="0" dirty="0">
-                <a:solidFill>
-                  <a:srgbClr val="1A6B8A"/>
-                </a:solidFill>
-                <a:latin typeface="Consolas" pitchFamily="34" charset="0"/>
-                <a:ea typeface="Consolas" pitchFamily="34" charset="-122"/>
-                <a:cs typeface="Consolas" pitchFamily="34" charset="-120"/>
-              </a:rPr>
-              <a:t>R</a:t>
-            </a:r>
-            <a:endParaRPr lang="es-AR" sz="4200" noProof="0" dirty="0"/>
-          </a:p>
-        </p:txBody>
-      </p:sp>
-      <p:sp>
-        <p:nvSpPr>
-          <p:cNvPr id="7" name="Text 5"/>
-          <p:cNvSpPr/>
-          <p:nvPr/>
-        </p:nvSpPr>
-        <p:spPr>
-          <a:xfrm>
-            <a:off x="2011680" y="1280160"/>
-            <a:ext cx="3474720" cy="320040"/>
-          </a:xfrm>
-          <a:prstGeom prst="rect">
-            <a:avLst/>
-          </a:prstGeom>
-          <a:noFill/>
-          <a:ln/>
-        </p:spPr>
-        <p:txBody>
-          <a:bodyPr wrap="square" lIns="0" tIns="0" rIns="0" bIns="0" rtlCol="0" anchor="ctr"/>
-          <a:lstStyle/>
-          <a:p>
-            <a:pPr marL="0" indent="0" algn="l">
-              <a:buNone/>
-            </a:pPr>
-            <a:r>
-              <a:rPr lang="es-AR" sz="1500" b="1" noProof="0" dirty="0">
-                <a:solidFill>
-                  <a:srgbClr val="0F2B46"/>
-                </a:solidFill>
-                <a:latin typeface="Georgia" pitchFamily="34" charset="0"/>
-                <a:ea typeface="Georgia" pitchFamily="34" charset="-122"/>
-                <a:cs typeface="Georgia" pitchFamily="34" charset="-120"/>
-              </a:rPr>
-              <a:t>Lenguaje principal del curso</a:t>
-            </a:r>
-            <a:endParaRPr lang="es-AR" sz="1500" noProof="0" dirty="0"/>
-          </a:p>
-        </p:txBody>
-      </p:sp>
-      <p:sp>
-        <p:nvSpPr>
-          <p:cNvPr id="8" name="Text 6"/>
-          <p:cNvSpPr/>
-          <p:nvPr/>
-        </p:nvSpPr>
-        <p:spPr>
-          <a:xfrm>
-            <a:off x="2011680" y="1645920"/>
-            <a:ext cx="3474720" cy="1005840"/>
-          </a:xfrm>
-          <a:prstGeom prst="rect">
-            <a:avLst/>
-          </a:prstGeom>
-          <a:noFill/>
-          <a:ln/>
-        </p:spPr>
-        <p:txBody>
-          <a:bodyPr wrap="square" rtlCol="0" anchor="t"/>
-          <a:lstStyle/>
-          <a:p>
-            <a:pPr marL="0" indent="0" algn="l">
-              <a:lnSpc>
-                <a:spcPct val="130000"/>
-              </a:lnSpc>
-              <a:buNone/>
-            </a:pPr>
-            <a:r>
-              <a:rPr lang="es-AR" sz="1100" noProof="0" dirty="0">
-                <a:solidFill>
-                  <a:srgbClr val="5A7184"/>
-                </a:solidFill>
-                <a:latin typeface="Calibri" pitchFamily="34" charset="0"/>
-                <a:ea typeface="Calibri" pitchFamily="34" charset="-122"/>
-                <a:cs typeface="Calibri" pitchFamily="34" charset="-120"/>
-              </a:rPr>
-              <a:t>Lenguaje libre, gratuito y con un ecosistema enorme para análisis de datos, estadística y visualización. Es el estándar en muchas áreas de investigación económica.</a:t>
-            </a:r>
-            <a:endParaRPr lang="es-AR" sz="1100" noProof="0" dirty="0"/>
-          </a:p>
-        </p:txBody>
-      </p:sp>
-      <p:sp>
-        <p:nvSpPr>
-          <p:cNvPr id="9" name="Shape 7"/>
-          <p:cNvSpPr/>
-          <p:nvPr/>
-        </p:nvSpPr>
-        <p:spPr>
-          <a:xfrm>
-            <a:off x="5943600" y="1051560"/>
-            <a:ext cx="2560320" cy="1828800"/>
-          </a:xfrm>
-          <a:prstGeom prst="rect">
-            <a:avLst/>
-          </a:prstGeom>
-          <a:solidFill>
-            <a:srgbClr val="FFFFFF"/>
-          </a:solidFill>
-          <a:ln/>
-          <a:effectLst>
-            <a:outerShdw blurRad="76200" dist="25400" dir="8100000" algn="bl" rotWithShape="0">
-              <a:srgbClr val="000000">
-                <a:alpha val="12000"/>
-              </a:srgbClr>
-            </a:outerShdw>
-          </a:effectLst>
-        </p:spPr>
-        <p:txBody>
-          <a:bodyPr/>
-          <a:lstStyle/>
-          <a:p>
-            <a:endParaRPr lang="es-AR" noProof="0" dirty="0"/>
-          </a:p>
-        </p:txBody>
-      </p:sp>
-      <p:sp>
-        <p:nvSpPr>
-          <p:cNvPr id="10" name="Shape 8"/>
-          <p:cNvSpPr/>
-          <p:nvPr/>
-        </p:nvSpPr>
-        <p:spPr>
-          <a:xfrm>
-            <a:off x="5943600" y="1051560"/>
-            <a:ext cx="2560320" cy="54864"/>
-          </a:xfrm>
-          <a:prstGeom prst="rect">
-            <a:avLst/>
-          </a:prstGeom>
-          <a:solidFill>
-            <a:srgbClr val="2E9EBF"/>
-          </a:solidFill>
-          <a:ln/>
-        </p:spPr>
-        <p:txBody>
-          <a:bodyPr/>
-          <a:lstStyle/>
-          <a:p>
-            <a:endParaRPr lang="es-AR" noProof="0" dirty="0"/>
-          </a:p>
-        </p:txBody>
-      </p:sp>
-      <p:sp>
-        <p:nvSpPr>
-          <p:cNvPr id="11" name="Text 9"/>
-          <p:cNvSpPr/>
-          <p:nvPr/>
-        </p:nvSpPr>
-        <p:spPr>
-          <a:xfrm>
-            <a:off x="6126480" y="1280160"/>
-            <a:ext cx="2194560" cy="320040"/>
-          </a:xfrm>
-          <a:prstGeom prst="rect">
-            <a:avLst/>
-          </a:prstGeom>
-          <a:noFill/>
-          <a:ln/>
-        </p:spPr>
-        <p:txBody>
-          <a:bodyPr wrap="square" lIns="0" tIns="0" rIns="0" bIns="0" rtlCol="0" anchor="ctr"/>
-          <a:lstStyle/>
-          <a:p>
-            <a:pPr marL="0" indent="0" algn="ctr">
-              <a:buNone/>
-            </a:pPr>
-            <a:r>
-              <a:rPr lang="es-AR" sz="1500" b="1" noProof="0" dirty="0" err="1">
-                <a:solidFill>
-                  <a:srgbClr val="0F2B46"/>
-                </a:solidFill>
-                <a:latin typeface="Georgia" pitchFamily="34" charset="0"/>
-                <a:ea typeface="Georgia" pitchFamily="34" charset="-122"/>
-                <a:cs typeface="Georgia" pitchFamily="34" charset="-120"/>
-              </a:rPr>
-              <a:t>RStudio</a:t>
-            </a:r>
-            <a:endParaRPr lang="es-AR" sz="1500" noProof="0" dirty="0"/>
-          </a:p>
-        </p:txBody>
-      </p:sp>
-      <p:sp>
-        <p:nvSpPr>
-          <p:cNvPr id="12" name="Text 10"/>
-          <p:cNvSpPr/>
-          <p:nvPr/>
-        </p:nvSpPr>
-        <p:spPr>
-          <a:xfrm>
-            <a:off x="6126480" y="1691640"/>
-            <a:ext cx="2194560" cy="1005840"/>
-          </a:xfrm>
-          <a:prstGeom prst="rect">
-            <a:avLst/>
-          </a:prstGeom>
-          <a:noFill/>
-          <a:ln/>
-        </p:spPr>
-        <p:txBody>
-          <a:bodyPr wrap="square" rtlCol="0" anchor="t"/>
-          <a:lstStyle/>
-          <a:p>
-            <a:pPr marL="0" indent="0" algn="ctr">
-              <a:lnSpc>
-                <a:spcPct val="130000"/>
-              </a:lnSpc>
-              <a:buNone/>
-            </a:pPr>
-            <a:r>
-              <a:rPr lang="es-AR" sz="1100" noProof="0" dirty="0">
-                <a:solidFill>
-                  <a:srgbClr val="5A7184"/>
-                </a:solidFill>
-                <a:latin typeface="Calibri" pitchFamily="34" charset="0"/>
-                <a:ea typeface="Calibri" pitchFamily="34" charset="-122"/>
-                <a:cs typeface="Calibri" pitchFamily="34" charset="-120"/>
-              </a:rPr>
-              <a:t>IDE para trabajar con R de forma cómoda. Integra consola, editor de scripts, visor de gráficos y ayuda.</a:t>
-            </a:r>
-            <a:endParaRPr lang="es-AR" sz="1100" noProof="0" dirty="0"/>
-          </a:p>
-        </p:txBody>
-      </p:sp>
-      <p:sp>
-        <p:nvSpPr>
-          <p:cNvPr id="13" name="Shape 11"/>
-          <p:cNvSpPr/>
-          <p:nvPr/>
-        </p:nvSpPr>
-        <p:spPr>
-          <a:xfrm>
-            <a:off x="640080" y="3154680"/>
-            <a:ext cx="1947672" cy="1280160"/>
-          </a:xfrm>
-          <a:prstGeom prst="rect">
-            <a:avLst/>
-          </a:prstGeom>
-          <a:solidFill>
-            <a:srgbClr val="FFFFFF"/>
-          </a:solidFill>
-          <a:ln/>
-          <a:effectLst>
-            <a:outerShdw blurRad="76200" dist="25400" dir="8100000" algn="bl" rotWithShape="0">
-              <a:srgbClr val="000000">
-                <a:alpha val="12000"/>
-              </a:srgbClr>
-            </a:outerShdw>
-          </a:effectLst>
-        </p:spPr>
-        <p:txBody>
-          <a:bodyPr/>
-          <a:lstStyle/>
-          <a:p>
-            <a:endParaRPr lang="es-AR" noProof="0" dirty="0"/>
-          </a:p>
-        </p:txBody>
-      </p:sp>
-      <p:sp>
-        <p:nvSpPr>
-          <p:cNvPr id="14" name="Text 12"/>
-          <p:cNvSpPr/>
-          <p:nvPr/>
-        </p:nvSpPr>
-        <p:spPr>
-          <a:xfrm>
-            <a:off x="731520" y="3246120"/>
-            <a:ext cx="1764792" cy="320040"/>
-          </a:xfrm>
-          <a:prstGeom prst="rect">
-            <a:avLst/>
-          </a:prstGeom>
-          <a:noFill/>
-          <a:ln/>
-        </p:spPr>
-        <p:txBody>
-          <a:bodyPr wrap="square" lIns="0" tIns="0" rIns="0" bIns="0" rtlCol="0" anchor="ctr"/>
-          <a:lstStyle/>
-          <a:p>
-            <a:pPr marL="0" indent="0" algn="ctr">
-              <a:buNone/>
-            </a:pPr>
-            <a:r>
-              <a:rPr lang="es-AR" sz="1200" b="1" noProof="0" dirty="0" err="1">
-                <a:solidFill>
-                  <a:srgbClr val="1A6B8A"/>
-                </a:solidFill>
-                <a:latin typeface="Consolas" pitchFamily="34" charset="0"/>
-                <a:ea typeface="Consolas" pitchFamily="34" charset="-122"/>
-                <a:cs typeface="Consolas" pitchFamily="34" charset="-120"/>
-              </a:rPr>
-              <a:t>tidyverse</a:t>
-            </a:r>
-            <a:endParaRPr lang="es-AR" sz="1200" noProof="0" dirty="0"/>
-          </a:p>
-        </p:txBody>
-      </p:sp>
-      <p:sp>
-        <p:nvSpPr>
-          <p:cNvPr id="15" name="Text 13"/>
-          <p:cNvSpPr/>
-          <p:nvPr/>
-        </p:nvSpPr>
-        <p:spPr>
-          <a:xfrm>
-            <a:off x="731520" y="3611880"/>
-            <a:ext cx="1764792" cy="685800"/>
-          </a:xfrm>
-          <a:prstGeom prst="rect">
-            <a:avLst/>
-          </a:prstGeom>
-          <a:noFill/>
-          <a:ln/>
-        </p:spPr>
-        <p:txBody>
-          <a:bodyPr wrap="square" rtlCol="0" anchor="t"/>
-          <a:lstStyle/>
-          <a:p>
-            <a:pPr marL="0" indent="0" algn="ctr">
-              <a:lnSpc>
-                <a:spcPct val="125000"/>
-              </a:lnSpc>
-              <a:buNone/>
-            </a:pPr>
-            <a:r>
-              <a:rPr lang="es-AR" sz="950" noProof="0" dirty="0">
-                <a:solidFill>
-                  <a:srgbClr val="5A7184"/>
-                </a:solidFill>
-                <a:latin typeface="Calibri" pitchFamily="34" charset="0"/>
-                <a:ea typeface="Calibri" pitchFamily="34" charset="-122"/>
-                <a:cs typeface="Calibri" pitchFamily="34" charset="-120"/>
-              </a:rPr>
-              <a:t>Ecosistema de paquetes para manipulación y visualización de datos</a:t>
-            </a:r>
-            <a:endParaRPr lang="es-AR" sz="950" noProof="0" dirty="0"/>
-          </a:p>
-        </p:txBody>
-      </p:sp>
-      <p:sp>
-        <p:nvSpPr>
-          <p:cNvPr id="16" name="Shape 14"/>
-          <p:cNvSpPr/>
-          <p:nvPr/>
-        </p:nvSpPr>
-        <p:spPr>
-          <a:xfrm>
-            <a:off x="2770632" y="3154680"/>
-            <a:ext cx="1947672" cy="1280160"/>
-          </a:xfrm>
-          <a:prstGeom prst="rect">
-            <a:avLst/>
-          </a:prstGeom>
-          <a:solidFill>
-            <a:srgbClr val="FFFFFF"/>
-          </a:solidFill>
-          <a:ln/>
-          <a:effectLst>
-            <a:outerShdw blurRad="76200" dist="25400" dir="8100000" algn="bl" rotWithShape="0">
-              <a:srgbClr val="000000">
-                <a:alpha val="12000"/>
-              </a:srgbClr>
-            </a:outerShdw>
-          </a:effectLst>
-        </p:spPr>
-        <p:txBody>
-          <a:bodyPr/>
-          <a:lstStyle/>
-          <a:p>
-            <a:endParaRPr lang="es-AR" noProof="0" dirty="0"/>
-          </a:p>
-        </p:txBody>
-      </p:sp>
-      <p:sp>
-        <p:nvSpPr>
-          <p:cNvPr id="17" name="Text 15"/>
-          <p:cNvSpPr/>
-          <p:nvPr/>
-        </p:nvSpPr>
-        <p:spPr>
-          <a:xfrm>
-            <a:off x="2862072" y="3246120"/>
-            <a:ext cx="1764792" cy="320040"/>
-          </a:xfrm>
-          <a:prstGeom prst="rect">
-            <a:avLst/>
-          </a:prstGeom>
-          <a:noFill/>
-          <a:ln/>
-        </p:spPr>
-        <p:txBody>
-          <a:bodyPr wrap="square" lIns="0" tIns="0" rIns="0" bIns="0" rtlCol="0" anchor="ctr"/>
-          <a:lstStyle/>
-          <a:p>
-            <a:pPr marL="0" indent="0" algn="ctr">
-              <a:buNone/>
-            </a:pPr>
-            <a:r>
-              <a:rPr lang="es-AR" sz="1200" b="1" noProof="0" dirty="0">
-                <a:solidFill>
-                  <a:srgbClr val="1A6B8A"/>
-                </a:solidFill>
-                <a:latin typeface="Consolas" pitchFamily="34" charset="0"/>
-                <a:ea typeface="Consolas" pitchFamily="34" charset="-122"/>
-                <a:cs typeface="Consolas" pitchFamily="34" charset="-120"/>
-              </a:rPr>
-              <a:t>ggplot2</a:t>
-            </a:r>
-            <a:endParaRPr lang="es-AR" sz="1200" noProof="0" dirty="0"/>
-          </a:p>
-        </p:txBody>
-      </p:sp>
-      <p:sp>
-        <p:nvSpPr>
-          <p:cNvPr id="18" name="Text 16"/>
-          <p:cNvSpPr/>
-          <p:nvPr/>
-        </p:nvSpPr>
-        <p:spPr>
-          <a:xfrm>
-            <a:off x="2862072" y="3611880"/>
-            <a:ext cx="1764792" cy="685800"/>
-          </a:xfrm>
-          <a:prstGeom prst="rect">
-            <a:avLst/>
-          </a:prstGeom>
-          <a:noFill/>
-          <a:ln/>
-        </p:spPr>
-        <p:txBody>
-          <a:bodyPr wrap="square" rtlCol="0" anchor="t"/>
-          <a:lstStyle/>
-          <a:p>
-            <a:pPr marL="0" indent="0" algn="ctr">
-              <a:lnSpc>
-                <a:spcPct val="125000"/>
-              </a:lnSpc>
-              <a:buNone/>
-            </a:pPr>
-            <a:r>
-              <a:rPr lang="es-AR" sz="950" noProof="0" dirty="0">
-                <a:solidFill>
-                  <a:srgbClr val="5A7184"/>
-                </a:solidFill>
-                <a:latin typeface="Calibri" pitchFamily="34" charset="0"/>
-                <a:ea typeface="Calibri" pitchFamily="34" charset="-122"/>
-                <a:cs typeface="Calibri" pitchFamily="34" charset="-120"/>
-              </a:rPr>
-              <a:t>Sistema de gráficos basado en la gramática de gráficos</a:t>
-            </a:r>
-            <a:endParaRPr lang="es-AR" sz="950" noProof="0" dirty="0"/>
-          </a:p>
-        </p:txBody>
-      </p:sp>
-      <p:sp>
-        <p:nvSpPr>
-          <p:cNvPr id="19" name="Shape 17"/>
-          <p:cNvSpPr/>
-          <p:nvPr/>
-        </p:nvSpPr>
-        <p:spPr>
-          <a:xfrm>
-            <a:off x="4901184" y="3154680"/>
-            <a:ext cx="1947672" cy="1280160"/>
-          </a:xfrm>
-          <a:prstGeom prst="rect">
-            <a:avLst/>
-          </a:prstGeom>
-          <a:solidFill>
-            <a:srgbClr val="FFFFFF"/>
-          </a:solidFill>
-          <a:ln/>
-          <a:effectLst>
-            <a:outerShdw blurRad="76200" dist="25400" dir="8100000" algn="bl" rotWithShape="0">
-              <a:srgbClr val="000000">
-                <a:alpha val="12000"/>
-              </a:srgbClr>
-            </a:outerShdw>
-          </a:effectLst>
-        </p:spPr>
-        <p:txBody>
-          <a:bodyPr/>
-          <a:lstStyle/>
-          <a:p>
-            <a:endParaRPr lang="es-AR" noProof="0" dirty="0"/>
-          </a:p>
-        </p:txBody>
-      </p:sp>
-      <p:sp>
-        <p:nvSpPr>
-          <p:cNvPr id="20" name="Text 18"/>
-          <p:cNvSpPr/>
-          <p:nvPr/>
-        </p:nvSpPr>
-        <p:spPr>
-          <a:xfrm>
-            <a:off x="4992624" y="3246120"/>
-            <a:ext cx="1764792" cy="320040"/>
-          </a:xfrm>
-          <a:prstGeom prst="rect">
-            <a:avLst/>
-          </a:prstGeom>
-          <a:noFill/>
-          <a:ln/>
-        </p:spPr>
-        <p:txBody>
-          <a:bodyPr wrap="square" lIns="0" tIns="0" rIns="0" bIns="0" rtlCol="0" anchor="ctr"/>
-          <a:lstStyle/>
-          <a:p>
-            <a:pPr marL="0" indent="0" algn="ctr">
-              <a:buNone/>
-            </a:pPr>
-            <a:r>
-              <a:rPr lang="es-AR" sz="1200" b="1" noProof="0" dirty="0" err="1">
-                <a:solidFill>
-                  <a:srgbClr val="1A6B8A"/>
-                </a:solidFill>
-                <a:latin typeface="Consolas" pitchFamily="34" charset="0"/>
-                <a:ea typeface="Consolas" pitchFamily="34" charset="-122"/>
-                <a:cs typeface="Consolas" pitchFamily="34" charset="-120"/>
-              </a:rPr>
-              <a:t>rvest</a:t>
-            </a:r>
-            <a:endParaRPr lang="es-AR" sz="1200" noProof="0" dirty="0"/>
-          </a:p>
-        </p:txBody>
-      </p:sp>
-      <p:sp>
-        <p:nvSpPr>
-          <p:cNvPr id="21" name="Text 19"/>
-          <p:cNvSpPr/>
-          <p:nvPr/>
-        </p:nvSpPr>
-        <p:spPr>
-          <a:xfrm>
-            <a:off x="4992624" y="3611880"/>
-            <a:ext cx="1764792" cy="685800"/>
-          </a:xfrm>
-          <a:prstGeom prst="rect">
-            <a:avLst/>
-          </a:prstGeom>
-          <a:noFill/>
-          <a:ln/>
-        </p:spPr>
-        <p:txBody>
-          <a:bodyPr wrap="square" rtlCol="0" anchor="t"/>
-          <a:lstStyle/>
-          <a:p>
-            <a:pPr marL="0" indent="0" algn="ctr">
-              <a:lnSpc>
-                <a:spcPct val="125000"/>
-              </a:lnSpc>
-              <a:buNone/>
-            </a:pPr>
-            <a:r>
-              <a:rPr lang="es-AR" sz="950" noProof="0" dirty="0">
-                <a:solidFill>
-                  <a:srgbClr val="5A7184"/>
-                </a:solidFill>
-                <a:latin typeface="Calibri" pitchFamily="34" charset="0"/>
-                <a:ea typeface="Calibri" pitchFamily="34" charset="-122"/>
-                <a:cs typeface="Calibri" pitchFamily="34" charset="-120"/>
-              </a:rPr>
-              <a:t>Web </a:t>
-            </a:r>
-            <a:r>
-              <a:rPr lang="es-AR" sz="950" noProof="0" dirty="0" err="1">
-                <a:solidFill>
-                  <a:srgbClr val="5A7184"/>
-                </a:solidFill>
-                <a:latin typeface="Calibri" pitchFamily="34" charset="0"/>
-                <a:ea typeface="Calibri" pitchFamily="34" charset="-122"/>
-                <a:cs typeface="Calibri" pitchFamily="34" charset="-120"/>
-              </a:rPr>
-              <a:t>scraping</a:t>
-            </a:r>
-            <a:r>
-              <a:rPr lang="es-AR" sz="950" noProof="0" dirty="0">
-                <a:solidFill>
-                  <a:srgbClr val="5A7184"/>
-                </a:solidFill>
-                <a:latin typeface="Calibri" pitchFamily="34" charset="0"/>
-                <a:ea typeface="Calibri" pitchFamily="34" charset="-122"/>
-                <a:cs typeface="Calibri" pitchFamily="34" charset="-120"/>
-              </a:rPr>
-              <a:t> de páginas HTML de forma sencilla</a:t>
-            </a:r>
-            <a:endParaRPr lang="es-AR" sz="950" noProof="0" dirty="0"/>
-          </a:p>
-        </p:txBody>
-      </p:sp>
-      <p:sp>
-        <p:nvSpPr>
-          <p:cNvPr id="22" name="Shape 20"/>
-          <p:cNvSpPr/>
-          <p:nvPr/>
-        </p:nvSpPr>
-        <p:spPr>
-          <a:xfrm>
-            <a:off x="7031736" y="3154680"/>
-            <a:ext cx="1947672" cy="1280160"/>
-          </a:xfrm>
-          <a:prstGeom prst="rect">
-            <a:avLst/>
-          </a:prstGeom>
-          <a:solidFill>
-            <a:srgbClr val="FFFFFF"/>
-          </a:solidFill>
-          <a:ln/>
-          <a:effectLst>
-            <a:outerShdw blurRad="76200" dist="25400" dir="8100000" algn="bl" rotWithShape="0">
-              <a:srgbClr val="000000">
-                <a:alpha val="12000"/>
-              </a:srgbClr>
-            </a:outerShdw>
-          </a:effectLst>
-        </p:spPr>
-        <p:txBody>
-          <a:bodyPr/>
-          <a:lstStyle/>
-          <a:p>
-            <a:endParaRPr lang="es-AR" noProof="0" dirty="0"/>
-          </a:p>
-        </p:txBody>
-      </p:sp>
-      <p:sp>
-        <p:nvSpPr>
-          <p:cNvPr id="23" name="Text 21"/>
-          <p:cNvSpPr/>
-          <p:nvPr/>
-        </p:nvSpPr>
-        <p:spPr>
-          <a:xfrm>
-            <a:off x="7123176" y="3246120"/>
-            <a:ext cx="1764792" cy="320040"/>
-          </a:xfrm>
-          <a:prstGeom prst="rect">
-            <a:avLst/>
-          </a:prstGeom>
-          <a:noFill/>
-          <a:ln/>
-        </p:spPr>
-        <p:txBody>
-          <a:bodyPr wrap="square" lIns="0" tIns="0" rIns="0" bIns="0" rtlCol="0" anchor="ctr"/>
-          <a:lstStyle/>
-          <a:p>
-            <a:pPr marL="0" indent="0" algn="ctr">
-              <a:buNone/>
-            </a:pPr>
-            <a:r>
-              <a:rPr lang="es-AR" sz="1200" b="1" noProof="0" dirty="0" err="1">
-                <a:solidFill>
-                  <a:srgbClr val="1A6B8A"/>
-                </a:solidFill>
-                <a:latin typeface="Consolas" pitchFamily="34" charset="0"/>
-                <a:ea typeface="Consolas" pitchFamily="34" charset="-122"/>
-                <a:cs typeface="Consolas" pitchFamily="34" charset="-120"/>
-              </a:rPr>
-              <a:t>skimr</a:t>
-            </a:r>
-            <a:endParaRPr lang="es-AR" sz="1200" noProof="0" dirty="0"/>
-          </a:p>
-        </p:txBody>
-      </p:sp>
-      <p:sp>
-        <p:nvSpPr>
-          <p:cNvPr id="24" name="Text 22"/>
-          <p:cNvSpPr/>
-          <p:nvPr/>
-        </p:nvSpPr>
-        <p:spPr>
-          <a:xfrm>
-            <a:off x="7123176" y="3611880"/>
-            <a:ext cx="1764792" cy="685800"/>
-          </a:xfrm>
-          <a:prstGeom prst="rect">
-            <a:avLst/>
-          </a:prstGeom>
-          <a:noFill/>
-          <a:ln/>
-        </p:spPr>
-        <p:txBody>
-          <a:bodyPr wrap="square" rtlCol="0" anchor="t"/>
-          <a:lstStyle/>
-          <a:p>
-            <a:pPr marL="0" indent="0" algn="ctr">
-              <a:lnSpc>
-                <a:spcPct val="125000"/>
-              </a:lnSpc>
-              <a:buNone/>
-            </a:pPr>
-            <a:r>
-              <a:rPr lang="es-AR" sz="950" noProof="0" dirty="0">
-                <a:solidFill>
-                  <a:srgbClr val="5A7184"/>
-                </a:solidFill>
-                <a:latin typeface="Calibri" pitchFamily="34" charset="0"/>
-                <a:ea typeface="Calibri" pitchFamily="34" charset="-122"/>
-                <a:cs typeface="Calibri" pitchFamily="34" charset="-120"/>
-              </a:rPr>
-              <a:t>Resúmenes estadísticos rápidos para exploración inicial</a:t>
-            </a:r>
-            <a:endParaRPr lang="es-AR" sz="950" noProof="0" dirty="0"/>
-          </a:p>
-        </p:txBody>
-      </p:sp>
-      <p:sp>
-        <p:nvSpPr>
-          <p:cNvPr id="25" name="Shape 23"/>
-          <p:cNvSpPr/>
-          <p:nvPr/>
-        </p:nvSpPr>
-        <p:spPr>
-          <a:xfrm>
-            <a:off x="0" y="4709160"/>
-            <a:ext cx="9144000" cy="434340"/>
-          </a:xfrm>
-          <a:prstGeom prst="rect">
-            <a:avLst/>
-          </a:prstGeom>
-          <a:solidFill>
-            <a:srgbClr val="0F2B46"/>
-          </a:solidFill>
-          <a:ln/>
-        </p:spPr>
-        <p:txBody>
-          <a:bodyPr/>
-          <a:lstStyle/>
-          <a:p>
-            <a:endParaRPr lang="es-AR" noProof="0" dirty="0"/>
-          </a:p>
-        </p:txBody>
-      </p:sp>
-      <p:sp>
-        <p:nvSpPr>
-          <p:cNvPr id="26" name="Text 24"/>
-          <p:cNvSpPr/>
-          <p:nvPr/>
-        </p:nvSpPr>
-        <p:spPr>
-          <a:xfrm>
-            <a:off x="457200" y="4709160"/>
-            <a:ext cx="8229600" cy="434340"/>
-          </a:xfrm>
-          <a:prstGeom prst="rect">
-            <a:avLst/>
-          </a:prstGeom>
-          <a:noFill/>
-          <a:ln/>
-        </p:spPr>
-        <p:txBody>
-          <a:bodyPr wrap="square" lIns="0" tIns="0" rIns="0" bIns="0" rtlCol="0" anchor="ctr"/>
-          <a:lstStyle/>
-          <a:p>
-            <a:pPr marL="0" indent="0" algn="ctr">
-              <a:buNone/>
-            </a:pPr>
-            <a:r>
-              <a:rPr lang="es-AR" sz="850" noProof="0" dirty="0">
-                <a:solidFill>
-                  <a:srgbClr val="9DC1D9"/>
-                </a:solidFill>
-                <a:latin typeface="Calibri" pitchFamily="34" charset="0"/>
-                <a:ea typeface="Calibri" pitchFamily="34" charset="-122"/>
-                <a:cs typeface="Calibri" pitchFamily="34" charset="-120"/>
-              </a:rPr>
-              <a:t>Ciencia de Datos para Economía y Negocios  |  FCE-UBA  |  Nicolás Sidicaro</a:t>
-            </a:r>
-            <a:endParaRPr lang="es-AR" sz="850" noProof="0" dirty="0"/>
-          </a:p>
-        </p:txBody>
-      </p:sp>
-      <p:sp>
-        <p:nvSpPr>
-          <p:cNvPr id="27" name="Text 25"/>
-          <p:cNvSpPr/>
-          <p:nvPr/>
-        </p:nvSpPr>
-        <p:spPr>
-          <a:xfrm>
-            <a:off x="8046720" y="4709160"/>
-            <a:ext cx="914400" cy="434340"/>
-          </a:xfrm>
-          <a:prstGeom prst="rect">
-            <a:avLst/>
-          </a:prstGeom>
-          <a:noFill/>
-          <a:ln/>
-        </p:spPr>
-        <p:txBody>
-          <a:bodyPr wrap="square" lIns="0" tIns="0" rIns="0" bIns="0" rtlCol="0" anchor="ctr"/>
-          <a:lstStyle/>
-          <a:p>
-            <a:pPr marL="0" indent="0" algn="r">
-              <a:buNone/>
-            </a:pPr>
-            <a:r>
-              <a:rPr lang="es-AR" sz="800" noProof="0" dirty="0">
-                <a:solidFill>
-                  <a:srgbClr val="6A9AB8"/>
-                </a:solidFill>
-                <a:latin typeface="Calibri" pitchFamily="34" charset="0"/>
-                <a:ea typeface="Calibri" pitchFamily="34" charset="-122"/>
-                <a:cs typeface="Calibri" pitchFamily="34" charset="-120"/>
-              </a:rPr>
-              <a:t>6 / 11</a:t>
-            </a:r>
-            <a:endParaRPr lang="es-AR" sz="800" noProof="0" dirty="0"/>
-          </a:p>
-        </p:txBody>
-      </p:sp>
-    </p:spTree>
-  </p:cSld>
-  <p:clrMapOvr>
-    <a:masterClrMapping/>
-  </p:clrMapOvr>
-</p:sld>
-</file>
-
 <file path=ppt/slides/slide9.xml><?xml version="1.0" encoding="utf-8"?>
 <p:sld xmlns:a="http://schemas.openxmlformats.org/drawingml/2006/main" xmlns:r="http://schemas.openxmlformats.org/officeDocument/2006/relationships" xmlns:p="http://schemas.openxmlformats.org/presentationml/2006/main">
   <p:cSld>
@@ -14545,7 +17228,7 @@
         <p:cNvPr id="1" name="">
           <a:extLst>
             <a:ext uri="{FF2B5EF4-FFF2-40B4-BE49-F238E27FC236}">
-              <a16:creationId xmlns:a16="http://schemas.microsoft.com/office/drawing/2014/main" id="{07195B89-E3A8-F882-691A-02786138A558}"/>
+              <a16:creationId xmlns:a16="http://schemas.microsoft.com/office/drawing/2014/main" id="{15FD9DF6-9D56-FF34-F26C-2A5D2413C222}"/>
             </a:ext>
           </a:extLst>
         </p:cNvPr>
@@ -14565,7 +17248,7 @@
           <p:cNvPr id="2" name="Shape 0">
             <a:extLst>
               <a:ext uri="{FF2B5EF4-FFF2-40B4-BE49-F238E27FC236}">
-                <a16:creationId xmlns:a16="http://schemas.microsoft.com/office/drawing/2014/main" id="{1A79CDCC-98E5-0E13-FB7E-2B3AA78FAA0B}"/>
+                <a16:creationId xmlns:a16="http://schemas.microsoft.com/office/drawing/2014/main" id="{756AE6AB-D821-9D2B-DEA1-E4A313EE159E}"/>
               </a:ext>
             </a:extLst>
           </p:cNvPr>
@@ -14598,7 +17281,7 @@
           <p:cNvPr id="3" name="Text 1">
             <a:extLst>
               <a:ext uri="{FF2B5EF4-FFF2-40B4-BE49-F238E27FC236}">
-                <a16:creationId xmlns:a16="http://schemas.microsoft.com/office/drawing/2014/main" id="{BBD9FD3A-FE95-F909-2486-B198F0E56607}"/>
+                <a16:creationId xmlns:a16="http://schemas.microsoft.com/office/drawing/2014/main" id="{BD8FA5FA-6873-D049-B3E6-839A260B9D6F}"/>
               </a:ext>
             </a:extLst>
           </p:cNvPr>
@@ -14608,7 +17291,7 @@
         <p:spPr>
           <a:xfrm>
             <a:off x="640080" y="228600"/>
-            <a:ext cx="7863840" cy="594360"/>
+            <a:ext cx="7863840" cy="548640"/>
           </a:xfrm>
           <a:prstGeom prst="rect">
             <a:avLst/>
@@ -14632,7 +17315,7 @@
                 <a:ea typeface="Georgia" pitchFamily="34" charset="-122"/>
                 <a:cs typeface="Georgia" pitchFamily="34" charset="-120"/>
               </a:rPr>
-              <a:t>Software y Herramientas</a:t>
+              <a:t>Quedan afuera…</a:t>
             </a:r>
             <a:endParaRPr lang="es-AR" sz="3000" noProof="0" dirty="0"/>
           </a:p>
@@ -14643,7 +17326,7 @@
           <p:cNvPr id="4" name="Shape 2">
             <a:extLst>
               <a:ext uri="{FF2B5EF4-FFF2-40B4-BE49-F238E27FC236}">
-                <a16:creationId xmlns:a16="http://schemas.microsoft.com/office/drawing/2014/main" id="{A6E61049-D3B5-FE40-A90D-5A15A140D5A5}"/>
+                <a16:creationId xmlns:a16="http://schemas.microsoft.com/office/drawing/2014/main" id="{EC735F75-D649-AABE-D0E1-10477B6FA87A}"/>
               </a:ext>
             </a:extLst>
           </p:cNvPr>
@@ -14652,8 +17335,8 @@
         </p:nvSpPr>
         <p:spPr>
           <a:xfrm>
-            <a:off x="640080" y="1051560"/>
-            <a:ext cx="5029200" cy="1828800"/>
+            <a:off x="644893" y="960120"/>
+            <a:ext cx="3886200" cy="1645920"/>
           </a:xfrm>
           <a:prstGeom prst="rect">
             <a:avLst/>
@@ -14683,7 +17366,7 @@
           <p:cNvPr id="5" name="Shape 3">
             <a:extLst>
               <a:ext uri="{FF2B5EF4-FFF2-40B4-BE49-F238E27FC236}">
-                <a16:creationId xmlns:a16="http://schemas.microsoft.com/office/drawing/2014/main" id="{22FE901D-5FD9-196D-59DE-BF978CFB383F}"/>
+                <a16:creationId xmlns:a16="http://schemas.microsoft.com/office/drawing/2014/main" id="{59422146-5A10-55A2-7122-446414284B9D}"/>
               </a:ext>
             </a:extLst>
           </p:cNvPr>
@@ -14692,8 +17375,8 @@
         </p:nvSpPr>
         <p:spPr>
           <a:xfrm>
-            <a:off x="640080" y="1051560"/>
-            <a:ext cx="5029200" cy="54864"/>
+            <a:off x="640080" y="960120"/>
+            <a:ext cx="54864" cy="1645920"/>
           </a:xfrm>
           <a:prstGeom prst="rect">
             <a:avLst/>
@@ -14716,7 +17399,7 @@
           <p:cNvPr id="6" name="Text 4">
             <a:extLst>
               <a:ext uri="{FF2B5EF4-FFF2-40B4-BE49-F238E27FC236}">
-                <a16:creationId xmlns:a16="http://schemas.microsoft.com/office/drawing/2014/main" id="{143B7E08-E46D-2638-EAE2-24A8DFFCDE15}"/>
+                <a16:creationId xmlns:a16="http://schemas.microsoft.com/office/drawing/2014/main" id="{7F6C90DA-2500-8848-504F-A1938C07E831}"/>
               </a:ext>
             </a:extLst>
           </p:cNvPr>
@@ -14725,8 +17408,8 @@
         </p:nvSpPr>
         <p:spPr>
           <a:xfrm>
-            <a:off x="914400" y="1280160"/>
-            <a:ext cx="1097280" cy="822960"/>
+            <a:off x="873493" y="1033272"/>
+            <a:ext cx="3474720" cy="320040"/>
           </a:xfrm>
           <a:prstGeom prst="rect">
             <a:avLst/>
@@ -14738,21 +17421,32 @@
           <a:bodyPr wrap="square" lIns="0" tIns="0" rIns="0" bIns="0" rtlCol="0" anchor="ctr"/>
           <a:lstStyle/>
           <a:p>
-            <a:pPr marL="0" indent="0" algn="ctr">
-              <a:buNone/>
-            </a:pPr>
-            <a:r>
-              <a:rPr lang="es-AR" sz="4200" b="1" noProof="0" dirty="0">
-                <a:solidFill>
-                  <a:srgbClr val="1A6B8A"/>
-                </a:solidFill>
-                <a:latin typeface="Consolas" pitchFamily="34" charset="0"/>
-                <a:ea typeface="Consolas" pitchFamily="34" charset="-122"/>
-                <a:cs typeface="Consolas" pitchFamily="34" charset="-120"/>
-              </a:rPr>
-              <a:t>R</a:t>
-            </a:r>
-            <a:endParaRPr lang="es-AR" sz="4200" noProof="0" dirty="0"/>
+            <a:pPr marL="0" indent="0" algn="l">
+              <a:buNone/>
+            </a:pPr>
+            <a:r>
+              <a:rPr lang="es-AR" sz="1400" b="1" noProof="0" dirty="0">
+                <a:solidFill>
+                  <a:srgbClr val="0F2B46"/>
+                </a:solidFill>
+                <a:latin typeface="Georgia" pitchFamily="34" charset="0"/>
+                <a:ea typeface="Georgia" pitchFamily="34" charset="-122"/>
+                <a:cs typeface="Georgia" pitchFamily="34" charset="-120"/>
+              </a:rPr>
+              <a:t>Machine </a:t>
+            </a:r>
+            <a:r>
+              <a:rPr lang="es-AR" sz="1400" b="1" noProof="0" dirty="0" err="1">
+                <a:solidFill>
+                  <a:srgbClr val="0F2B46"/>
+                </a:solidFill>
+                <a:latin typeface="Georgia" pitchFamily="34" charset="0"/>
+                <a:ea typeface="Georgia" pitchFamily="34" charset="-122"/>
+                <a:cs typeface="Georgia" pitchFamily="34" charset="-120"/>
+              </a:rPr>
+              <a:t>Learning</a:t>
+            </a:r>
+            <a:endParaRPr lang="es-AR" sz="1400" noProof="0" dirty="0"/>
           </a:p>
         </p:txBody>
       </p:sp>
@@ -14761,7 +17455,7 @@
           <p:cNvPr id="7" name="Text 5">
             <a:extLst>
               <a:ext uri="{FF2B5EF4-FFF2-40B4-BE49-F238E27FC236}">
-                <a16:creationId xmlns:a16="http://schemas.microsoft.com/office/drawing/2014/main" id="{2AD2B9A1-E2EA-5603-5690-39E1C3C6EE65}"/>
+                <a16:creationId xmlns:a16="http://schemas.microsoft.com/office/drawing/2014/main" id="{BAF68CC0-AB51-9D62-A498-5F45356A25FB}"/>
               </a:ext>
             </a:extLst>
           </p:cNvPr>
@@ -14770,43 +17464,66 @@
         </p:nvSpPr>
         <p:spPr>
           <a:xfrm>
-            <a:off x="2011680" y="1280160"/>
-            <a:ext cx="3474720" cy="320040"/>
-          </a:xfrm>
-          <a:prstGeom prst="rect">
-            <a:avLst/>
-          </a:prstGeom>
-          <a:noFill/>
-          <a:ln/>
-        </p:spPr>
-        <p:txBody>
-          <a:bodyPr wrap="square" lIns="0" tIns="0" rIns="0" bIns="0" rtlCol="0" anchor="ctr"/>
-          <a:lstStyle/>
-          <a:p>
-            <a:pPr marL="0" indent="0" algn="l">
-              <a:buNone/>
-            </a:pPr>
-            <a:r>
-              <a:rPr lang="es-AR" sz="1500" b="1" noProof="0" dirty="0">
-                <a:solidFill>
-                  <a:srgbClr val="0F2B46"/>
-                </a:solidFill>
-                <a:latin typeface="Georgia" pitchFamily="34" charset="0"/>
-                <a:ea typeface="Georgia" pitchFamily="34" charset="-122"/>
-                <a:cs typeface="Georgia" pitchFamily="34" charset="-120"/>
-              </a:rPr>
-              <a:t>¿Si es la PC del laburo y no puedo instalar nada?</a:t>
-            </a:r>
-            <a:endParaRPr lang="es-AR" sz="1500" noProof="0" dirty="0"/>
-          </a:p>
-        </p:txBody>
-      </p:sp>
-      <p:sp>
-        <p:nvSpPr>
-          <p:cNvPr id="8" name="Text 6">
+            <a:off x="873493" y="1371600"/>
+            <a:ext cx="3474720" cy="1143000"/>
+          </a:xfrm>
+          <a:prstGeom prst="rect">
+            <a:avLst/>
+          </a:prstGeom>
+          <a:noFill/>
+          <a:ln/>
+        </p:spPr>
+        <p:txBody>
+          <a:bodyPr wrap="square" rtlCol="0" anchor="t"/>
+          <a:lstStyle/>
+          <a:p>
+            <a:pPr marL="342900" indent="-342900">
+              <a:spcAft>
+                <a:spcPts val="300"/>
+              </a:spcAft>
+              <a:buSzPct val="100000"/>
+              <a:buChar char="•"/>
+            </a:pPr>
+            <a:r>
+              <a:rPr lang="es-AR" sz="1050" noProof="0" dirty="0">
+                <a:solidFill>
+                  <a:srgbClr val="5A7184"/>
+                </a:solidFill>
+                <a:latin typeface="Calibri" pitchFamily="34" charset="0"/>
+                <a:ea typeface="Calibri" pitchFamily="34" charset="-122"/>
+                <a:cs typeface="Calibri" pitchFamily="34" charset="-120"/>
+              </a:rPr>
+              <a:t>Algoritmos de aprendizaje supervisado y no supervisado</a:t>
+            </a:r>
+          </a:p>
+          <a:p>
+            <a:pPr marL="342900" indent="-342900">
+              <a:spcAft>
+                <a:spcPts val="300"/>
+              </a:spcAft>
+              <a:buSzPct val="100000"/>
+              <a:buChar char="•"/>
+            </a:pPr>
+            <a:r>
+              <a:rPr lang="es-AR" sz="1050" dirty="0">
+                <a:solidFill>
+                  <a:srgbClr val="5A7184"/>
+                </a:solidFill>
+                <a:latin typeface="Calibri" pitchFamily="34" charset="0"/>
+                <a:cs typeface="Calibri" pitchFamily="34" charset="-120"/>
+              </a:rPr>
+              <a:t>Modelos de lenguaje </a:t>
+            </a:r>
+            <a:endParaRPr lang="es-AR" sz="1050" noProof="0" dirty="0"/>
+          </a:p>
+        </p:txBody>
+      </p:sp>
+      <p:sp>
+        <p:nvSpPr>
+          <p:cNvPr id="8" name="Shape 6">
             <a:extLst>
               <a:ext uri="{FF2B5EF4-FFF2-40B4-BE49-F238E27FC236}">
-                <a16:creationId xmlns:a16="http://schemas.microsoft.com/office/drawing/2014/main" id="{D612A43A-8555-3350-B431-F505247FDE4B}"/>
+                <a16:creationId xmlns:a16="http://schemas.microsoft.com/office/drawing/2014/main" id="{0A10E180-7438-A35A-6E37-D92251296962}"/>
               </a:ext>
             </a:extLst>
           </p:cNvPr>
@@ -14815,96 +17532,8 @@
         </p:nvSpPr>
         <p:spPr>
           <a:xfrm>
-            <a:off x="2011680" y="1645920"/>
-            <a:ext cx="3474720" cy="1005840"/>
-          </a:xfrm>
-          <a:prstGeom prst="rect">
-            <a:avLst/>
-          </a:prstGeom>
-          <a:noFill/>
-          <a:ln/>
-        </p:spPr>
-        <p:txBody>
-          <a:bodyPr wrap="square" rtlCol="0" anchor="t"/>
-          <a:lstStyle/>
-          <a:p>
-            <a:pPr marL="0" indent="0" algn="l">
-              <a:lnSpc>
-                <a:spcPct val="130000"/>
-              </a:lnSpc>
-              <a:buNone/>
-            </a:pPr>
-            <a:r>
-              <a:rPr lang="es-AR" sz="1100" noProof="0" dirty="0">
-                <a:solidFill>
-                  <a:srgbClr val="5A7184"/>
-                </a:solidFill>
-                <a:latin typeface="Calibri" pitchFamily="34" charset="0"/>
-                <a:ea typeface="Calibri" pitchFamily="34" charset="-122"/>
-                <a:cs typeface="Calibri" pitchFamily="34" charset="-120"/>
-              </a:rPr>
-              <a:t>Google tiene gratis el sistema de Google </a:t>
-            </a:r>
-            <a:r>
-              <a:rPr lang="es-AR" sz="1100" noProof="0" dirty="0" err="1">
-                <a:solidFill>
-                  <a:srgbClr val="5A7184"/>
-                </a:solidFill>
-                <a:latin typeface="Calibri" pitchFamily="34" charset="0"/>
-                <a:ea typeface="Calibri" pitchFamily="34" charset="-122"/>
-                <a:cs typeface="Calibri" pitchFamily="34" charset="-120"/>
-              </a:rPr>
-              <a:t>Colab</a:t>
-            </a:r>
-            <a:r>
-              <a:rPr lang="es-AR" sz="1100" noProof="0" dirty="0">
-                <a:solidFill>
-                  <a:srgbClr val="5A7184"/>
-                </a:solidFill>
-                <a:latin typeface="Calibri" pitchFamily="34" charset="0"/>
-                <a:ea typeface="Calibri" pitchFamily="34" charset="-122"/>
-                <a:cs typeface="Calibri" pitchFamily="34" charset="-120"/>
-              </a:rPr>
-              <a:t>, que se puede utilizar con la cuenta de Drive. Es una herramienta online y para los usos del curso, no va a afectar mucho usar uno o el otro. Pero, por lo general es mejor usar R + </a:t>
-            </a:r>
-            <a:r>
-              <a:rPr lang="es-AR" sz="1100" noProof="0" dirty="0" err="1">
-                <a:solidFill>
-                  <a:srgbClr val="5A7184"/>
-                </a:solidFill>
-                <a:latin typeface="Calibri" pitchFamily="34" charset="0"/>
-                <a:ea typeface="Calibri" pitchFamily="34" charset="-122"/>
-                <a:cs typeface="Calibri" pitchFamily="34" charset="-120"/>
-              </a:rPr>
-              <a:t>RStudio</a:t>
-            </a:r>
-            <a:endParaRPr lang="es-AR" sz="1100" noProof="0" dirty="0">
-              <a:solidFill>
-                <a:srgbClr val="5A7184"/>
-              </a:solidFill>
-              <a:latin typeface="Calibri" pitchFamily="34" charset="0"/>
-              <a:ea typeface="Calibri" pitchFamily="34" charset="-122"/>
-              <a:cs typeface="Calibri" pitchFamily="34" charset="-120"/>
-            </a:endParaRPr>
-          </a:p>
-        </p:txBody>
-      </p:sp>
-      <p:sp>
-        <p:nvSpPr>
-          <p:cNvPr id="9" name="Shape 7">
-            <a:extLst>
-              <a:ext uri="{FF2B5EF4-FFF2-40B4-BE49-F238E27FC236}">
-                <a16:creationId xmlns:a16="http://schemas.microsoft.com/office/drawing/2014/main" id="{3D22B40E-E21A-B3F2-EDE6-739C5707FFB4}"/>
-              </a:ext>
-            </a:extLst>
-          </p:cNvPr>
-          <p:cNvSpPr/>
-          <p:nvPr/>
-        </p:nvSpPr>
-        <p:spPr>
-          <a:xfrm>
-            <a:off x="5943600" y="1051560"/>
-            <a:ext cx="2560320" cy="1828800"/>
+            <a:off x="4800600" y="960120"/>
+            <a:ext cx="3886200" cy="1645920"/>
           </a:xfrm>
           <a:prstGeom prst="rect">
             <a:avLst/>
@@ -14931,10 +17560,10 @@
       </p:sp>
       <p:sp>
         <p:nvSpPr>
-          <p:cNvPr id="10" name="Shape 8">
+          <p:cNvPr id="9" name="Shape 7">
             <a:extLst>
               <a:ext uri="{FF2B5EF4-FFF2-40B4-BE49-F238E27FC236}">
-                <a16:creationId xmlns:a16="http://schemas.microsoft.com/office/drawing/2014/main" id="{B07E02A8-6E7D-95DC-94C8-F1966EC71A00}"/>
+                <a16:creationId xmlns:a16="http://schemas.microsoft.com/office/drawing/2014/main" id="{9F211123-54AD-C572-994B-94FECC0142B9}"/>
               </a:ext>
             </a:extLst>
           </p:cNvPr>
@@ -14943,8 +17572,8 @@
         </p:nvSpPr>
         <p:spPr>
           <a:xfrm>
-            <a:off x="5943600" y="1051560"/>
-            <a:ext cx="2560320" cy="54864"/>
+            <a:off x="4800600" y="960120"/>
+            <a:ext cx="54864" cy="1645920"/>
           </a:xfrm>
           <a:prstGeom prst="rect">
             <a:avLst/>
@@ -14964,10 +17593,55 @@
       </p:sp>
       <p:sp>
         <p:nvSpPr>
+          <p:cNvPr id="10" name="Text 8">
+            <a:extLst>
+              <a:ext uri="{FF2B5EF4-FFF2-40B4-BE49-F238E27FC236}">
+                <a16:creationId xmlns:a16="http://schemas.microsoft.com/office/drawing/2014/main" id="{8BE468F8-6E3A-90BD-4C58-EE6DD1E9A8D9}"/>
+              </a:ext>
+            </a:extLst>
+          </p:cNvPr>
+          <p:cNvSpPr/>
+          <p:nvPr/>
+        </p:nvSpPr>
+        <p:spPr>
+          <a:xfrm>
+            <a:off x="5029200" y="1033272"/>
+            <a:ext cx="3474720" cy="320040"/>
+          </a:xfrm>
+          <a:prstGeom prst="rect">
+            <a:avLst/>
+          </a:prstGeom>
+          <a:noFill/>
+          <a:ln/>
+        </p:spPr>
+        <p:txBody>
+          <a:bodyPr wrap="square" lIns="0" tIns="0" rIns="0" bIns="0" rtlCol="0" anchor="ctr"/>
+          <a:lstStyle/>
+          <a:p>
+            <a:pPr marL="0" indent="0" algn="l">
+              <a:buNone/>
+            </a:pPr>
+            <a:r>
+              <a:rPr lang="es-AR" sz="1400" b="1" noProof="0" dirty="0">
+                <a:solidFill>
+                  <a:srgbClr val="0F2B46"/>
+                </a:solidFill>
+                <a:latin typeface="Georgia" pitchFamily="34" charset="0"/>
+                <a:ea typeface="Georgia" pitchFamily="34" charset="-122"/>
+                <a:cs typeface="Georgia" pitchFamily="34" charset="-120"/>
+              </a:rPr>
+              <a:t>Análisis de sentimiento</a:t>
+            </a:r>
+            <a:endParaRPr lang="es-AR" sz="1400" noProof="0" dirty="0"/>
+          </a:p>
+        </p:txBody>
+      </p:sp>
+      <p:sp>
+        <p:nvSpPr>
           <p:cNvPr id="11" name="Text 9">
             <a:extLst>
               <a:ext uri="{FF2B5EF4-FFF2-40B4-BE49-F238E27FC236}">
-                <a16:creationId xmlns:a16="http://schemas.microsoft.com/office/drawing/2014/main" id="{012BDD41-8E2A-F304-B7AC-A95284843098}"/>
+                <a16:creationId xmlns:a16="http://schemas.microsoft.com/office/drawing/2014/main" id="{FD0CB1AD-C120-5BB0-185F-39EB4530683C}"/>
               </a:ext>
             </a:extLst>
           </p:cNvPr>
@@ -14976,41 +17650,103 @@
         </p:nvSpPr>
         <p:spPr>
           <a:xfrm>
-            <a:off x="6126480" y="1280160"/>
-            <a:ext cx="2194560" cy="320040"/>
-          </a:xfrm>
-          <a:prstGeom prst="rect">
-            <a:avLst/>
-          </a:prstGeom>
-          <a:noFill/>
-          <a:ln/>
-        </p:spPr>
-        <p:txBody>
-          <a:bodyPr wrap="square" lIns="0" tIns="0" rIns="0" bIns="0" rtlCol="0" anchor="ctr"/>
-          <a:lstStyle/>
-          <a:p>
-            <a:pPr marL="0" indent="0" algn="ctr">
-              <a:buNone/>
-            </a:pPr>
-            <a:r>
-              <a:rPr lang="es-AR" sz="1500" b="1" dirty="0">
-                <a:solidFill>
-                  <a:srgbClr val="0F2B46"/>
-                </a:solidFill>
-                <a:latin typeface="Georgia" pitchFamily="34" charset="0"/>
-              </a:rPr>
-              <a:t>¿y Python?</a:t>
-            </a:r>
-            <a:endParaRPr lang="es-AR" sz="1500" noProof="0" dirty="0"/>
-          </a:p>
-        </p:txBody>
-      </p:sp>
-      <p:sp>
-        <p:nvSpPr>
-          <p:cNvPr id="12" name="Text 10">
+            <a:off x="5029200" y="1371600"/>
+            <a:ext cx="3474720" cy="1143000"/>
+          </a:xfrm>
+          <a:prstGeom prst="rect">
+            <a:avLst/>
+          </a:prstGeom>
+          <a:noFill/>
+          <a:ln/>
+        </p:spPr>
+        <p:txBody>
+          <a:bodyPr wrap="square" rtlCol="0" anchor="t"/>
+          <a:lstStyle/>
+          <a:p>
+            <a:pPr marL="342900" indent="-342900">
+              <a:spcAft>
+                <a:spcPts val="300"/>
+              </a:spcAft>
+              <a:buSzPct val="100000"/>
+              <a:buChar char="•"/>
+            </a:pPr>
+            <a:r>
+              <a:rPr lang="es-MX" sz="1050" dirty="0">
+                <a:solidFill>
+                  <a:srgbClr val="5A7184"/>
+                </a:solidFill>
+                <a:latin typeface="Calibri" pitchFamily="34" charset="0"/>
+                <a:cs typeface="Calibri" pitchFamily="34" charset="-120"/>
+              </a:rPr>
+              <a:t>A</a:t>
+            </a:r>
+            <a:r>
+              <a:rPr lang="es-AR" sz="1050" dirty="0" err="1">
+                <a:solidFill>
+                  <a:srgbClr val="5A7184"/>
+                </a:solidFill>
+                <a:latin typeface="Calibri" pitchFamily="34" charset="0"/>
+                <a:cs typeface="Calibri" pitchFamily="34" charset="-120"/>
+              </a:rPr>
+              <a:t>nálisis</a:t>
+            </a:r>
+            <a:r>
+              <a:rPr lang="es-AR" sz="1050" dirty="0">
+                <a:solidFill>
+                  <a:srgbClr val="5A7184"/>
+                </a:solidFill>
+                <a:latin typeface="Calibri" pitchFamily="34" charset="0"/>
+                <a:cs typeface="Calibri" pitchFamily="34" charset="-120"/>
+              </a:rPr>
+              <a:t> programático de texto</a:t>
+            </a:r>
+          </a:p>
+          <a:p>
+            <a:pPr marL="342900" indent="-342900">
+              <a:spcAft>
+                <a:spcPts val="300"/>
+              </a:spcAft>
+              <a:buSzPct val="100000"/>
+              <a:buChar char="•"/>
+            </a:pPr>
+            <a:r>
+              <a:rPr lang="es-AR" sz="1050" dirty="0">
+                <a:solidFill>
+                  <a:srgbClr val="5A7184"/>
+                </a:solidFill>
+                <a:latin typeface="Calibri" pitchFamily="34" charset="0"/>
+                <a:cs typeface="Calibri" pitchFamily="34" charset="-120"/>
+              </a:rPr>
+              <a:t>Identificación de las ideas que se esconden detrás de esos textos </a:t>
+            </a:r>
+          </a:p>
+          <a:p>
+            <a:pPr marL="342900" indent="-342900">
+              <a:spcAft>
+                <a:spcPts val="300"/>
+              </a:spcAft>
+              <a:buSzPct val="100000"/>
+              <a:buChar char="•"/>
+            </a:pPr>
+            <a:r>
+              <a:rPr lang="es-AR" sz="1050" dirty="0">
+                <a:solidFill>
+                  <a:srgbClr val="5A7184"/>
+                </a:solidFill>
+                <a:latin typeface="Calibri" pitchFamily="34" charset="0"/>
+                <a:cs typeface="Calibri" pitchFamily="34" charset="-120"/>
+              </a:rPr>
+              <a:t>Visualización de los sentimientos</a:t>
+            </a:r>
+          </a:p>
+        </p:txBody>
+      </p:sp>
+      <p:sp>
+        <p:nvSpPr>
+          <p:cNvPr id="12" name="Shape 10">
             <a:extLst>
               <a:ext uri="{FF2B5EF4-FFF2-40B4-BE49-F238E27FC236}">
-                <a16:creationId xmlns:a16="http://schemas.microsoft.com/office/drawing/2014/main" id="{E6DE9332-F056-1667-81EA-40CF3F965735}"/>
+                <a16:creationId xmlns:a16="http://schemas.microsoft.com/office/drawing/2014/main" id="{40BAB532-6DED-9994-540E-E80C865EF737}"/>
               </a:ext>
             </a:extLst>
           </p:cNvPr>
@@ -15019,87 +17755,38 @@
         </p:nvSpPr>
         <p:spPr>
           <a:xfrm>
-            <a:off x="5943600" y="1691640"/>
-            <a:ext cx="2560320" cy="1005840"/>
-          </a:xfrm>
-          <a:prstGeom prst="rect">
-            <a:avLst/>
-          </a:prstGeom>
-          <a:noFill/>
-          <a:ln/>
-        </p:spPr>
-        <p:txBody>
-          <a:bodyPr wrap="square" rtlCol="0" anchor="t"/>
-          <a:lstStyle/>
-          <a:p>
-            <a:pPr marL="0" indent="0" algn="ctr">
-              <a:lnSpc>
-                <a:spcPct val="130000"/>
-              </a:lnSpc>
-              <a:buNone/>
-            </a:pPr>
-            <a:r>
-              <a:rPr lang="es-AR" sz="1100" noProof="0" dirty="0">
-                <a:solidFill>
-                  <a:srgbClr val="5A7184"/>
-                </a:solidFill>
-                <a:latin typeface="Calibri" pitchFamily="34" charset="0"/>
-                <a:ea typeface="Calibri" pitchFamily="34" charset="-122"/>
-                <a:cs typeface="Calibri" pitchFamily="34" charset="-120"/>
-              </a:rPr>
-              <a:t>No hay problema si lo quieren usar y aprender por su cuenta. En el curso no lo vamos a ver, pero los </a:t>
-            </a:r>
-            <a:r>
-              <a:rPr lang="es-AR" sz="1100" noProof="0" dirty="0" err="1">
-                <a:solidFill>
-                  <a:srgbClr val="5A7184"/>
-                </a:solidFill>
-                <a:latin typeface="Calibri" pitchFamily="34" charset="0"/>
-                <a:ea typeface="Calibri" pitchFamily="34" charset="-122"/>
-                <a:cs typeface="Calibri" pitchFamily="34" charset="-120"/>
-              </a:rPr>
-              <a:t>TPs</a:t>
-            </a:r>
-            <a:r>
-              <a:rPr lang="es-AR" sz="1100" noProof="0" dirty="0">
-                <a:solidFill>
-                  <a:srgbClr val="5A7184"/>
-                </a:solidFill>
-                <a:latin typeface="Calibri" pitchFamily="34" charset="0"/>
-                <a:ea typeface="Calibri" pitchFamily="34" charset="-122"/>
-                <a:cs typeface="Calibri" pitchFamily="34" charset="-120"/>
-              </a:rPr>
-              <a:t> lo pueden hacer en Python. </a:t>
-            </a:r>
-          </a:p>
-          <a:p>
-            <a:pPr marL="0" indent="0" algn="ctr">
-              <a:lnSpc>
-                <a:spcPct val="130000"/>
-              </a:lnSpc>
-              <a:buNone/>
-            </a:pPr>
-            <a:r>
-              <a:rPr lang="es-AR" sz="1100" dirty="0">
-                <a:solidFill>
-                  <a:srgbClr val="5A7184"/>
-                </a:solidFill>
-                <a:latin typeface="Calibri" pitchFamily="34" charset="0"/>
-                <a:ea typeface="Calibri" pitchFamily="34" charset="-122"/>
-                <a:cs typeface="Calibri" pitchFamily="34" charset="-120"/>
-              </a:rPr>
-              <a:t>No pueden hacerlo en STATA (otra lógica)</a:t>
-            </a:r>
-            <a:endParaRPr lang="es-AR" sz="1100" noProof="0" dirty="0"/>
-          </a:p>
-        </p:txBody>
-      </p:sp>
-      <p:sp>
-        <p:nvSpPr>
-          <p:cNvPr id="25" name="Shape 23">
+            <a:off x="640080" y="2743200"/>
+            <a:ext cx="3886200" cy="1645920"/>
+          </a:xfrm>
+          <a:prstGeom prst="rect">
+            <a:avLst/>
+          </a:prstGeom>
+          <a:solidFill>
+            <a:srgbClr val="FFFFFF"/>
+          </a:solidFill>
+          <a:ln/>
+          <a:effectLst>
+            <a:outerShdw blurRad="76200" dist="25400" dir="8100000" algn="bl" rotWithShape="0">
+              <a:srgbClr val="000000">
+                <a:alpha val="12000"/>
+              </a:srgbClr>
+            </a:outerShdw>
+          </a:effectLst>
+        </p:spPr>
+        <p:txBody>
+          <a:bodyPr/>
+          <a:lstStyle/>
+          <a:p>
+            <a:endParaRPr lang="es-AR" noProof="0" dirty="0"/>
+          </a:p>
+        </p:txBody>
+      </p:sp>
+      <p:sp>
+        <p:nvSpPr>
+          <p:cNvPr id="13" name="Shape 11">
             <a:extLst>
               <a:ext uri="{FF2B5EF4-FFF2-40B4-BE49-F238E27FC236}">
-                <a16:creationId xmlns:a16="http://schemas.microsoft.com/office/drawing/2014/main" id="{FBA7AC57-8517-CCE6-95B5-BD461C1C5BA3}"/>
+                <a16:creationId xmlns:a16="http://schemas.microsoft.com/office/drawing/2014/main" id="{7A1D3598-5203-B817-A103-B1861A867D21}"/>
               </a:ext>
             </a:extLst>
           </p:cNvPr>
@@ -15108,6 +17795,393 @@
         </p:nvSpPr>
         <p:spPr>
           <a:xfrm>
+            <a:off x="640080" y="2743200"/>
+            <a:ext cx="54864" cy="1645920"/>
+          </a:xfrm>
+          <a:prstGeom prst="rect">
+            <a:avLst/>
+          </a:prstGeom>
+          <a:solidFill>
+            <a:srgbClr val="1A6B8A"/>
+          </a:solidFill>
+          <a:ln/>
+        </p:spPr>
+        <p:txBody>
+          <a:bodyPr/>
+          <a:lstStyle/>
+          <a:p>
+            <a:endParaRPr lang="es-AR" noProof="0" dirty="0"/>
+          </a:p>
+        </p:txBody>
+      </p:sp>
+      <p:sp>
+        <p:nvSpPr>
+          <p:cNvPr id="14" name="Text 12">
+            <a:extLst>
+              <a:ext uri="{FF2B5EF4-FFF2-40B4-BE49-F238E27FC236}">
+                <a16:creationId xmlns:a16="http://schemas.microsoft.com/office/drawing/2014/main" id="{A17A0900-FA97-C951-FB0E-F4863D824290}"/>
+              </a:ext>
+            </a:extLst>
+          </p:cNvPr>
+          <p:cNvSpPr/>
+          <p:nvPr/>
+        </p:nvSpPr>
+        <p:spPr>
+          <a:xfrm>
+            <a:off x="868680" y="2816352"/>
+            <a:ext cx="3474720" cy="320040"/>
+          </a:xfrm>
+          <a:prstGeom prst="rect">
+            <a:avLst/>
+          </a:prstGeom>
+          <a:noFill/>
+          <a:ln/>
+        </p:spPr>
+        <p:txBody>
+          <a:bodyPr wrap="square" lIns="0" tIns="0" rIns="0" bIns="0" rtlCol="0" anchor="ctr"/>
+          <a:lstStyle/>
+          <a:p>
+            <a:pPr marL="0" indent="0" algn="l">
+              <a:buNone/>
+            </a:pPr>
+            <a:r>
+              <a:rPr lang="es-AR" sz="1400" b="1" noProof="0" dirty="0">
+                <a:solidFill>
+                  <a:srgbClr val="0F2B46"/>
+                </a:solidFill>
+                <a:latin typeface="Georgia" pitchFamily="34" charset="0"/>
+                <a:ea typeface="Georgia" pitchFamily="34" charset="-122"/>
+                <a:cs typeface="Georgia" pitchFamily="34" charset="-120"/>
+              </a:rPr>
+              <a:t>Otras cosas </a:t>
+            </a:r>
+            <a:endParaRPr lang="es-AR" sz="1400" noProof="0" dirty="0"/>
+          </a:p>
+        </p:txBody>
+      </p:sp>
+      <p:sp>
+        <p:nvSpPr>
+          <p:cNvPr id="15" name="Text 13">
+            <a:extLst>
+              <a:ext uri="{FF2B5EF4-FFF2-40B4-BE49-F238E27FC236}">
+                <a16:creationId xmlns:a16="http://schemas.microsoft.com/office/drawing/2014/main" id="{9524D236-47B7-CBCD-57E1-7269A0F4F460}"/>
+              </a:ext>
+            </a:extLst>
+          </p:cNvPr>
+          <p:cNvSpPr/>
+          <p:nvPr/>
+        </p:nvSpPr>
+        <p:spPr>
+          <a:xfrm>
+            <a:off x="868680" y="3154680"/>
+            <a:ext cx="3474720" cy="1143000"/>
+          </a:xfrm>
+          <a:prstGeom prst="rect">
+            <a:avLst/>
+          </a:prstGeom>
+          <a:noFill/>
+          <a:ln/>
+        </p:spPr>
+        <p:txBody>
+          <a:bodyPr wrap="square" rtlCol="0" anchor="t"/>
+          <a:lstStyle/>
+          <a:p>
+            <a:pPr marL="342900" indent="-342900">
+              <a:spcAft>
+                <a:spcPts val="300"/>
+              </a:spcAft>
+              <a:buSzPct val="100000"/>
+              <a:buChar char="•"/>
+            </a:pPr>
+            <a:r>
+              <a:rPr lang="es-AR" sz="1050" noProof="0" dirty="0">
+                <a:solidFill>
+                  <a:srgbClr val="5A7184"/>
+                </a:solidFill>
+                <a:latin typeface="Calibri" pitchFamily="34" charset="0"/>
+                <a:ea typeface="Calibri" pitchFamily="34" charset="-122"/>
+                <a:cs typeface="Calibri" pitchFamily="34" charset="-120"/>
+              </a:rPr>
+              <a:t>Trabajo intensivo de arreglo de textos</a:t>
+            </a:r>
+            <a:endParaRPr lang="es-AR" sz="1050" noProof="0" dirty="0"/>
+          </a:p>
+          <a:p>
+            <a:pPr marL="342900" indent="-342900">
+              <a:spcAft>
+                <a:spcPts val="300"/>
+              </a:spcAft>
+              <a:buSzPct val="100000"/>
+              <a:buChar char="•"/>
+            </a:pPr>
+            <a:r>
+              <a:rPr lang="es-AR" sz="1050" noProof="0" dirty="0">
+                <a:solidFill>
+                  <a:srgbClr val="5A7184"/>
+                </a:solidFill>
+                <a:latin typeface="Calibri" pitchFamily="34" charset="0"/>
+                <a:ea typeface="Calibri" pitchFamily="34" charset="-122"/>
+                <a:cs typeface="Calibri" pitchFamily="34" charset="-120"/>
+              </a:rPr>
+              <a:t>SQL y bases de datos </a:t>
+            </a:r>
+            <a:endParaRPr lang="es-AR" sz="1050" noProof="0" dirty="0"/>
+          </a:p>
+          <a:p>
+            <a:pPr marL="342900" indent="-342900">
+              <a:spcAft>
+                <a:spcPts val="300"/>
+              </a:spcAft>
+              <a:buSzPct val="100000"/>
+              <a:buChar char="•"/>
+            </a:pPr>
+            <a:r>
+              <a:rPr lang="es-AR" sz="1050" noProof="0" dirty="0">
+                <a:solidFill>
+                  <a:srgbClr val="5A7184"/>
+                </a:solidFill>
+                <a:latin typeface="Calibri" pitchFamily="34" charset="0"/>
+                <a:ea typeface="Calibri" pitchFamily="34" charset="-122"/>
+                <a:cs typeface="Calibri" pitchFamily="34" charset="-120"/>
+              </a:rPr>
+              <a:t>Gráficos interactivos</a:t>
+            </a:r>
+            <a:endParaRPr lang="es-AR" sz="1050" noProof="0" dirty="0"/>
+          </a:p>
+          <a:p>
+            <a:pPr marL="342900" indent="-342900">
+              <a:spcAft>
+                <a:spcPts val="300"/>
+              </a:spcAft>
+              <a:buSzPct val="100000"/>
+              <a:buChar char="•"/>
+            </a:pPr>
+            <a:endParaRPr lang="es-AR" sz="1050" noProof="0" dirty="0"/>
+          </a:p>
+        </p:txBody>
+      </p:sp>
+      <p:sp>
+        <p:nvSpPr>
+          <p:cNvPr id="16" name="Shape 14">
+            <a:extLst>
+              <a:ext uri="{FF2B5EF4-FFF2-40B4-BE49-F238E27FC236}">
+                <a16:creationId xmlns:a16="http://schemas.microsoft.com/office/drawing/2014/main" id="{C18C46E3-4936-D3EB-2FB1-3DEB0EDAC46D}"/>
+              </a:ext>
+            </a:extLst>
+          </p:cNvPr>
+          <p:cNvSpPr/>
+          <p:nvPr/>
+        </p:nvSpPr>
+        <p:spPr>
+          <a:xfrm>
+            <a:off x="4800600" y="2743200"/>
+            <a:ext cx="3886200" cy="1645920"/>
+          </a:xfrm>
+          <a:prstGeom prst="rect">
+            <a:avLst/>
+          </a:prstGeom>
+          <a:solidFill>
+            <a:srgbClr val="FFFFFF"/>
+          </a:solidFill>
+          <a:ln/>
+          <a:effectLst>
+            <a:outerShdw blurRad="76200" dist="25400" dir="8100000" algn="bl" rotWithShape="0">
+              <a:srgbClr val="000000">
+                <a:alpha val="12000"/>
+              </a:srgbClr>
+            </a:outerShdw>
+          </a:effectLst>
+        </p:spPr>
+        <p:txBody>
+          <a:bodyPr/>
+          <a:lstStyle/>
+          <a:p>
+            <a:endParaRPr lang="es-AR" noProof="0" dirty="0"/>
+          </a:p>
+        </p:txBody>
+      </p:sp>
+      <p:sp>
+        <p:nvSpPr>
+          <p:cNvPr id="17" name="Shape 15">
+            <a:extLst>
+              <a:ext uri="{FF2B5EF4-FFF2-40B4-BE49-F238E27FC236}">
+                <a16:creationId xmlns:a16="http://schemas.microsoft.com/office/drawing/2014/main" id="{AD7C95A7-A8A7-8C4C-9E35-CEAE7FE7A1B7}"/>
+              </a:ext>
+            </a:extLst>
+          </p:cNvPr>
+          <p:cNvSpPr/>
+          <p:nvPr/>
+        </p:nvSpPr>
+        <p:spPr>
+          <a:xfrm>
+            <a:off x="4800600" y="2743200"/>
+            <a:ext cx="54864" cy="1645920"/>
+          </a:xfrm>
+          <a:prstGeom prst="rect">
+            <a:avLst/>
+          </a:prstGeom>
+          <a:solidFill>
+            <a:srgbClr val="2E9EBF"/>
+          </a:solidFill>
+          <a:ln/>
+        </p:spPr>
+        <p:txBody>
+          <a:bodyPr/>
+          <a:lstStyle/>
+          <a:p>
+            <a:endParaRPr lang="es-AR" noProof="0" dirty="0"/>
+          </a:p>
+        </p:txBody>
+      </p:sp>
+      <p:sp>
+        <p:nvSpPr>
+          <p:cNvPr id="18" name="Text 16">
+            <a:extLst>
+              <a:ext uri="{FF2B5EF4-FFF2-40B4-BE49-F238E27FC236}">
+                <a16:creationId xmlns:a16="http://schemas.microsoft.com/office/drawing/2014/main" id="{25F4FEA9-A3F4-6596-7958-8CD63BCEE55D}"/>
+              </a:ext>
+            </a:extLst>
+          </p:cNvPr>
+          <p:cNvSpPr/>
+          <p:nvPr/>
+        </p:nvSpPr>
+        <p:spPr>
+          <a:xfrm>
+            <a:off x="5029200" y="2816352"/>
+            <a:ext cx="3474720" cy="320040"/>
+          </a:xfrm>
+          <a:prstGeom prst="rect">
+            <a:avLst/>
+          </a:prstGeom>
+          <a:noFill/>
+          <a:ln/>
+        </p:spPr>
+        <p:txBody>
+          <a:bodyPr wrap="square" lIns="0" tIns="0" rIns="0" bIns="0" rtlCol="0" anchor="ctr"/>
+          <a:lstStyle/>
+          <a:p>
+            <a:pPr marL="0" indent="0" algn="l">
+              <a:buNone/>
+            </a:pPr>
+            <a:r>
+              <a:rPr lang="es-AR" sz="1400" b="1" noProof="0" dirty="0">
+                <a:solidFill>
+                  <a:srgbClr val="0F2B46"/>
+                </a:solidFill>
+                <a:latin typeface="Georgia" pitchFamily="34" charset="0"/>
+                <a:ea typeface="Georgia" pitchFamily="34" charset="-122"/>
+                <a:cs typeface="Georgia" pitchFamily="34" charset="-120"/>
+              </a:rPr>
+              <a:t>Análisis geográfico</a:t>
+            </a:r>
+            <a:endParaRPr lang="es-AR" sz="1400" noProof="0" dirty="0"/>
+          </a:p>
+        </p:txBody>
+      </p:sp>
+      <p:sp>
+        <p:nvSpPr>
+          <p:cNvPr id="19" name="Text 17">
+            <a:extLst>
+              <a:ext uri="{FF2B5EF4-FFF2-40B4-BE49-F238E27FC236}">
+                <a16:creationId xmlns:a16="http://schemas.microsoft.com/office/drawing/2014/main" id="{6B0B56F4-495E-A70A-0621-D75E832DE38A}"/>
+              </a:ext>
+            </a:extLst>
+          </p:cNvPr>
+          <p:cNvSpPr/>
+          <p:nvPr/>
+        </p:nvSpPr>
+        <p:spPr>
+          <a:xfrm>
+            <a:off x="5029200" y="3154680"/>
+            <a:ext cx="3474720" cy="1143000"/>
+          </a:xfrm>
+          <a:prstGeom prst="rect">
+            <a:avLst/>
+          </a:prstGeom>
+          <a:noFill/>
+          <a:ln/>
+        </p:spPr>
+        <p:txBody>
+          <a:bodyPr wrap="square" rtlCol="0" anchor="t"/>
+          <a:lstStyle/>
+          <a:p>
+            <a:pPr marL="342900" indent="-342900">
+              <a:spcAft>
+                <a:spcPts val="300"/>
+              </a:spcAft>
+              <a:buSzPct val="100000"/>
+              <a:buChar char="•"/>
+            </a:pPr>
+            <a:r>
+              <a:rPr lang="es-AR" sz="1050" dirty="0">
+                <a:solidFill>
+                  <a:srgbClr val="5A7184"/>
+                </a:solidFill>
+                <a:latin typeface="Calibri" pitchFamily="34" charset="0"/>
+                <a:cs typeface="Calibri" pitchFamily="34" charset="-120"/>
+              </a:rPr>
+              <a:t>Trabajo con mapas programático</a:t>
+            </a:r>
+            <a:endParaRPr lang="es-AR" sz="1050" noProof="0" dirty="0"/>
+          </a:p>
+          <a:p>
+            <a:pPr marL="342900" indent="-342900">
+              <a:spcAft>
+                <a:spcPts val="300"/>
+              </a:spcAft>
+              <a:buSzPct val="100000"/>
+              <a:buChar char="•"/>
+            </a:pPr>
+            <a:r>
+              <a:rPr lang="es-AR" sz="1050" noProof="0" dirty="0">
+                <a:solidFill>
+                  <a:srgbClr val="5A7184"/>
+                </a:solidFill>
+                <a:latin typeface="Calibri" pitchFamily="34" charset="0"/>
+                <a:ea typeface="Calibri" pitchFamily="34" charset="-122"/>
+                <a:cs typeface="Calibri" pitchFamily="34" charset="-120"/>
+              </a:rPr>
+              <a:t>Georreferenciación</a:t>
+            </a:r>
+            <a:endParaRPr lang="es-AR" sz="1050" noProof="0" dirty="0"/>
+          </a:p>
+          <a:p>
+            <a:pPr marL="342900" indent="-342900">
+              <a:spcAft>
+                <a:spcPts val="300"/>
+              </a:spcAft>
+              <a:buSzPct val="100000"/>
+              <a:buChar char="•"/>
+            </a:pPr>
+            <a:r>
+              <a:rPr lang="es-AR" sz="1050" noProof="0" dirty="0">
+                <a:solidFill>
+                  <a:srgbClr val="5A7184"/>
+                </a:solidFill>
+                <a:latin typeface="Calibri" pitchFamily="34" charset="0"/>
+                <a:ea typeface="Calibri" pitchFamily="34" charset="-122"/>
+                <a:cs typeface="Calibri" pitchFamily="34" charset="-120"/>
+              </a:rPr>
+              <a:t>Coordenadas y vinculación entre datos y aspectos geográficos</a:t>
+            </a:r>
+            <a:endParaRPr lang="es-AR" sz="1050" noProof="0" dirty="0"/>
+          </a:p>
+        </p:txBody>
+      </p:sp>
+      <p:sp>
+        <p:nvSpPr>
+          <p:cNvPr id="20" name="Shape 18">
+            <a:extLst>
+              <a:ext uri="{FF2B5EF4-FFF2-40B4-BE49-F238E27FC236}">
+                <a16:creationId xmlns:a16="http://schemas.microsoft.com/office/drawing/2014/main" id="{A28392F7-0A7F-BFBE-2921-193B6A5DAAF2}"/>
+              </a:ext>
+            </a:extLst>
+          </p:cNvPr>
+          <p:cNvSpPr/>
+          <p:nvPr/>
+        </p:nvSpPr>
+        <p:spPr>
+          <a:xfrm>
             <a:off x="0" y="4709160"/>
             <a:ext cx="9144000" cy="434340"/>
           </a:xfrm>
@@ -15129,10 +18203,10 @@
       </p:sp>
       <p:sp>
         <p:nvSpPr>
-          <p:cNvPr id="26" name="Text 24">
+          <p:cNvPr id="21" name="Text 19">
             <a:extLst>
               <a:ext uri="{FF2B5EF4-FFF2-40B4-BE49-F238E27FC236}">
-                <a16:creationId xmlns:a16="http://schemas.microsoft.com/office/drawing/2014/main" id="{4740BD2E-078D-3D51-B416-12B6FD6FABDB}"/>
+                <a16:creationId xmlns:a16="http://schemas.microsoft.com/office/drawing/2014/main" id="{9ADC6889-B7F2-9473-5768-AE79BABCB73C}"/>
               </a:ext>
             </a:extLst>
           </p:cNvPr>
@@ -15174,10 +18248,10 @@
       </p:sp>
       <p:sp>
         <p:nvSpPr>
-          <p:cNvPr id="27" name="Text 25">
+          <p:cNvPr id="22" name="Text 20">
             <a:extLst>
               <a:ext uri="{FF2B5EF4-FFF2-40B4-BE49-F238E27FC236}">
-                <a16:creationId xmlns:a16="http://schemas.microsoft.com/office/drawing/2014/main" id="{E937E543-BFC2-89D6-EFF2-03BCE744EBFC}"/>
+                <a16:creationId xmlns:a16="http://schemas.microsoft.com/office/drawing/2014/main" id="{EC59253F-A5FC-EDBA-CBA7-5231CD625562}"/>
               </a:ext>
             </a:extLst>
           </p:cNvPr>
@@ -15211,7 +18285,7 @@
                 <a:ea typeface="Calibri" pitchFamily="34" charset="-122"/>
                 <a:cs typeface="Calibri" pitchFamily="34" charset="-120"/>
               </a:rPr>
-              <a:t>6 / 11</a:t>
+              <a:t>5 / 11</a:t>
             </a:r>
             <a:endParaRPr lang="es-AR" sz="800" noProof="0" dirty="0"/>
           </a:p>
@@ -15220,7 +18294,7 @@
     </p:spTree>
     <p:extLst>
       <p:ext uri="{BB962C8B-B14F-4D97-AF65-F5344CB8AC3E}">
-        <p14:creationId xmlns:p14="http://schemas.microsoft.com/office/powerpoint/2010/main" val="3904195941"/>
+        <p14:creationId xmlns:p14="http://schemas.microsoft.com/office/powerpoint/2010/main" val="3429869928"/>
       </p:ext>
     </p:extLst>
   </p:cSld>
